--- a/output/wordlabs-use-3day.pptx
+++ b/output/wordlabs-use-3day.pptx
@@ -6102,7 +6102,7 @@
                 <a:ea typeface="Calibri" pitchFamily="34" charset="-122"/>
                 <a:cs typeface="Calibri" pitchFamily="34" charset="-120"/>
               </a:rPr>
-              <a:t> containers when packing your lunch.</a:t>
+              <a:t> your shopping bags when you visit the supermarket.</a:t>
             </a:r>
             <a:endParaRPr lang="en-US" sz="1800" dirty="0"/>
           </a:p>
@@ -16283,7 +16283,7 @@
                 <a:ea typeface="Trebuchet MS" pitchFamily="34" charset="-122"/>
                 <a:cs typeface="Trebuchet MS" pitchFamily="34" charset="-120"/>
               </a:rPr>
-              <a:t>1</a:t>
+              <a:t>2</a:t>
             </a:r>
             <a:pPr algn="ctr" indent="0" marL="0">
               <a:buNone/>
@@ -16297,7 +16297,7 @@
                 <a:ea typeface="Trebuchet MS" pitchFamily="34" charset="-122"/>
                 <a:cs typeface="Trebuchet MS" pitchFamily="34" charset="-120"/>
               </a:rPr>
-              <a:t>  punctuation mark</a:t>
+              <a:t>  punctuation marks</a:t>
             </a:r>
             <a:endParaRPr lang="en-US" sz="2800" dirty="0"/>
           </a:p>
@@ -16749,7 +16749,7 @@
                 <a:ea typeface="Calibri" pitchFamily="34" charset="-122"/>
                 <a:cs typeface="Calibri" pitchFamily="34" charset="-120"/>
               </a:rPr>
-              <a:t> for the planet, so we should </a:t>
+              <a:t> for our planet; we must stop the </a:t>
             </a:r>
             <a:pPr algn="l" indent="0" marL="0">
               <a:buNone/>
@@ -16780,7 +16780,7 @@
                 <a:ea typeface="Calibri" pitchFamily="34" charset="-122"/>
                 <a:cs typeface="Calibri" pitchFamily="34" charset="-120"/>
               </a:rPr>
-              <a:t> it as little as possible.</a:t>
+              <a:t> of resources.</a:t>
             </a:r>
             <a:endParaRPr lang="en-US" sz="1800" dirty="0"/>
           </a:p>
@@ -33049,7 +33049,7 @@
                 <a:ea typeface="Trebuchet MS" pitchFamily="34" charset="-122"/>
                 <a:cs typeface="Trebuchet MS" pitchFamily="34" charset="-120"/>
               </a:rPr>
-              <a:t>re-</a:t>
+              <a:t>mis-</a:t>
             </a:r>
             <a:endParaRPr lang="en-US" sz="1300" dirty="0"/>
           </a:p>
@@ -33241,7 +33241,7 @@
                 <a:ea typeface="Trebuchet MS" pitchFamily="34" charset="-122"/>
                 <a:cs typeface="Trebuchet MS" pitchFamily="34" charset="-120"/>
               </a:rPr>
-              <a:t>mis-</a:t>
+              <a:t>re-</a:t>
             </a:r>
             <a:endParaRPr lang="en-US" sz="1300" dirty="0"/>
           </a:p>
@@ -33394,7 +33394,7 @@
                 <a:ea typeface="Trebuchet MS" pitchFamily="34" charset="-122"/>
                 <a:cs typeface="Trebuchet MS" pitchFamily="34" charset="-120"/>
               </a:rPr>
-              <a:t>a-</a:t>
+              <a:t>ab-</a:t>
             </a:r>
             <a:endParaRPr lang="en-US" sz="1300" dirty="0"/>
           </a:p>
@@ -33483,7 +33483,7 @@
                 <a:ea typeface="Trebuchet MS" pitchFamily="34" charset="-122"/>
                 <a:cs typeface="Trebuchet MS" pitchFamily="34" charset="-120"/>
               </a:rPr>
-              <a:t>-age</a:t>
+              <a:t>-er</a:t>
             </a:r>
             <a:endParaRPr lang="en-US" sz="1300" dirty="0"/>
           </a:p>
@@ -33547,7 +33547,7 @@
                 <a:ea typeface="Trebuchet MS" pitchFamily="34" charset="-122"/>
                 <a:cs typeface="Trebuchet MS" pitchFamily="34" charset="-120"/>
               </a:rPr>
-              <a:t>over-</a:t>
+              <a:t>dis-</a:t>
             </a:r>
             <a:endParaRPr lang="en-US" sz="1300" dirty="0"/>
           </a:p>
@@ -33636,7 +33636,7 @@
                 <a:ea typeface="Trebuchet MS" pitchFamily="34" charset="-122"/>
                 <a:cs typeface="Trebuchet MS" pitchFamily="34" charset="-120"/>
               </a:rPr>
-              <a:t>-er</a:t>
+              <a:t>-age</a:t>
             </a:r>
             <a:endParaRPr lang="en-US" sz="1300" dirty="0"/>
           </a:p>
@@ -33700,7 +33700,7 @@
                 <a:ea typeface="Trebuchet MS" pitchFamily="34" charset="-122"/>
                 <a:cs typeface="Trebuchet MS" pitchFamily="34" charset="-120"/>
               </a:rPr>
-              <a:t>dis-</a:t>
+              <a:t>over-</a:t>
             </a:r>
             <a:endParaRPr lang="en-US" sz="1300" dirty="0"/>
           </a:p>
@@ -33894,7 +33894,7 @@
                 <a:ea typeface="Trebuchet MS" pitchFamily="34" charset="-122"/>
                 <a:cs typeface="Trebuchet MS" pitchFamily="34" charset="-120"/>
               </a:rPr>
-              <a:t>reuse</a:t>
+              <a:t>useful</a:t>
             </a:r>
             <a:endParaRPr lang="en-US" sz="1200" dirty="0"/>
           </a:p>
@@ -33960,7 +33960,7 @@
                 <a:ea typeface="Trebuchet MS" pitchFamily="34" charset="-122"/>
                 <a:cs typeface="Trebuchet MS" pitchFamily="34" charset="-120"/>
               </a:rPr>
-              <a:t>misuse</a:t>
+              <a:t>useless</a:t>
             </a:r>
             <a:endParaRPr lang="en-US" sz="1200" dirty="0"/>
           </a:p>
@@ -34026,7 +34026,7 @@
                 <a:ea typeface="Trebuchet MS" pitchFamily="34" charset="-122"/>
                 <a:cs typeface="Trebuchet MS" pitchFamily="34" charset="-120"/>
               </a:rPr>
-              <a:t>useful</a:t>
+              <a:t>misuse</a:t>
             </a:r>
             <a:endParaRPr lang="en-US" sz="1200" dirty="0"/>
           </a:p>
@@ -34092,7 +34092,7 @@
                 <a:ea typeface="Trebuchet MS" pitchFamily="34" charset="-122"/>
                 <a:cs typeface="Trebuchet MS" pitchFamily="34" charset="-120"/>
               </a:rPr>
-              <a:t>useless</a:t>
+              <a:t>reuse</a:t>
             </a:r>
             <a:endParaRPr lang="en-US" sz="1200" dirty="0"/>
           </a:p>
@@ -34158,7 +34158,7 @@
                 <a:ea typeface="Trebuchet MS" pitchFamily="34" charset="-122"/>
                 <a:cs typeface="Trebuchet MS" pitchFamily="34" charset="-120"/>
               </a:rPr>
-              <a:t>usage</a:t>
+              <a:t>overuse</a:t>
             </a:r>
             <a:endParaRPr lang="en-US" sz="1200" dirty="0"/>
           </a:p>
@@ -34224,7 +34224,7 @@
                 <a:ea typeface="Trebuchet MS" pitchFamily="34" charset="-122"/>
                 <a:cs typeface="Trebuchet MS" pitchFamily="34" charset="-120"/>
               </a:rPr>
-              <a:t>user</a:t>
+              <a:t>usage</a:t>
             </a:r>
             <a:endParaRPr lang="en-US" sz="1200" dirty="0"/>
           </a:p>
@@ -34356,7 +34356,7 @@
                 <a:ea typeface="Trebuchet MS" pitchFamily="34" charset="-122"/>
                 <a:cs typeface="Trebuchet MS" pitchFamily="34" charset="-120"/>
               </a:rPr>
-              <a:t>overuse</a:t>
+              <a:t>abuse</a:t>
             </a:r>
             <a:endParaRPr lang="en-US" sz="1200" dirty="0"/>
           </a:p>
@@ -35544,7 +35544,7 @@
                 <a:ea typeface="Calibri" pitchFamily="34" charset="-122"/>
                 <a:cs typeface="Calibri" pitchFamily="34" charset="-120"/>
               </a:rPr>
-              <a:t>1.  The root 'use' comes from Latin.</a:t>
+              <a:t>1.  The suffix 'ful' added to 'use' creates a word meaning full of use or helpful.</a:t>
             </a:r>
             <a:endParaRPr lang="en-US" sz="1300" dirty="0"/>
           </a:p>
@@ -35683,7 +35683,7 @@
                 <a:ea typeface="Calibri" pitchFamily="34" charset="-122"/>
                 <a:cs typeface="Calibri" pitchFamily="34" charset="-120"/>
               </a:rPr>
-              <a:t>2.  The word 'useless' means something is very helpful.</a:t>
+              <a:t>2.  Adding the prefix 're' to 'use' makes the word 'reuse', meaning to use again.</a:t>
             </a:r>
             <a:endParaRPr lang="en-US" sz="1300" dirty="0"/>
           </a:p>
@@ -35706,11 +35706,11 @@
             </a:avLst>
           </a:prstGeom>
           <a:solidFill>
-            <a:srgbClr val="FEE2E2"/>
-          </a:solidFill>
-          <a:ln w="12700">
-            <a:solidFill>
-              <a:srgbClr val="DC2626"/>
+            <a:srgbClr val="DCFCE7"/>
+          </a:solidFill>
+          <a:ln w="12700">
+            <a:solidFill>
+              <a:srgbClr val="16A34A"/>
             </a:solidFill>
             <a:prstDash val="solid"/>
           </a:ln>
@@ -35743,13 +35743,13 @@
             <a:r>
               <a:rPr lang="en-US" sz="1100" b="1" dirty="0">
                 <a:solidFill>
-                  <a:srgbClr val="DC2626"/>
+                  <a:srgbClr val="16A34A"/>
                 </a:solidFill>
                 <a:latin typeface="Trebuchet MS" pitchFamily="34" charset="0"/>
                 <a:ea typeface="Trebuchet MS" pitchFamily="34" charset="-122"/>
                 <a:cs typeface="Trebuchet MS" pitchFamily="34" charset="-120"/>
               </a:rPr>
-              <a:t>FALSE</a:t>
+              <a:t>TRUE</a:t>
             </a:r>
             <a:endParaRPr lang="en-US" sz="1100" dirty="0"/>
           </a:p>
@@ -35822,7 +35822,7 @@
                 <a:ea typeface="Calibri" pitchFamily="34" charset="-122"/>
                 <a:cs typeface="Calibri" pitchFamily="34" charset="-120"/>
               </a:rPr>
-              <a:t>3.  The prefix 'mis' in 'misuse' means wrongly or badly.</a:t>
+              <a:t>3.  The root 'use' comes from Latin.</a:t>
             </a:r>
             <a:endParaRPr lang="en-US" sz="1300" dirty="0"/>
           </a:p>
@@ -35961,7 +35961,7 @@
                 <a:ea typeface="Calibri" pitchFamily="34" charset="-122"/>
                 <a:cs typeface="Calibri" pitchFamily="34" charset="-120"/>
               </a:rPr>
-              <a:t>4.  The word 'reuse' means to use something again.</a:t>
+              <a:t>4.  The word 'useless' means very helpful and important.</a:t>
             </a:r>
             <a:endParaRPr lang="en-US" sz="1300" dirty="0"/>
           </a:p>
@@ -35984,11 +35984,11 @@
             </a:avLst>
           </a:prstGeom>
           <a:solidFill>
-            <a:srgbClr val="DCFCE7"/>
-          </a:solidFill>
-          <a:ln w="12700">
-            <a:solidFill>
-              <a:srgbClr val="16A34A"/>
+            <a:srgbClr val="FEE2E2"/>
+          </a:solidFill>
+          <a:ln w="12700">
+            <a:solidFill>
+              <a:srgbClr val="DC2626"/>
             </a:solidFill>
             <a:prstDash val="solid"/>
           </a:ln>
@@ -36021,13 +36021,13 @@
             <a:r>
               <a:rPr lang="en-US" sz="1100" b="1" dirty="0">
                 <a:solidFill>
-                  <a:srgbClr val="16A34A"/>
+                  <a:srgbClr val="DC2626"/>
                 </a:solidFill>
                 <a:latin typeface="Trebuchet MS" pitchFamily="34" charset="0"/>
                 <a:ea typeface="Trebuchet MS" pitchFamily="34" charset="-122"/>
                 <a:cs typeface="Trebuchet MS" pitchFamily="34" charset="-120"/>
               </a:rPr>
-              <a:t>TRUE</a:t>
+              <a:t>FALSE</a:t>
             </a:r>
             <a:endParaRPr lang="en-US" sz="1100" dirty="0"/>
           </a:p>
@@ -36100,7 +36100,7 @@
                 <a:ea typeface="Calibri" pitchFamily="34" charset="-122"/>
                 <a:cs typeface="Calibri" pitchFamily="34" charset="-120"/>
               </a:rPr>
-              <a:t>5.  The suffix '-ful' in 'useful' means without.</a:t>
+              <a:t>5.  The word 'misuse' means to use something in the best possible way.</a:t>
             </a:r>
             <a:endParaRPr lang="en-US" sz="1300" dirty="0"/>
           </a:p>
@@ -36739,7 +36739,7 @@
                 <a:ea typeface="Trebuchet MS" pitchFamily="34" charset="-122"/>
                 <a:cs typeface="Trebuchet MS" pitchFamily="34" charset="-120"/>
               </a:rPr>
-              <a:t>reuse</a:t>
+              <a:t>useful</a:t>
             </a:r>
             <a:endParaRPr lang="en-US" sz="1300" dirty="0"/>
           </a:p>
@@ -36805,7 +36805,7 @@
                 <a:ea typeface="Trebuchet MS" pitchFamily="34" charset="-122"/>
                 <a:cs typeface="Trebuchet MS" pitchFamily="34" charset="-120"/>
               </a:rPr>
-              <a:t>misuse</a:t>
+              <a:t>useless</a:t>
             </a:r>
             <a:endParaRPr lang="en-US" sz="1300" dirty="0"/>
           </a:p>
@@ -36871,7 +36871,7 @@
                 <a:ea typeface="Trebuchet MS" pitchFamily="34" charset="-122"/>
                 <a:cs typeface="Trebuchet MS" pitchFamily="34" charset="-120"/>
               </a:rPr>
-              <a:t>useful</a:t>
+              <a:t>misuse</a:t>
             </a:r>
             <a:endParaRPr lang="en-US" sz="1300" dirty="0"/>
           </a:p>
@@ -36937,7 +36937,7 @@
                 <a:ea typeface="Trebuchet MS" pitchFamily="34" charset="-122"/>
                 <a:cs typeface="Trebuchet MS" pitchFamily="34" charset="-120"/>
               </a:rPr>
-              <a:t>useless</a:t>
+              <a:t>reuse</a:t>
             </a:r>
             <a:endParaRPr lang="en-US" sz="1300" dirty="0"/>
           </a:p>
@@ -37003,7 +37003,7 @@
                 <a:ea typeface="Trebuchet MS" pitchFamily="34" charset="-122"/>
                 <a:cs typeface="Trebuchet MS" pitchFamily="34" charset="-120"/>
               </a:rPr>
-              <a:t>usage</a:t>
+              <a:t>overuse</a:t>
             </a:r>
             <a:endParaRPr lang="en-US" sz="1300" dirty="0"/>
           </a:p>
@@ -37069,7 +37069,7 @@
                 <a:ea typeface="Trebuchet MS" pitchFamily="34" charset="-122"/>
                 <a:cs typeface="Trebuchet MS" pitchFamily="34" charset="-120"/>
               </a:rPr>
-              <a:t>user</a:t>
+              <a:t>usage</a:t>
             </a:r>
             <a:endParaRPr lang="en-US" sz="1300" dirty="0"/>
           </a:p>
@@ -37728,7 +37728,7 @@
                 <a:ea typeface="Trebuchet MS" pitchFamily="34" charset="-122"/>
                 <a:cs typeface="Trebuchet MS" pitchFamily="34" charset="-120"/>
               </a:rPr>
-              <a:t>re-</a:t>
+              <a:t>mis-</a:t>
             </a:r>
             <a:endParaRPr lang="en-US" sz="1300" dirty="0"/>
           </a:p>
@@ -37920,7 +37920,7 @@
                 <a:ea typeface="Trebuchet MS" pitchFamily="34" charset="-122"/>
                 <a:cs typeface="Trebuchet MS" pitchFamily="34" charset="-120"/>
               </a:rPr>
-              <a:t>mis-</a:t>
+              <a:t>re-</a:t>
             </a:r>
             <a:endParaRPr lang="en-US" sz="1300" dirty="0"/>
           </a:p>
@@ -38073,7 +38073,7 @@
                 <a:ea typeface="Trebuchet MS" pitchFamily="34" charset="-122"/>
                 <a:cs typeface="Trebuchet MS" pitchFamily="34" charset="-120"/>
               </a:rPr>
-              <a:t>a-</a:t>
+              <a:t>ab-</a:t>
             </a:r>
             <a:endParaRPr lang="en-US" sz="1300" dirty="0"/>
           </a:p>
@@ -38162,7 +38162,7 @@
                 <a:ea typeface="Trebuchet MS" pitchFamily="34" charset="-122"/>
                 <a:cs typeface="Trebuchet MS" pitchFamily="34" charset="-120"/>
               </a:rPr>
-              <a:t>-age</a:t>
+              <a:t>-er</a:t>
             </a:r>
             <a:endParaRPr lang="en-US" sz="1300" dirty="0"/>
           </a:p>
@@ -38226,7 +38226,7 @@
                 <a:ea typeface="Trebuchet MS" pitchFamily="34" charset="-122"/>
                 <a:cs typeface="Trebuchet MS" pitchFamily="34" charset="-120"/>
               </a:rPr>
-              <a:t>over-</a:t>
+              <a:t>dis-</a:t>
             </a:r>
             <a:endParaRPr lang="en-US" sz="1300" dirty="0"/>
           </a:p>
@@ -38315,7 +38315,7 @@
                 <a:ea typeface="Trebuchet MS" pitchFamily="34" charset="-122"/>
                 <a:cs typeface="Trebuchet MS" pitchFamily="34" charset="-120"/>
               </a:rPr>
-              <a:t>-er</a:t>
+              <a:t>-age</a:t>
             </a:r>
             <a:endParaRPr lang="en-US" sz="1300" dirty="0"/>
           </a:p>
@@ -38379,7 +38379,7 @@
                 <a:ea typeface="Trebuchet MS" pitchFamily="34" charset="-122"/>
                 <a:cs typeface="Trebuchet MS" pitchFamily="34" charset="-120"/>
               </a:rPr>
-              <a:t>dis-</a:t>
+              <a:t>over-</a:t>
             </a:r>
             <a:endParaRPr lang="en-US" sz="1300" dirty="0"/>
           </a:p>
@@ -38522,7 +38522,7 @@
         <p:spPr>
           <a:xfrm>
             <a:off x="1508760" y="4178808"/>
-            <a:ext cx="822960" cy="420624"/>
+            <a:ext cx="950976" cy="420624"/>
           </a:xfrm>
           <a:prstGeom prst="rect">
             <a:avLst>
@@ -38556,7 +38556,7 @@
         <p:spPr>
           <a:xfrm>
             <a:off x="1508760" y="4178808"/>
-            <a:ext cx="822960" cy="420624"/>
+            <a:ext cx="950976" cy="420624"/>
           </a:xfrm>
           <a:prstGeom prst="rect">
             <a:avLst/>
@@ -38580,7 +38580,7 @@
                 <a:ea typeface="Trebuchet MS" pitchFamily="34" charset="-122"/>
                 <a:cs typeface="Trebuchet MS" pitchFamily="34" charset="-120"/>
               </a:rPr>
-              <a:t>re-</a:t>
+              <a:t>mis-</a:t>
             </a:r>
             <a:endParaRPr lang="en-US" sz="1300" dirty="0"/>
           </a:p>
@@ -38594,7 +38594,7 @@
         </p:nvSpPr>
         <p:spPr>
           <a:xfrm>
-            <a:off x="2359152" y="4178808"/>
+            <a:off x="2487168" y="4178808"/>
             <a:ext cx="320040" cy="420624"/>
           </a:xfrm>
           <a:prstGeom prst="rect">
@@ -38633,7 +38633,7 @@
         </p:nvSpPr>
         <p:spPr>
           <a:xfrm>
-            <a:off x="2706624" y="4178808"/>
+            <a:off x="2834640" y="4178808"/>
             <a:ext cx="1097280" cy="420624"/>
           </a:xfrm>
           <a:prstGeom prst="rect">
@@ -38667,7 +38667,7 @@
         </p:nvSpPr>
         <p:spPr>
           <a:xfrm>
-            <a:off x="2706624" y="4178808"/>
+            <a:off x="2834640" y="4178808"/>
             <a:ext cx="1097280" cy="420624"/>
           </a:xfrm>
           <a:prstGeom prst="rect">
@@ -38706,7 +38706,7 @@
         </p:nvSpPr>
         <p:spPr>
           <a:xfrm>
-            <a:off x="3831336" y="4178808"/>
+            <a:off x="3959352" y="4178808"/>
             <a:ext cx="320040" cy="420624"/>
           </a:xfrm>
           <a:prstGeom prst="rect">
@@ -38745,7 +38745,7 @@
         </p:nvSpPr>
         <p:spPr>
           <a:xfrm>
-            <a:off x="4178808" y="4178808"/>
+            <a:off x="4306824" y="4178808"/>
             <a:ext cx="950976" cy="420624"/>
           </a:xfrm>
           <a:prstGeom prst="rect">
@@ -38779,7 +38779,7 @@
         </p:nvSpPr>
         <p:spPr>
           <a:xfrm>
-            <a:off x="4178808" y="4178808"/>
+            <a:off x="4306824" y="4178808"/>
             <a:ext cx="950976" cy="420624"/>
           </a:xfrm>
           <a:prstGeom prst="rect">
@@ -38818,7 +38818,7 @@
         </p:nvSpPr>
         <p:spPr>
           <a:xfrm>
-            <a:off x="5202936" y="4178808"/>
+            <a:off x="5330952" y="4178808"/>
             <a:ext cx="365760" cy="420624"/>
           </a:xfrm>
           <a:prstGeom prst="rect">
@@ -38857,7 +38857,7 @@
         </p:nvSpPr>
         <p:spPr>
           <a:xfrm>
-            <a:off x="5614416" y="4178808"/>
+            <a:off x="5742432" y="4178808"/>
             <a:ext cx="2194560" cy="420624"/>
           </a:xfrm>
           <a:prstGeom prst="rect">
@@ -38884,7 +38884,7 @@
         </p:nvSpPr>
         <p:spPr>
           <a:xfrm>
-            <a:off x="5614416" y="4178808"/>
+            <a:off x="5742432" y="4178808"/>
             <a:ext cx="2194560" cy="420624"/>
           </a:xfrm>
           <a:prstGeom prst="rect">
@@ -38909,7 +38909,7 @@
                 <a:ea typeface="Trebuchet MS" pitchFamily="34" charset="-122"/>
                 <a:cs typeface="Trebuchet MS" pitchFamily="34" charset="-120"/>
               </a:rPr>
-              <a:t>reuse</a:t>
+              <a:t>useful</a:t>
             </a:r>
             <a:endParaRPr lang="en-US" sz="1400" dirty="0"/>
           </a:p>
@@ -39313,7 +39313,7 @@
                 <a:ea typeface="Trebuchet MS" pitchFamily="34" charset="-122"/>
                 <a:cs typeface="Trebuchet MS" pitchFamily="34" charset="-120"/>
               </a:rPr>
-              <a:t>reuse</a:t>
+              <a:t>useful</a:t>
             </a:r>
             <a:endParaRPr lang="en-US" sz="1200" dirty="0"/>
           </a:p>
@@ -39379,7 +39379,7 @@
                 <a:ea typeface="Calibri" pitchFamily="34" charset="-122"/>
                 <a:cs typeface="Calibri" pitchFamily="34" charset="-120"/>
               </a:rPr>
-              <a:t>The way something is used, or how often it is used.</a:t>
+              <a:t>To use something too much, like overusing the same word in your writing.</a:t>
             </a:r>
             <a:endParaRPr lang="en-US" sz="1200" dirty="0"/>
           </a:p>
@@ -39452,7 +39452,7 @@
                 <a:ea typeface="Trebuchet MS" pitchFamily="34" charset="-122"/>
                 <a:cs typeface="Trebuchet MS" pitchFamily="34" charset="-120"/>
               </a:rPr>
-              <a:t>misuse</a:t>
+              <a:t>useless</a:t>
             </a:r>
             <a:endParaRPr lang="en-US" sz="1200" dirty="0"/>
           </a:p>
@@ -39518,7 +39518,7 @@
                 <a:ea typeface="Calibri" pitchFamily="34" charset="-122"/>
                 <a:cs typeface="Calibri" pitchFamily="34" charset="-120"/>
               </a:rPr>
-              <a:t>To use something again instead of throwing it away.</a:t>
+              <a:t>Something that helps you get a job done, like a useful tool in the shed.</a:t>
             </a:r>
             <a:endParaRPr lang="en-US" sz="1200" dirty="0"/>
           </a:p>
@@ -39591,7 +39591,7 @@
                 <a:ea typeface="Trebuchet MS" pitchFamily="34" charset="-122"/>
                 <a:cs typeface="Trebuchet MS" pitchFamily="34" charset="-120"/>
               </a:rPr>
-              <a:t>useful</a:t>
+              <a:t>misuse</a:t>
             </a:r>
             <a:endParaRPr lang="en-US" sz="1200" dirty="0"/>
           </a:p>
@@ -39657,7 +39657,7 @@
                 <a:ea typeface="Calibri" pitchFamily="34" charset="-122"/>
                 <a:cs typeface="Calibri" pitchFamily="34" charset="-120"/>
               </a:rPr>
-              <a:t>Something that cannot help or has no purpose.</a:t>
+              <a:t>To use something again instead of throwing it away.</a:t>
             </a:r>
             <a:endParaRPr lang="en-US" sz="1200" dirty="0"/>
           </a:p>
@@ -39730,7 +39730,7 @@
                 <a:ea typeface="Trebuchet MS" pitchFamily="34" charset="-122"/>
                 <a:cs typeface="Trebuchet MS" pitchFamily="34" charset="-120"/>
               </a:rPr>
-              <a:t>useless</a:t>
+              <a:t>reuse</a:t>
             </a:r>
             <a:endParaRPr lang="en-US" sz="1200" dirty="0"/>
           </a:p>
@@ -39796,7 +39796,7 @@
                 <a:ea typeface="Calibri" pitchFamily="34" charset="-122"/>
                 <a:cs typeface="Calibri" pitchFamily="34" charset="-120"/>
               </a:rPr>
-              <a:t>A person who uses something, like a computer or a tool.</a:t>
+              <a:t>The way something is used, or how often it is used.</a:t>
             </a:r>
             <a:endParaRPr lang="en-US" sz="1200" dirty="0"/>
           </a:p>
@@ -39869,7 +39869,7 @@
                 <a:ea typeface="Trebuchet MS" pitchFamily="34" charset="-122"/>
                 <a:cs typeface="Trebuchet MS" pitchFamily="34" charset="-120"/>
               </a:rPr>
-              <a:t>usage</a:t>
+              <a:t>overuse</a:t>
             </a:r>
             <a:endParaRPr lang="en-US" sz="1200" dirty="0"/>
           </a:p>
@@ -40008,7 +40008,7 @@
                 <a:ea typeface="Trebuchet MS" pitchFamily="34" charset="-122"/>
                 <a:cs typeface="Trebuchet MS" pitchFamily="34" charset="-120"/>
               </a:rPr>
-              <a:t>user</a:t>
+              <a:t>usage</a:t>
             </a:r>
             <a:endParaRPr lang="en-US" sz="1200" dirty="0"/>
           </a:p>
@@ -40074,7 +40074,7 @@
                 <a:ea typeface="Calibri" pitchFamily="34" charset="-122"/>
                 <a:cs typeface="Calibri" pitchFamily="34" charset="-120"/>
               </a:rPr>
-              <a:t>Something that helps you or is good for a purpose.</a:t>
+              <a:t>To use something in the wrong way or for the wrong reason.</a:t>
             </a:r>
             <a:endParaRPr lang="en-US" sz="1200" dirty="0"/>
           </a:p>
@@ -40213,7 +40213,7 @@
                 <a:ea typeface="Calibri" pitchFamily="34" charset="-122"/>
                 <a:cs typeface="Calibri" pitchFamily="34" charset="-120"/>
               </a:rPr>
-              <a:t>To use something in the wrong way or for the wrong purpose.</a:t>
+              <a:t>Something that cannot help at all, like a broken pencil with no lead.</a:t>
             </a:r>
             <a:endParaRPr lang="en-US" sz="1200" dirty="0"/>
           </a:p>
@@ -40708,7 +40708,7 @@
                 <a:ea typeface="Calibri" pitchFamily="34" charset="-122"/>
                 <a:cs typeface="Calibri" pitchFamily="34" charset="-120"/>
               </a:rPr>
-              <a:t>It is important to reuse plastic bags to help protect the environment.</a:t>
+              <a:t>Remember to reuse your plastic containers instead of throwing them in the bin.</a:t>
             </a:r>
             <a:endParaRPr lang="en-US" sz="1500" dirty="0"/>
           </a:p>
@@ -40872,7 +40872,7 @@
                 <a:ea typeface="Calibri" pitchFamily="34" charset="-122"/>
                 <a:cs typeface="Calibri" pitchFamily="34" charset="-120"/>
               </a:rPr>
-              <a:t>The teacher reminded us that misuse of equipment in the science lab can be dangerous.</a:t>
+              <a:t>The teacher reminded us that misuse of the school computers would have consequences.</a:t>
             </a:r>
             <a:endParaRPr lang="en-US" sz="1500" dirty="0"/>
           </a:p>
@@ -41036,7 +41036,7 @@
                 <a:ea typeface="Calibri" pitchFamily="34" charset="-122"/>
                 <a:cs typeface="Calibri" pitchFamily="34" charset="-120"/>
               </a:rPr>
-              <a:t>A sharp pencil is much more useful than a blunt one when you are drawing.</a:t>
+              <a:t>A good dictionary is a useful tool when you are writing a story.</a:t>
             </a:r>
             <a:endParaRPr lang="en-US" sz="1500" dirty="0"/>
           </a:p>

--- a/output/wordlabs-use-3day.pptx
+++ b/output/wordlabs-use-3day.pptx
@@ -4240,7 +4240,7 @@
                 <a:ea typeface="Calibri" pitchFamily="34" charset="-122"/>
                 <a:cs typeface="Calibri" pitchFamily="34" charset="-120"/>
               </a:rPr>
-              <a:t>"to employ or utilise"</a:t>
+              <a:t>"do something with"</a:t>
             </a:r>
             <a:endParaRPr lang="en-US" sz="2200" dirty="0"/>
           </a:p>
@@ -4279,7 +4279,7 @@
                 <a:ea typeface="Calibri" pitchFamily="34" charset="-122"/>
                 <a:cs typeface="Calibri" pitchFamily="34" charset="-120"/>
               </a:rPr>
-              <a:t>Origin: Latin: usus</a:t>
+              <a:t>Origin: Core English root</a:t>
             </a:r>
             <a:endParaRPr lang="en-US" sz="1300" dirty="0"/>
           </a:p>
@@ -5288,7 +5288,7 @@
                 <a:ea typeface="Calibri" pitchFamily="34" charset="-122"/>
                 <a:cs typeface="Calibri" pitchFamily="34" charset="-120"/>
               </a:rPr>
-              <a:t>Word Labs  •  wordlabs.app  •  Root: 'use' = to employ or utilise</a:t>
+              <a:t>Word Labs  •  wordlabs.app  •  Root: 'use' = do something with</a:t>
             </a:r>
             <a:endParaRPr lang="en-US" sz="800" dirty="0"/>
           </a:p>
@@ -5928,7 +5928,7 @@
                 <a:ea typeface="Calibri" pitchFamily="34" charset="-122"/>
                 <a:cs typeface="Calibri" pitchFamily="34" charset="-120"/>
               </a:rPr>
-              <a:t>Word Labs  •  wordlabs.app  •  Root: 'use' = to employ or utilise</a:t>
+              <a:t>Word Labs  •  wordlabs.app  •  Root: 'use' = do something with</a:t>
             </a:r>
             <a:endParaRPr lang="en-US" sz="800" dirty="0"/>
           </a:p>
@@ -6040,7 +6040,7 @@
                 <a:ea typeface="Calibri" pitchFamily="34" charset="-122"/>
                 <a:cs typeface="Calibri" pitchFamily="34" charset="-120"/>
               </a:rPr>
-              <a:t>It is </a:t>
+              <a:t>We bought </a:t>
             </a:r>
             <a:pPr algn="l" indent="0" marL="0">
               <a:buNone/>
@@ -6057,7 +6057,7 @@
                 <a:ea typeface="Calibri" pitchFamily="34" charset="-122"/>
                 <a:cs typeface="Calibri" pitchFamily="34" charset="-120"/>
               </a:rPr>
-              <a:t>useful</a:t>
+              <a:t>reusable</a:t>
             </a:r>
             <a:pPr algn="l" indent="0" marL="0">
               <a:buNone/>
@@ -6071,7 +6071,7 @@
                 <a:ea typeface="Calibri" pitchFamily="34" charset="-122"/>
                 <a:cs typeface="Calibri" pitchFamily="34" charset="-120"/>
               </a:rPr>
-              <a:t> to </a:t>
+              <a:t> bottles to reduce plastic waste. The school library is a great resource that many students </a:t>
             </a:r>
             <a:pPr algn="l" indent="0" marL="0">
               <a:buNone/>
@@ -6088,7 +6088,7 @@
                 <a:ea typeface="Calibri" pitchFamily="34" charset="-122"/>
                 <a:cs typeface="Calibri" pitchFamily="34" charset="-120"/>
               </a:rPr>
-              <a:t>reuse</a:t>
+              <a:t>underuse</a:t>
             </a:r>
             <a:pPr algn="l" indent="0" marL="0">
               <a:buNone/>
@@ -6102,7 +6102,7 @@
                 <a:ea typeface="Calibri" pitchFamily="34" charset="-122"/>
                 <a:cs typeface="Calibri" pitchFamily="34" charset="-120"/>
               </a:rPr>
-              <a:t> your shopping bags when you visit the supermarket.</a:t>
+              <a:t>.</a:t>
             </a:r>
             <a:endParaRPr lang="en-US" sz="1800" dirty="0"/>
           </a:p>
@@ -6257,7 +6257,7 @@
                 <a:ea typeface="Trebuchet MS" pitchFamily="34" charset="-122"/>
                 <a:cs typeface="Trebuchet MS" pitchFamily="34" charset="-120"/>
               </a:rPr>
-              <a:t>useful</a:t>
+              <a:t>reusable</a:t>
             </a:r>
             <a:endParaRPr lang="en-US" sz="1400" dirty="0"/>
           </a:p>
@@ -6385,7 +6385,7 @@
                 <a:ea typeface="Trebuchet MS" pitchFamily="34" charset="-122"/>
                 <a:cs typeface="Trebuchet MS" pitchFamily="34" charset="-120"/>
               </a:rPr>
-              <a:t>reuse</a:t>
+              <a:t>underuse</a:t>
             </a:r>
             <a:endParaRPr lang="en-US" sz="1400" dirty="0"/>
           </a:p>
@@ -6716,7 +6716,7 @@
                 <a:ea typeface="Calibri" pitchFamily="34" charset="-122"/>
                 <a:cs typeface="Calibri" pitchFamily="34" charset="-120"/>
               </a:rPr>
-              <a:t>Word Labs  •  wordlabs.app  •  Root: 'use' = to employ or utilise</a:t>
+              <a:t>Word Labs  •  wordlabs.app  •  Root: 'use' = do something with</a:t>
             </a:r>
             <a:endParaRPr lang="en-US" sz="800" dirty="0"/>
           </a:p>
@@ -6855,7 +6855,7 @@
                 <a:ea typeface="Trebuchet MS" pitchFamily="34" charset="-122"/>
                 <a:cs typeface="Trebuchet MS" pitchFamily="34" charset="-120"/>
               </a:rPr>
-              <a:t>useful</a:t>
+              <a:t>reusable</a:t>
             </a:r>
             <a:endParaRPr lang="en-US" sz="2800" dirty="0"/>
           </a:p>
@@ -7543,7 +7543,7 @@
                 <a:ea typeface="Calibri" pitchFamily="34" charset="-122"/>
                 <a:cs typeface="Calibri" pitchFamily="34" charset="-120"/>
               </a:rPr>
-              <a:t>Word Labs  •  wordlabs.app  •  Root: 'use' = to employ or utilise</a:t>
+              <a:t>Word Labs  •  wordlabs.app  •  Root: 'use' = do something with</a:t>
             </a:r>
             <a:endParaRPr lang="en-US" sz="800" dirty="0"/>
           </a:p>
@@ -7682,7 +7682,7 @@
                 <a:ea typeface="Trebuchet MS" pitchFamily="34" charset="-122"/>
                 <a:cs typeface="Trebuchet MS" pitchFamily="34" charset="-120"/>
               </a:rPr>
-              <a:t>useful</a:t>
+              <a:t>reusable</a:t>
             </a:r>
             <a:endParaRPr lang="en-US" sz="2800" dirty="0"/>
           </a:p>
@@ -7762,7 +7762,7 @@
         </p:nvSpPr>
         <p:spPr>
           <a:xfrm>
-            <a:off x="2938272" y="2258568"/>
+            <a:off x="2221992" y="2258568"/>
             <a:ext cx="1828800" cy="292608"/>
           </a:xfrm>
           <a:prstGeom prst="rect">
@@ -7771,11 +7771,11 @@
             </a:avLst>
           </a:prstGeom>
           <a:solidFill>
-            <a:srgbClr val="CCFBF1"/>
+            <a:srgbClr val="DDD6FE"/>
           </a:solidFill>
           <a:ln w="19050">
             <a:solidFill>
-              <a:srgbClr val="0D9488"/>
+              <a:srgbClr val="7C3AED"/>
             </a:solidFill>
             <a:prstDash val="solid"/>
           </a:ln>
@@ -7796,7 +7796,7 @@
         </p:nvSpPr>
         <p:spPr>
           <a:xfrm>
-            <a:off x="2938272" y="2258568"/>
+            <a:off x="2221992" y="2258568"/>
             <a:ext cx="1828800" cy="292608"/>
           </a:xfrm>
           <a:prstGeom prst="rect">
@@ -7815,13 +7815,13 @@
             <a:r>
               <a:rPr lang="en-US" sz="1300" b="1" dirty="0">
                 <a:solidFill>
-                  <a:srgbClr val="0F766E"/>
+                  <a:srgbClr val="4C1D95"/>
                 </a:solidFill>
                 <a:latin typeface="Trebuchet MS" pitchFamily="34" charset="0"/>
                 <a:ea typeface="Trebuchet MS" pitchFamily="34" charset="-122"/>
                 <a:cs typeface="Trebuchet MS" pitchFamily="34" charset="-120"/>
               </a:rPr>
-              <a:t>use</a:t>
+              <a:t>re</a:t>
             </a:r>
             <a:endParaRPr lang="en-US" sz="1300" dirty="0"/>
           </a:p>
@@ -7835,7 +7835,7 @@
         </p:nvSpPr>
         <p:spPr>
           <a:xfrm>
-            <a:off x="2938272" y="2569464"/>
+            <a:off x="2221992" y="2569464"/>
             <a:ext cx="1828800" cy="201168"/>
           </a:xfrm>
           <a:prstGeom prst="rect">
@@ -7860,7 +7860,7 @@
                 <a:ea typeface="Calibri" pitchFamily="34" charset="-122"/>
                 <a:cs typeface="Calibri" pitchFamily="34" charset="-120"/>
               </a:rPr>
-              <a:t>to employ or utilise</a:t>
+              <a:t>again</a:t>
             </a:r>
             <a:endParaRPr lang="en-US" sz="850" dirty="0"/>
           </a:p>
@@ -7874,7 +7874,7 @@
         </p:nvSpPr>
         <p:spPr>
           <a:xfrm>
-            <a:off x="5803392" y="2258568"/>
+            <a:off x="4370832" y="2258568"/>
             <a:ext cx="1828800" cy="292608"/>
           </a:xfrm>
           <a:prstGeom prst="rect">
@@ -7883,11 +7883,11 @@
             </a:avLst>
           </a:prstGeom>
           <a:solidFill>
-            <a:srgbClr val="FCE7F3"/>
+            <a:srgbClr val="CCFBF1"/>
           </a:solidFill>
           <a:ln w="19050">
             <a:solidFill>
-              <a:srgbClr val="DB2777"/>
+              <a:srgbClr val="0D9488"/>
             </a:solidFill>
             <a:prstDash val="solid"/>
           </a:ln>
@@ -7908,7 +7908,7 @@
         </p:nvSpPr>
         <p:spPr>
           <a:xfrm>
-            <a:off x="5803392" y="2258568"/>
+            <a:off x="4370832" y="2258568"/>
             <a:ext cx="1828800" cy="292608"/>
           </a:xfrm>
           <a:prstGeom prst="rect">
@@ -7927,13 +7927,13 @@
             <a:r>
               <a:rPr lang="en-US" sz="1300" b="1" dirty="0">
                 <a:solidFill>
-                  <a:srgbClr val="9D174D"/>
+                  <a:srgbClr val="0F766E"/>
                 </a:solidFill>
                 <a:latin typeface="Trebuchet MS" pitchFamily="34" charset="0"/>
                 <a:ea typeface="Trebuchet MS" pitchFamily="34" charset="-122"/>
                 <a:cs typeface="Trebuchet MS" pitchFamily="34" charset="-120"/>
               </a:rPr>
-              <a:t>ful</a:t>
+              <a:t>use</a:t>
             </a:r>
             <a:endParaRPr lang="en-US" sz="1300" dirty="0"/>
           </a:p>
@@ -7947,7 +7947,7 @@
         </p:nvSpPr>
         <p:spPr>
           <a:xfrm>
-            <a:off x="5803392" y="2569464"/>
+            <a:off x="4370832" y="2569464"/>
             <a:ext cx="1828800" cy="201168"/>
           </a:xfrm>
           <a:prstGeom prst="rect">
@@ -7972,7 +7972,7 @@
                 <a:ea typeface="Calibri" pitchFamily="34" charset="-122"/>
                 <a:cs typeface="Calibri" pitchFamily="34" charset="-120"/>
               </a:rPr>
-              <a:t>full of, having the quality of</a:t>
+              <a:t>do something with</a:t>
             </a:r>
             <a:endParaRPr lang="en-US" sz="850" dirty="0"/>
           </a:p>
@@ -7981,6 +7981,118 @@
       <p:sp>
         <p:nvSpPr>
           <p:cNvPr id="22" name="Shape 20"/>
+          <p:cNvSpPr/>
+          <p:nvPr/>
+        </p:nvSpPr>
+        <p:spPr>
+          <a:xfrm>
+            <a:off x="6519672" y="2258568"/>
+            <a:ext cx="1828800" cy="292608"/>
+          </a:xfrm>
+          <a:prstGeom prst="rect">
+            <a:avLst>
+              <a:gd name="adj" fmla="val 25000"/>
+            </a:avLst>
+          </a:prstGeom>
+          <a:solidFill>
+            <a:srgbClr val="FCE7F3"/>
+          </a:solidFill>
+          <a:ln w="19050">
+            <a:solidFill>
+              <a:srgbClr val="DB2777"/>
+            </a:solidFill>
+            <a:prstDash val="solid"/>
+          </a:ln>
+          <a:effectLst>
+            <a:outerShdw sx="100000" sy="100000" kx="0" ky="0" algn="bl" rotWithShape="0" blurRad="101600" dist="38100" dir="8100000">
+              <a:srgbClr val="000000">
+                <a:alpha val="12000"/>
+              </a:srgbClr>
+            </a:outerShdw>
+          </a:effectLst>
+        </p:spPr>
+      </p:sp>
+      <p:sp>
+        <p:nvSpPr>
+          <p:cNvPr id="23" name="Text 21"/>
+          <p:cNvSpPr/>
+          <p:nvPr/>
+        </p:nvSpPr>
+        <p:spPr>
+          <a:xfrm>
+            <a:off x="6519672" y="2258568"/>
+            <a:ext cx="1828800" cy="292608"/>
+          </a:xfrm>
+          <a:prstGeom prst="rect">
+            <a:avLst/>
+          </a:prstGeom>
+          <a:noFill/>
+          <a:ln/>
+        </p:spPr>
+        <p:txBody>
+          <a:bodyPr wrap="square" lIns="0" tIns="0" rIns="0" bIns="0" rtlCol="0" anchor="ctr"/>
+          <a:lstStyle/>
+          <a:p>
+            <a:pPr algn="ctr" indent="0" marL="0">
+              <a:buNone/>
+            </a:pPr>
+            <a:r>
+              <a:rPr lang="en-US" sz="1300" b="1" dirty="0">
+                <a:solidFill>
+                  <a:srgbClr val="9D174D"/>
+                </a:solidFill>
+                <a:latin typeface="Trebuchet MS" pitchFamily="34" charset="0"/>
+                <a:ea typeface="Trebuchet MS" pitchFamily="34" charset="-122"/>
+                <a:cs typeface="Trebuchet MS" pitchFamily="34" charset="-120"/>
+              </a:rPr>
+              <a:t>able</a:t>
+            </a:r>
+            <a:endParaRPr lang="en-US" sz="1300" dirty="0"/>
+          </a:p>
+        </p:txBody>
+      </p:sp>
+      <p:sp>
+        <p:nvSpPr>
+          <p:cNvPr id="24" name="Text 22"/>
+          <p:cNvSpPr/>
+          <p:nvPr/>
+        </p:nvSpPr>
+        <p:spPr>
+          <a:xfrm>
+            <a:off x="6519672" y="2569464"/>
+            <a:ext cx="1828800" cy="201168"/>
+          </a:xfrm>
+          <a:prstGeom prst="rect">
+            <a:avLst/>
+          </a:prstGeom>
+          <a:noFill/>
+          <a:ln/>
+        </p:spPr>
+        <p:txBody>
+          <a:bodyPr wrap="square" lIns="0" tIns="0" rIns="0" bIns="0" rtlCol="0" anchor="t"/>
+          <a:lstStyle/>
+          <a:p>
+            <a:pPr algn="ctr" indent="0" marL="0">
+              <a:buNone/>
+            </a:pPr>
+            <a:r>
+              <a:rPr lang="en-US" sz="850" dirty="0">
+                <a:solidFill>
+                  <a:srgbClr val="475569"/>
+                </a:solidFill>
+                <a:latin typeface="Calibri" pitchFamily="34" charset="0"/>
+                <a:ea typeface="Calibri" pitchFamily="34" charset="-122"/>
+                <a:cs typeface="Calibri" pitchFamily="34" charset="-120"/>
+              </a:rPr>
+              <a:t>able to</a:t>
+            </a:r>
+            <a:endParaRPr lang="en-US" sz="850" dirty="0"/>
+          </a:p>
+        </p:txBody>
+      </p:sp>
+      <p:sp>
+        <p:nvSpPr>
+          <p:cNvPr id="25" name="Shape 23"/>
           <p:cNvSpPr/>
           <p:nvPr/>
         </p:nvSpPr>
@@ -8007,7 +8119,7 @@
       </p:sp>
       <p:sp>
         <p:nvSpPr>
-          <p:cNvPr id="23" name="Text 21"/>
+          <p:cNvPr id="26" name="Text 24"/>
           <p:cNvSpPr/>
           <p:nvPr/>
         </p:nvSpPr>
@@ -8046,7 +8158,7 @@
       </p:sp>
       <p:sp>
         <p:nvSpPr>
-          <p:cNvPr id="24" name="Shape 22"/>
+          <p:cNvPr id="27" name="Shape 25"/>
           <p:cNvSpPr/>
           <p:nvPr/>
         </p:nvSpPr>
@@ -8073,7 +8185,7 @@
       </p:sp>
       <p:sp>
         <p:nvSpPr>
-          <p:cNvPr id="25" name="Text 23"/>
+          <p:cNvPr id="28" name="Text 26"/>
           <p:cNvSpPr/>
           <p:nvPr/>
         </p:nvSpPr>
@@ -8112,7 +8224,7 @@
       </p:sp>
       <p:sp>
         <p:nvSpPr>
-          <p:cNvPr id="26" name="Shape 24"/>
+          <p:cNvPr id="29" name="Shape 27"/>
           <p:cNvSpPr/>
           <p:nvPr/>
         </p:nvSpPr>
@@ -8139,7 +8251,7 @@
       </p:sp>
       <p:sp>
         <p:nvSpPr>
-          <p:cNvPr id="27" name="Text 25"/>
+          <p:cNvPr id="30" name="Text 28"/>
           <p:cNvSpPr/>
           <p:nvPr/>
         </p:nvSpPr>
@@ -8178,7 +8290,7 @@
       </p:sp>
       <p:sp>
         <p:nvSpPr>
-          <p:cNvPr id="28" name="Shape 26"/>
+          <p:cNvPr id="31" name="Shape 29"/>
           <p:cNvSpPr/>
           <p:nvPr/>
         </p:nvSpPr>
@@ -8205,7 +8317,7 @@
       </p:sp>
       <p:sp>
         <p:nvSpPr>
-          <p:cNvPr id="29" name="Text 27"/>
+          <p:cNvPr id="32" name="Text 30"/>
           <p:cNvSpPr/>
           <p:nvPr/>
         </p:nvSpPr>
@@ -8528,7 +8640,7 @@
                 <a:ea typeface="Calibri" pitchFamily="34" charset="-122"/>
                 <a:cs typeface="Calibri" pitchFamily="34" charset="-120"/>
               </a:rPr>
-              <a:t>Word Labs  •  wordlabs.app  •  Root: 'use' = to employ or utilise</a:t>
+              <a:t>Word Labs  •  wordlabs.app  •  Root: 'use' = do something with</a:t>
             </a:r>
             <a:endParaRPr lang="en-US" sz="800" dirty="0"/>
           </a:p>
@@ -8667,7 +8779,7 @@
                 <a:ea typeface="Trebuchet MS" pitchFamily="34" charset="-122"/>
                 <a:cs typeface="Trebuchet MS" pitchFamily="34" charset="-120"/>
               </a:rPr>
-              <a:t>useful</a:t>
+              <a:t>reusable</a:t>
             </a:r>
             <a:endParaRPr lang="en-US" sz="2800" dirty="0"/>
           </a:p>
@@ -8747,7 +8859,7 @@
         </p:nvSpPr>
         <p:spPr>
           <a:xfrm>
-            <a:off x="2938272" y="2258568"/>
+            <a:off x="2221992" y="2258568"/>
             <a:ext cx="1828800" cy="292608"/>
           </a:xfrm>
           <a:prstGeom prst="rect">
@@ -8756,11 +8868,11 @@
             </a:avLst>
           </a:prstGeom>
           <a:solidFill>
-            <a:srgbClr val="CCFBF1"/>
+            <a:srgbClr val="DDD6FE"/>
           </a:solidFill>
           <a:ln w="19050">
             <a:solidFill>
-              <a:srgbClr val="0D9488"/>
+              <a:srgbClr val="7C3AED"/>
             </a:solidFill>
             <a:prstDash val="solid"/>
           </a:ln>
@@ -8781,7 +8893,7 @@
         </p:nvSpPr>
         <p:spPr>
           <a:xfrm>
-            <a:off x="2938272" y="2258568"/>
+            <a:off x="2221992" y="2258568"/>
             <a:ext cx="1828800" cy="292608"/>
           </a:xfrm>
           <a:prstGeom prst="rect">
@@ -8800,13 +8912,13 @@
             <a:r>
               <a:rPr lang="en-US" sz="1300" b="1" dirty="0">
                 <a:solidFill>
-                  <a:srgbClr val="0F766E"/>
+                  <a:srgbClr val="4C1D95"/>
                 </a:solidFill>
                 <a:latin typeface="Trebuchet MS" pitchFamily="34" charset="0"/>
                 <a:ea typeface="Trebuchet MS" pitchFamily="34" charset="-122"/>
                 <a:cs typeface="Trebuchet MS" pitchFamily="34" charset="-120"/>
               </a:rPr>
-              <a:t>use</a:t>
+              <a:t>re</a:t>
             </a:r>
             <a:endParaRPr lang="en-US" sz="1300" dirty="0"/>
           </a:p>
@@ -8820,7 +8932,7 @@
         </p:nvSpPr>
         <p:spPr>
           <a:xfrm>
-            <a:off x="2938272" y="2569464"/>
+            <a:off x="2221992" y="2569464"/>
             <a:ext cx="1828800" cy="201168"/>
           </a:xfrm>
           <a:prstGeom prst="rect">
@@ -8845,7 +8957,7 @@
                 <a:ea typeface="Calibri" pitchFamily="34" charset="-122"/>
                 <a:cs typeface="Calibri" pitchFamily="34" charset="-120"/>
               </a:rPr>
-              <a:t>to employ or utilise</a:t>
+              <a:t>again</a:t>
             </a:r>
             <a:endParaRPr lang="en-US" sz="850" dirty="0"/>
           </a:p>
@@ -8859,7 +8971,7 @@
         </p:nvSpPr>
         <p:spPr>
           <a:xfrm>
-            <a:off x="5803392" y="2258568"/>
+            <a:off x="4370832" y="2258568"/>
             <a:ext cx="1828800" cy="292608"/>
           </a:xfrm>
           <a:prstGeom prst="rect">
@@ -8868,11 +8980,11 @@
             </a:avLst>
           </a:prstGeom>
           <a:solidFill>
-            <a:srgbClr val="FCE7F3"/>
+            <a:srgbClr val="CCFBF1"/>
           </a:solidFill>
           <a:ln w="19050">
             <a:solidFill>
-              <a:srgbClr val="DB2777"/>
+              <a:srgbClr val="0D9488"/>
             </a:solidFill>
             <a:prstDash val="solid"/>
           </a:ln>
@@ -8893,7 +9005,7 @@
         </p:nvSpPr>
         <p:spPr>
           <a:xfrm>
-            <a:off x="5803392" y="2258568"/>
+            <a:off x="4370832" y="2258568"/>
             <a:ext cx="1828800" cy="292608"/>
           </a:xfrm>
           <a:prstGeom prst="rect">
@@ -8912,13 +9024,13 @@
             <a:r>
               <a:rPr lang="en-US" sz="1300" b="1" dirty="0">
                 <a:solidFill>
-                  <a:srgbClr val="9D174D"/>
+                  <a:srgbClr val="0F766E"/>
                 </a:solidFill>
                 <a:latin typeface="Trebuchet MS" pitchFamily="34" charset="0"/>
                 <a:ea typeface="Trebuchet MS" pitchFamily="34" charset="-122"/>
                 <a:cs typeface="Trebuchet MS" pitchFamily="34" charset="-120"/>
               </a:rPr>
-              <a:t>ful</a:t>
+              <a:t>use</a:t>
             </a:r>
             <a:endParaRPr lang="en-US" sz="1300" dirty="0"/>
           </a:p>
@@ -8932,7 +9044,7 @@
         </p:nvSpPr>
         <p:spPr>
           <a:xfrm>
-            <a:off x="5803392" y="2569464"/>
+            <a:off x="4370832" y="2569464"/>
             <a:ext cx="1828800" cy="201168"/>
           </a:xfrm>
           <a:prstGeom prst="rect">
@@ -8957,7 +9069,7 @@
                 <a:ea typeface="Calibri" pitchFamily="34" charset="-122"/>
                 <a:cs typeface="Calibri" pitchFamily="34" charset="-120"/>
               </a:rPr>
-              <a:t>full of, having the quality of</a:t>
+              <a:t>do something with</a:t>
             </a:r>
             <a:endParaRPr lang="en-US" sz="850" dirty="0"/>
           </a:p>
@@ -8966,6 +9078,118 @@
       <p:sp>
         <p:nvSpPr>
           <p:cNvPr id="22" name="Shape 20"/>
+          <p:cNvSpPr/>
+          <p:nvPr/>
+        </p:nvSpPr>
+        <p:spPr>
+          <a:xfrm>
+            <a:off x="6519672" y="2258568"/>
+            <a:ext cx="1828800" cy="292608"/>
+          </a:xfrm>
+          <a:prstGeom prst="rect">
+            <a:avLst>
+              <a:gd name="adj" fmla="val 25000"/>
+            </a:avLst>
+          </a:prstGeom>
+          <a:solidFill>
+            <a:srgbClr val="FCE7F3"/>
+          </a:solidFill>
+          <a:ln w="19050">
+            <a:solidFill>
+              <a:srgbClr val="DB2777"/>
+            </a:solidFill>
+            <a:prstDash val="solid"/>
+          </a:ln>
+          <a:effectLst>
+            <a:outerShdw sx="100000" sy="100000" kx="0" ky="0" algn="bl" rotWithShape="0" blurRad="101600" dist="38100" dir="8100000">
+              <a:srgbClr val="000000">
+                <a:alpha val="12000"/>
+              </a:srgbClr>
+            </a:outerShdw>
+          </a:effectLst>
+        </p:spPr>
+      </p:sp>
+      <p:sp>
+        <p:nvSpPr>
+          <p:cNvPr id="23" name="Text 21"/>
+          <p:cNvSpPr/>
+          <p:nvPr/>
+        </p:nvSpPr>
+        <p:spPr>
+          <a:xfrm>
+            <a:off x="6519672" y="2258568"/>
+            <a:ext cx="1828800" cy="292608"/>
+          </a:xfrm>
+          <a:prstGeom prst="rect">
+            <a:avLst/>
+          </a:prstGeom>
+          <a:noFill/>
+          <a:ln/>
+        </p:spPr>
+        <p:txBody>
+          <a:bodyPr wrap="square" lIns="0" tIns="0" rIns="0" bIns="0" rtlCol="0" anchor="ctr"/>
+          <a:lstStyle/>
+          <a:p>
+            <a:pPr algn="ctr" indent="0" marL="0">
+              <a:buNone/>
+            </a:pPr>
+            <a:r>
+              <a:rPr lang="en-US" sz="1300" b="1" dirty="0">
+                <a:solidFill>
+                  <a:srgbClr val="9D174D"/>
+                </a:solidFill>
+                <a:latin typeface="Trebuchet MS" pitchFamily="34" charset="0"/>
+                <a:ea typeface="Trebuchet MS" pitchFamily="34" charset="-122"/>
+                <a:cs typeface="Trebuchet MS" pitchFamily="34" charset="-120"/>
+              </a:rPr>
+              <a:t>able</a:t>
+            </a:r>
+            <a:endParaRPr lang="en-US" sz="1300" dirty="0"/>
+          </a:p>
+        </p:txBody>
+      </p:sp>
+      <p:sp>
+        <p:nvSpPr>
+          <p:cNvPr id="24" name="Text 22"/>
+          <p:cNvSpPr/>
+          <p:nvPr/>
+        </p:nvSpPr>
+        <p:spPr>
+          <a:xfrm>
+            <a:off x="6519672" y="2569464"/>
+            <a:ext cx="1828800" cy="201168"/>
+          </a:xfrm>
+          <a:prstGeom prst="rect">
+            <a:avLst/>
+          </a:prstGeom>
+          <a:noFill/>
+          <a:ln/>
+        </p:spPr>
+        <p:txBody>
+          <a:bodyPr wrap="square" lIns="0" tIns="0" rIns="0" bIns="0" rtlCol="0" anchor="t"/>
+          <a:lstStyle/>
+          <a:p>
+            <a:pPr algn="ctr" indent="0" marL="0">
+              <a:buNone/>
+            </a:pPr>
+            <a:r>
+              <a:rPr lang="en-US" sz="850" dirty="0">
+                <a:solidFill>
+                  <a:srgbClr val="475569"/>
+                </a:solidFill>
+                <a:latin typeface="Calibri" pitchFamily="34" charset="0"/>
+                <a:ea typeface="Calibri" pitchFamily="34" charset="-122"/>
+                <a:cs typeface="Calibri" pitchFamily="34" charset="-120"/>
+              </a:rPr>
+              <a:t>able to</a:t>
+            </a:r>
+            <a:endParaRPr lang="en-US" sz="850" dirty="0"/>
+          </a:p>
+        </p:txBody>
+      </p:sp>
+      <p:sp>
+        <p:nvSpPr>
+          <p:cNvPr id="25" name="Shape 23"/>
           <p:cNvSpPr/>
           <p:nvPr/>
         </p:nvSpPr>
@@ -8992,7 +9216,7 @@
       </p:sp>
       <p:sp>
         <p:nvSpPr>
-          <p:cNvPr id="23" name="Text 21"/>
+          <p:cNvPr id="26" name="Text 24"/>
           <p:cNvSpPr/>
           <p:nvPr/>
         </p:nvSpPr>
@@ -9031,7 +9255,7 @@
       </p:sp>
       <p:sp>
         <p:nvSpPr>
-          <p:cNvPr id="24" name="Shape 22"/>
+          <p:cNvPr id="27" name="Shape 25"/>
           <p:cNvSpPr/>
           <p:nvPr/>
         </p:nvSpPr>
@@ -9058,14 +9282,14 @@
       </p:sp>
       <p:sp>
         <p:nvSpPr>
-          <p:cNvPr id="25" name="Shape 23"/>
-          <p:cNvSpPr/>
-          <p:nvPr/>
-        </p:nvSpPr>
-        <p:spPr>
-          <a:xfrm>
-            <a:off x="2999232" y="3364992"/>
-            <a:ext cx="1645920" cy="475488"/>
+          <p:cNvPr id="28" name="Shape 26"/>
+          <p:cNvSpPr/>
+          <p:nvPr/>
+        </p:nvSpPr>
+        <p:spPr>
+          <a:xfrm>
+            <a:off x="1975104" y="3364992"/>
+            <a:ext cx="1554480" cy="475488"/>
           </a:xfrm>
           <a:prstGeom prst="rect">
             <a:avLst>
@@ -9085,14 +9309,14 @@
       </p:sp>
       <p:sp>
         <p:nvSpPr>
-          <p:cNvPr id="26" name="Text 24"/>
-          <p:cNvSpPr/>
-          <p:nvPr/>
-        </p:nvSpPr>
-        <p:spPr>
-          <a:xfrm>
-            <a:off x="2999232" y="3364992"/>
-            <a:ext cx="1645920" cy="475488"/>
+          <p:cNvPr id="29" name="Text 27"/>
+          <p:cNvSpPr/>
+          <p:nvPr/>
+        </p:nvSpPr>
+        <p:spPr>
+          <a:xfrm>
+            <a:off x="1975104" y="3364992"/>
+            <a:ext cx="1554480" cy="475488"/>
           </a:xfrm>
           <a:prstGeom prst="rect">
             <a:avLst/>
@@ -9116,7 +9340,7 @@
                 <a:ea typeface="Trebuchet MS" pitchFamily="34" charset="-122"/>
                 <a:cs typeface="Trebuchet MS" pitchFamily="34" charset="-120"/>
               </a:rPr>
-              <a:t>use</a:t>
+              <a:t>re</a:t>
             </a:r>
             <a:endParaRPr lang="en-US" sz="1400" dirty="0"/>
           </a:p>
@@ -9124,14 +9348,14 @@
       </p:sp>
       <p:sp>
         <p:nvSpPr>
-          <p:cNvPr id="27" name="Text 25"/>
-          <p:cNvSpPr/>
-          <p:nvPr/>
-        </p:nvSpPr>
-        <p:spPr>
-          <a:xfrm>
-            <a:off x="4645152" y="3364992"/>
-            <a:ext cx="1097280" cy="475488"/>
+          <p:cNvPr id="30" name="Text 28"/>
+          <p:cNvSpPr/>
+          <p:nvPr/>
+        </p:nvSpPr>
+        <p:spPr>
+          <a:xfrm>
+            <a:off x="3529584" y="3364992"/>
+            <a:ext cx="73152" cy="475488"/>
           </a:xfrm>
           <a:prstGeom prst="rect">
             <a:avLst/>
@@ -9163,14 +9387,14 @@
       </p:sp>
       <p:sp>
         <p:nvSpPr>
-          <p:cNvPr id="28" name="Shape 26"/>
-          <p:cNvSpPr/>
-          <p:nvPr/>
-        </p:nvSpPr>
-        <p:spPr>
-          <a:xfrm>
-            <a:off x="5742432" y="3364992"/>
-            <a:ext cx="1645920" cy="475488"/>
+          <p:cNvPr id="31" name="Shape 29"/>
+          <p:cNvSpPr/>
+          <p:nvPr/>
+        </p:nvSpPr>
+        <p:spPr>
+          <a:xfrm>
+            <a:off x="3602736" y="3364992"/>
+            <a:ext cx="1554480" cy="475488"/>
           </a:xfrm>
           <a:prstGeom prst="rect">
             <a:avLst>
@@ -9190,14 +9414,14 @@
       </p:sp>
       <p:sp>
         <p:nvSpPr>
-          <p:cNvPr id="29" name="Text 27"/>
-          <p:cNvSpPr/>
-          <p:nvPr/>
-        </p:nvSpPr>
-        <p:spPr>
-          <a:xfrm>
-            <a:off x="5742432" y="3364992"/>
-            <a:ext cx="1645920" cy="475488"/>
+          <p:cNvPr id="32" name="Text 30"/>
+          <p:cNvSpPr/>
+          <p:nvPr/>
+        </p:nvSpPr>
+        <p:spPr>
+          <a:xfrm>
+            <a:off x="3602736" y="3364992"/>
+            <a:ext cx="1554480" cy="475488"/>
           </a:xfrm>
           <a:prstGeom prst="rect">
             <a:avLst/>
@@ -9221,7 +9445,7 @@
                 <a:ea typeface="Trebuchet MS" pitchFamily="34" charset="-122"/>
                 <a:cs typeface="Trebuchet MS" pitchFamily="34" charset="-120"/>
               </a:rPr>
-              <a:t>ful</a:t>
+              <a:t>us</a:t>
             </a:r>
             <a:endParaRPr lang="en-US" sz="1400" dirty="0"/>
           </a:p>
@@ -9229,7 +9453,217 @@
       </p:sp>
       <p:sp>
         <p:nvSpPr>
-          <p:cNvPr id="30" name="Shape 28"/>
+          <p:cNvPr id="33" name="Text 31"/>
+          <p:cNvSpPr/>
+          <p:nvPr/>
+        </p:nvSpPr>
+        <p:spPr>
+          <a:xfrm>
+            <a:off x="5157216" y="3364992"/>
+            <a:ext cx="73152" cy="475488"/>
+          </a:xfrm>
+          <a:prstGeom prst="rect">
+            <a:avLst/>
+          </a:prstGeom>
+          <a:noFill/>
+          <a:ln/>
+        </p:spPr>
+        <p:txBody>
+          <a:bodyPr wrap="square" lIns="0" tIns="0" rIns="0" bIns="0" rtlCol="0" anchor="ctr"/>
+          <a:lstStyle/>
+          <a:p>
+            <a:pPr algn="ctr" indent="0" marL="0">
+              <a:buNone/>
+            </a:pPr>
+            <a:r>
+              <a:rPr lang="en-US" sz="1600" b="1" dirty="0">
+                <a:solidFill>
+                  <a:srgbClr val="0D9488"/>
+                </a:solidFill>
+                <a:latin typeface="Trebuchet MS" pitchFamily="34" charset="0"/>
+                <a:ea typeface="Trebuchet MS" pitchFamily="34" charset="-122"/>
+                <a:cs typeface="Trebuchet MS" pitchFamily="34" charset="-120"/>
+              </a:rPr>
+              <a:t>·</a:t>
+            </a:r>
+            <a:endParaRPr lang="en-US" sz="1600" dirty="0"/>
+          </a:p>
+        </p:txBody>
+      </p:sp>
+      <p:sp>
+        <p:nvSpPr>
+          <p:cNvPr id="34" name="Shape 32"/>
+          <p:cNvSpPr/>
+          <p:nvPr/>
+        </p:nvSpPr>
+        <p:spPr>
+          <a:xfrm>
+            <a:off x="5230368" y="3364992"/>
+            <a:ext cx="1554480" cy="475488"/>
+          </a:xfrm>
+          <a:prstGeom prst="rect">
+            <a:avLst>
+              <a:gd name="adj" fmla="val 9615"/>
+            </a:avLst>
+          </a:prstGeom>
+          <a:solidFill>
+            <a:srgbClr val="FFFFFF"/>
+          </a:solidFill>
+          <a:ln w="12700">
+            <a:solidFill>
+              <a:srgbClr val="0D9488"/>
+            </a:solidFill>
+            <a:prstDash val="solid"/>
+          </a:ln>
+        </p:spPr>
+      </p:sp>
+      <p:sp>
+        <p:nvSpPr>
+          <p:cNvPr id="35" name="Text 33"/>
+          <p:cNvSpPr/>
+          <p:nvPr/>
+        </p:nvSpPr>
+        <p:spPr>
+          <a:xfrm>
+            <a:off x="5230368" y="3364992"/>
+            <a:ext cx="1554480" cy="475488"/>
+          </a:xfrm>
+          <a:prstGeom prst="rect">
+            <a:avLst/>
+          </a:prstGeom>
+          <a:noFill/>
+          <a:ln/>
+        </p:spPr>
+        <p:txBody>
+          <a:bodyPr wrap="square" lIns="0" tIns="0" rIns="0" bIns="0" rtlCol="0" anchor="ctr"/>
+          <a:lstStyle/>
+          <a:p>
+            <a:pPr algn="ctr" indent="0" marL="0">
+              <a:buNone/>
+            </a:pPr>
+            <a:r>
+              <a:rPr lang="en-US" sz="1400" b="1" dirty="0">
+                <a:solidFill>
+                  <a:srgbClr val="0D9488"/>
+                </a:solidFill>
+                <a:latin typeface="Trebuchet MS" pitchFamily="34" charset="0"/>
+                <a:ea typeface="Trebuchet MS" pitchFamily="34" charset="-122"/>
+                <a:cs typeface="Trebuchet MS" pitchFamily="34" charset="-120"/>
+              </a:rPr>
+              <a:t>a</a:t>
+            </a:r>
+            <a:endParaRPr lang="en-US" sz="1400" dirty="0"/>
+          </a:p>
+        </p:txBody>
+      </p:sp>
+      <p:sp>
+        <p:nvSpPr>
+          <p:cNvPr id="36" name="Text 34"/>
+          <p:cNvSpPr/>
+          <p:nvPr/>
+        </p:nvSpPr>
+        <p:spPr>
+          <a:xfrm>
+            <a:off x="6784848" y="3364992"/>
+            <a:ext cx="73152" cy="475488"/>
+          </a:xfrm>
+          <a:prstGeom prst="rect">
+            <a:avLst/>
+          </a:prstGeom>
+          <a:noFill/>
+          <a:ln/>
+        </p:spPr>
+        <p:txBody>
+          <a:bodyPr wrap="square" lIns="0" tIns="0" rIns="0" bIns="0" rtlCol="0" anchor="ctr"/>
+          <a:lstStyle/>
+          <a:p>
+            <a:pPr algn="ctr" indent="0" marL="0">
+              <a:buNone/>
+            </a:pPr>
+            <a:r>
+              <a:rPr lang="en-US" sz="1600" b="1" dirty="0">
+                <a:solidFill>
+                  <a:srgbClr val="0D9488"/>
+                </a:solidFill>
+                <a:latin typeface="Trebuchet MS" pitchFamily="34" charset="0"/>
+                <a:ea typeface="Trebuchet MS" pitchFamily="34" charset="-122"/>
+                <a:cs typeface="Trebuchet MS" pitchFamily="34" charset="-120"/>
+              </a:rPr>
+              <a:t>·</a:t>
+            </a:r>
+            <a:endParaRPr lang="en-US" sz="1600" dirty="0"/>
+          </a:p>
+        </p:txBody>
+      </p:sp>
+      <p:sp>
+        <p:nvSpPr>
+          <p:cNvPr id="37" name="Shape 35"/>
+          <p:cNvSpPr/>
+          <p:nvPr/>
+        </p:nvSpPr>
+        <p:spPr>
+          <a:xfrm>
+            <a:off x="6858000" y="3364992"/>
+            <a:ext cx="1554480" cy="475488"/>
+          </a:xfrm>
+          <a:prstGeom prst="rect">
+            <a:avLst>
+              <a:gd name="adj" fmla="val 9615"/>
+            </a:avLst>
+          </a:prstGeom>
+          <a:solidFill>
+            <a:srgbClr val="FFFFFF"/>
+          </a:solidFill>
+          <a:ln w="12700">
+            <a:solidFill>
+              <a:srgbClr val="0D9488"/>
+            </a:solidFill>
+            <a:prstDash val="solid"/>
+          </a:ln>
+        </p:spPr>
+      </p:sp>
+      <p:sp>
+        <p:nvSpPr>
+          <p:cNvPr id="38" name="Text 36"/>
+          <p:cNvSpPr/>
+          <p:nvPr/>
+        </p:nvSpPr>
+        <p:spPr>
+          <a:xfrm>
+            <a:off x="6858000" y="3364992"/>
+            <a:ext cx="1554480" cy="475488"/>
+          </a:xfrm>
+          <a:prstGeom prst="rect">
+            <a:avLst/>
+          </a:prstGeom>
+          <a:noFill/>
+          <a:ln/>
+        </p:spPr>
+        <p:txBody>
+          <a:bodyPr wrap="square" lIns="0" tIns="0" rIns="0" bIns="0" rtlCol="0" anchor="ctr"/>
+          <a:lstStyle/>
+          <a:p>
+            <a:pPr algn="ctr" indent="0" marL="0">
+              <a:buNone/>
+            </a:pPr>
+            <a:r>
+              <a:rPr lang="en-US" sz="1400" b="1" dirty="0">
+                <a:solidFill>
+                  <a:srgbClr val="0D9488"/>
+                </a:solidFill>
+                <a:latin typeface="Trebuchet MS" pitchFamily="34" charset="0"/>
+                <a:ea typeface="Trebuchet MS" pitchFamily="34" charset="-122"/>
+                <a:cs typeface="Trebuchet MS" pitchFamily="34" charset="-120"/>
+              </a:rPr>
+              <a:t>ble</a:t>
+            </a:r>
+            <a:endParaRPr lang="en-US" sz="1400" dirty="0"/>
+          </a:p>
+        </p:txBody>
+      </p:sp>
+      <p:sp>
+        <p:nvSpPr>
+          <p:cNvPr id="39" name="Shape 37"/>
           <p:cNvSpPr/>
           <p:nvPr/>
         </p:nvSpPr>
@@ -9256,7 +9690,7 @@
       </p:sp>
       <p:sp>
         <p:nvSpPr>
-          <p:cNvPr id="31" name="Text 29"/>
+          <p:cNvPr id="40" name="Text 38"/>
           <p:cNvSpPr/>
           <p:nvPr/>
         </p:nvSpPr>
@@ -9295,7 +9729,7 @@
       </p:sp>
       <p:sp>
         <p:nvSpPr>
-          <p:cNvPr id="32" name="Shape 30"/>
+          <p:cNvPr id="41" name="Shape 39"/>
           <p:cNvSpPr/>
           <p:nvPr/>
         </p:nvSpPr>
@@ -9322,7 +9756,7 @@
       </p:sp>
       <p:sp>
         <p:nvSpPr>
-          <p:cNvPr id="33" name="Text 31"/>
+          <p:cNvPr id="42" name="Text 40"/>
           <p:cNvSpPr/>
           <p:nvPr/>
         </p:nvSpPr>
@@ -9645,7 +10079,7 @@
                 <a:ea typeface="Calibri" pitchFamily="34" charset="-122"/>
                 <a:cs typeface="Calibri" pitchFamily="34" charset="-120"/>
               </a:rPr>
-              <a:t>Word Labs  •  wordlabs.app  •  Root: 'use' = to employ or utilise</a:t>
+              <a:t>Word Labs  •  wordlabs.app  •  Root: 'use' = do something with</a:t>
             </a:r>
             <a:endParaRPr lang="en-US" sz="800" dirty="0"/>
           </a:p>
@@ -9784,7 +10218,7 @@
                 <a:ea typeface="Trebuchet MS" pitchFamily="34" charset="-122"/>
                 <a:cs typeface="Trebuchet MS" pitchFamily="34" charset="-120"/>
               </a:rPr>
-              <a:t>useful</a:t>
+              <a:t>reusable</a:t>
             </a:r>
             <a:endParaRPr lang="en-US" sz="2800" dirty="0"/>
           </a:p>
@@ -9864,7 +10298,7 @@
         </p:nvSpPr>
         <p:spPr>
           <a:xfrm>
-            <a:off x="2938272" y="2258568"/>
+            <a:off x="2221992" y="2258568"/>
             <a:ext cx="1828800" cy="292608"/>
           </a:xfrm>
           <a:prstGeom prst="rect">
@@ -9873,11 +10307,11 @@
             </a:avLst>
           </a:prstGeom>
           <a:solidFill>
-            <a:srgbClr val="CCFBF1"/>
+            <a:srgbClr val="DDD6FE"/>
           </a:solidFill>
           <a:ln w="19050">
             <a:solidFill>
-              <a:srgbClr val="0D9488"/>
+              <a:srgbClr val="7C3AED"/>
             </a:solidFill>
             <a:prstDash val="solid"/>
           </a:ln>
@@ -9898,7 +10332,7 @@
         </p:nvSpPr>
         <p:spPr>
           <a:xfrm>
-            <a:off x="2938272" y="2258568"/>
+            <a:off x="2221992" y="2258568"/>
             <a:ext cx="1828800" cy="292608"/>
           </a:xfrm>
           <a:prstGeom prst="rect">
@@ -9917,13 +10351,13 @@
             <a:r>
               <a:rPr lang="en-US" sz="1300" b="1" dirty="0">
                 <a:solidFill>
-                  <a:srgbClr val="0F766E"/>
+                  <a:srgbClr val="4C1D95"/>
                 </a:solidFill>
                 <a:latin typeface="Trebuchet MS" pitchFamily="34" charset="0"/>
                 <a:ea typeface="Trebuchet MS" pitchFamily="34" charset="-122"/>
                 <a:cs typeface="Trebuchet MS" pitchFamily="34" charset="-120"/>
               </a:rPr>
-              <a:t>use</a:t>
+              <a:t>re</a:t>
             </a:r>
             <a:endParaRPr lang="en-US" sz="1300" dirty="0"/>
           </a:p>
@@ -9937,7 +10371,7 @@
         </p:nvSpPr>
         <p:spPr>
           <a:xfrm>
-            <a:off x="2938272" y="2569464"/>
+            <a:off x="2221992" y="2569464"/>
             <a:ext cx="1828800" cy="201168"/>
           </a:xfrm>
           <a:prstGeom prst="rect">
@@ -9962,7 +10396,7 @@
                 <a:ea typeface="Calibri" pitchFamily="34" charset="-122"/>
                 <a:cs typeface="Calibri" pitchFamily="34" charset="-120"/>
               </a:rPr>
-              <a:t>to employ or utilise</a:t>
+              <a:t>again</a:t>
             </a:r>
             <a:endParaRPr lang="en-US" sz="850" dirty="0"/>
           </a:p>
@@ -9976,7 +10410,7 @@
         </p:nvSpPr>
         <p:spPr>
           <a:xfrm>
-            <a:off x="5803392" y="2258568"/>
+            <a:off x="4370832" y="2258568"/>
             <a:ext cx="1828800" cy="292608"/>
           </a:xfrm>
           <a:prstGeom prst="rect">
@@ -9985,11 +10419,11 @@
             </a:avLst>
           </a:prstGeom>
           <a:solidFill>
-            <a:srgbClr val="FCE7F3"/>
+            <a:srgbClr val="CCFBF1"/>
           </a:solidFill>
           <a:ln w="19050">
             <a:solidFill>
-              <a:srgbClr val="DB2777"/>
+              <a:srgbClr val="0D9488"/>
             </a:solidFill>
             <a:prstDash val="solid"/>
           </a:ln>
@@ -10010,7 +10444,7 @@
         </p:nvSpPr>
         <p:spPr>
           <a:xfrm>
-            <a:off x="5803392" y="2258568"/>
+            <a:off x="4370832" y="2258568"/>
             <a:ext cx="1828800" cy="292608"/>
           </a:xfrm>
           <a:prstGeom prst="rect">
@@ -10029,13 +10463,13 @@
             <a:r>
               <a:rPr lang="en-US" sz="1300" b="1" dirty="0">
                 <a:solidFill>
-                  <a:srgbClr val="9D174D"/>
+                  <a:srgbClr val="0F766E"/>
                 </a:solidFill>
                 <a:latin typeface="Trebuchet MS" pitchFamily="34" charset="0"/>
                 <a:ea typeface="Trebuchet MS" pitchFamily="34" charset="-122"/>
                 <a:cs typeface="Trebuchet MS" pitchFamily="34" charset="-120"/>
               </a:rPr>
-              <a:t>ful</a:t>
+              <a:t>use</a:t>
             </a:r>
             <a:endParaRPr lang="en-US" sz="1300" dirty="0"/>
           </a:p>
@@ -10049,7 +10483,7 @@
         </p:nvSpPr>
         <p:spPr>
           <a:xfrm>
-            <a:off x="5803392" y="2569464"/>
+            <a:off x="4370832" y="2569464"/>
             <a:ext cx="1828800" cy="201168"/>
           </a:xfrm>
           <a:prstGeom prst="rect">
@@ -10074,7 +10508,7 @@
                 <a:ea typeface="Calibri" pitchFamily="34" charset="-122"/>
                 <a:cs typeface="Calibri" pitchFamily="34" charset="-120"/>
               </a:rPr>
-              <a:t>full of, having the quality of</a:t>
+              <a:t>do something with</a:t>
             </a:r>
             <a:endParaRPr lang="en-US" sz="850" dirty="0"/>
           </a:p>
@@ -10083,6 +10517,118 @@
       <p:sp>
         <p:nvSpPr>
           <p:cNvPr id="22" name="Shape 20"/>
+          <p:cNvSpPr/>
+          <p:nvPr/>
+        </p:nvSpPr>
+        <p:spPr>
+          <a:xfrm>
+            <a:off x="6519672" y="2258568"/>
+            <a:ext cx="1828800" cy="292608"/>
+          </a:xfrm>
+          <a:prstGeom prst="rect">
+            <a:avLst>
+              <a:gd name="adj" fmla="val 25000"/>
+            </a:avLst>
+          </a:prstGeom>
+          <a:solidFill>
+            <a:srgbClr val="FCE7F3"/>
+          </a:solidFill>
+          <a:ln w="19050">
+            <a:solidFill>
+              <a:srgbClr val="DB2777"/>
+            </a:solidFill>
+            <a:prstDash val="solid"/>
+          </a:ln>
+          <a:effectLst>
+            <a:outerShdw sx="100000" sy="100000" kx="0" ky="0" algn="bl" rotWithShape="0" blurRad="101600" dist="38100" dir="8100000">
+              <a:srgbClr val="000000">
+                <a:alpha val="12000"/>
+              </a:srgbClr>
+            </a:outerShdw>
+          </a:effectLst>
+        </p:spPr>
+      </p:sp>
+      <p:sp>
+        <p:nvSpPr>
+          <p:cNvPr id="23" name="Text 21"/>
+          <p:cNvSpPr/>
+          <p:nvPr/>
+        </p:nvSpPr>
+        <p:spPr>
+          <a:xfrm>
+            <a:off x="6519672" y="2258568"/>
+            <a:ext cx="1828800" cy="292608"/>
+          </a:xfrm>
+          <a:prstGeom prst="rect">
+            <a:avLst/>
+          </a:prstGeom>
+          <a:noFill/>
+          <a:ln/>
+        </p:spPr>
+        <p:txBody>
+          <a:bodyPr wrap="square" lIns="0" tIns="0" rIns="0" bIns="0" rtlCol="0" anchor="ctr"/>
+          <a:lstStyle/>
+          <a:p>
+            <a:pPr algn="ctr" indent="0" marL="0">
+              <a:buNone/>
+            </a:pPr>
+            <a:r>
+              <a:rPr lang="en-US" sz="1300" b="1" dirty="0">
+                <a:solidFill>
+                  <a:srgbClr val="9D174D"/>
+                </a:solidFill>
+                <a:latin typeface="Trebuchet MS" pitchFamily="34" charset="0"/>
+                <a:ea typeface="Trebuchet MS" pitchFamily="34" charset="-122"/>
+                <a:cs typeface="Trebuchet MS" pitchFamily="34" charset="-120"/>
+              </a:rPr>
+              <a:t>able</a:t>
+            </a:r>
+            <a:endParaRPr lang="en-US" sz="1300" dirty="0"/>
+          </a:p>
+        </p:txBody>
+      </p:sp>
+      <p:sp>
+        <p:nvSpPr>
+          <p:cNvPr id="24" name="Text 22"/>
+          <p:cNvSpPr/>
+          <p:nvPr/>
+        </p:nvSpPr>
+        <p:spPr>
+          <a:xfrm>
+            <a:off x="6519672" y="2569464"/>
+            <a:ext cx="1828800" cy="201168"/>
+          </a:xfrm>
+          <a:prstGeom prst="rect">
+            <a:avLst/>
+          </a:prstGeom>
+          <a:noFill/>
+          <a:ln/>
+        </p:spPr>
+        <p:txBody>
+          <a:bodyPr wrap="square" lIns="0" tIns="0" rIns="0" bIns="0" rtlCol="0" anchor="t"/>
+          <a:lstStyle/>
+          <a:p>
+            <a:pPr algn="ctr" indent="0" marL="0">
+              <a:buNone/>
+            </a:pPr>
+            <a:r>
+              <a:rPr lang="en-US" sz="850" dirty="0">
+                <a:solidFill>
+                  <a:srgbClr val="475569"/>
+                </a:solidFill>
+                <a:latin typeface="Calibri" pitchFamily="34" charset="0"/>
+                <a:ea typeface="Calibri" pitchFamily="34" charset="-122"/>
+                <a:cs typeface="Calibri" pitchFamily="34" charset="-120"/>
+              </a:rPr>
+              <a:t>able to</a:t>
+            </a:r>
+            <a:endParaRPr lang="en-US" sz="850" dirty="0"/>
+          </a:p>
+        </p:txBody>
+      </p:sp>
+      <p:sp>
+        <p:nvSpPr>
+          <p:cNvPr id="25" name="Shape 23"/>
           <p:cNvSpPr/>
           <p:nvPr/>
         </p:nvSpPr>
@@ -10109,7 +10655,7 @@
       </p:sp>
       <p:sp>
         <p:nvSpPr>
-          <p:cNvPr id="23" name="Text 21"/>
+          <p:cNvPr id="26" name="Text 24"/>
           <p:cNvSpPr/>
           <p:nvPr/>
         </p:nvSpPr>
@@ -10148,7 +10694,7 @@
       </p:sp>
       <p:sp>
         <p:nvSpPr>
-          <p:cNvPr id="24" name="Shape 22"/>
+          <p:cNvPr id="27" name="Shape 25"/>
           <p:cNvSpPr/>
           <p:nvPr/>
         </p:nvSpPr>
@@ -10175,14 +10721,14 @@
       </p:sp>
       <p:sp>
         <p:nvSpPr>
-          <p:cNvPr id="25" name="Shape 23"/>
-          <p:cNvSpPr/>
-          <p:nvPr/>
-        </p:nvSpPr>
-        <p:spPr>
-          <a:xfrm>
-            <a:off x="2999232" y="3364992"/>
-            <a:ext cx="1645920" cy="475488"/>
+          <p:cNvPr id="28" name="Shape 26"/>
+          <p:cNvSpPr/>
+          <p:nvPr/>
+        </p:nvSpPr>
+        <p:spPr>
+          <a:xfrm>
+            <a:off x="1975104" y="3364992"/>
+            <a:ext cx="1554480" cy="475488"/>
           </a:xfrm>
           <a:prstGeom prst="rect">
             <a:avLst>
@@ -10202,14 +10748,14 @@
       </p:sp>
       <p:sp>
         <p:nvSpPr>
-          <p:cNvPr id="26" name="Text 24"/>
-          <p:cNvSpPr/>
-          <p:nvPr/>
-        </p:nvSpPr>
-        <p:spPr>
-          <a:xfrm>
-            <a:off x="2999232" y="3364992"/>
-            <a:ext cx="1645920" cy="475488"/>
+          <p:cNvPr id="29" name="Text 27"/>
+          <p:cNvSpPr/>
+          <p:nvPr/>
+        </p:nvSpPr>
+        <p:spPr>
+          <a:xfrm>
+            <a:off x="1975104" y="3364992"/>
+            <a:ext cx="1554480" cy="475488"/>
           </a:xfrm>
           <a:prstGeom prst="rect">
             <a:avLst/>
@@ -10233,7 +10779,7 @@
                 <a:ea typeface="Trebuchet MS" pitchFamily="34" charset="-122"/>
                 <a:cs typeface="Trebuchet MS" pitchFamily="34" charset="-120"/>
               </a:rPr>
-              <a:t>use</a:t>
+              <a:t>re</a:t>
             </a:r>
             <a:endParaRPr lang="en-US" sz="1400" dirty="0"/>
           </a:p>
@@ -10241,14 +10787,14 @@
       </p:sp>
       <p:sp>
         <p:nvSpPr>
-          <p:cNvPr id="27" name="Text 25"/>
-          <p:cNvSpPr/>
-          <p:nvPr/>
-        </p:nvSpPr>
-        <p:spPr>
-          <a:xfrm>
-            <a:off x="4645152" y="3364992"/>
-            <a:ext cx="1097280" cy="475488"/>
+          <p:cNvPr id="30" name="Text 28"/>
+          <p:cNvSpPr/>
+          <p:nvPr/>
+        </p:nvSpPr>
+        <p:spPr>
+          <a:xfrm>
+            <a:off x="3529584" y="3364992"/>
+            <a:ext cx="73152" cy="475488"/>
           </a:xfrm>
           <a:prstGeom prst="rect">
             <a:avLst/>
@@ -10280,14 +10826,14 @@
       </p:sp>
       <p:sp>
         <p:nvSpPr>
-          <p:cNvPr id="28" name="Shape 26"/>
-          <p:cNvSpPr/>
-          <p:nvPr/>
-        </p:nvSpPr>
-        <p:spPr>
-          <a:xfrm>
-            <a:off x="5742432" y="3364992"/>
-            <a:ext cx="1645920" cy="475488"/>
+          <p:cNvPr id="31" name="Shape 29"/>
+          <p:cNvSpPr/>
+          <p:nvPr/>
+        </p:nvSpPr>
+        <p:spPr>
+          <a:xfrm>
+            <a:off x="3602736" y="3364992"/>
+            <a:ext cx="1554480" cy="475488"/>
           </a:xfrm>
           <a:prstGeom prst="rect">
             <a:avLst>
@@ -10307,14 +10853,14 @@
       </p:sp>
       <p:sp>
         <p:nvSpPr>
-          <p:cNvPr id="29" name="Text 27"/>
-          <p:cNvSpPr/>
-          <p:nvPr/>
-        </p:nvSpPr>
-        <p:spPr>
-          <a:xfrm>
-            <a:off x="5742432" y="3364992"/>
-            <a:ext cx="1645920" cy="475488"/>
+          <p:cNvPr id="32" name="Text 30"/>
+          <p:cNvSpPr/>
+          <p:nvPr/>
+        </p:nvSpPr>
+        <p:spPr>
+          <a:xfrm>
+            <a:off x="3602736" y="3364992"/>
+            <a:ext cx="1554480" cy="475488"/>
           </a:xfrm>
           <a:prstGeom prst="rect">
             <a:avLst/>
@@ -10338,7 +10884,7 @@
                 <a:ea typeface="Trebuchet MS" pitchFamily="34" charset="-122"/>
                 <a:cs typeface="Trebuchet MS" pitchFamily="34" charset="-120"/>
               </a:rPr>
-              <a:t>ful</a:t>
+              <a:t>us</a:t>
             </a:r>
             <a:endParaRPr lang="en-US" sz="1400" dirty="0"/>
           </a:p>
@@ -10346,7 +10892,217 @@
       </p:sp>
       <p:sp>
         <p:nvSpPr>
-          <p:cNvPr id="30" name="Shape 28"/>
+          <p:cNvPr id="33" name="Text 31"/>
+          <p:cNvSpPr/>
+          <p:nvPr/>
+        </p:nvSpPr>
+        <p:spPr>
+          <a:xfrm>
+            <a:off x="5157216" y="3364992"/>
+            <a:ext cx="73152" cy="475488"/>
+          </a:xfrm>
+          <a:prstGeom prst="rect">
+            <a:avLst/>
+          </a:prstGeom>
+          <a:noFill/>
+          <a:ln/>
+        </p:spPr>
+        <p:txBody>
+          <a:bodyPr wrap="square" lIns="0" tIns="0" rIns="0" bIns="0" rtlCol="0" anchor="ctr"/>
+          <a:lstStyle/>
+          <a:p>
+            <a:pPr algn="ctr" indent="0" marL="0">
+              <a:buNone/>
+            </a:pPr>
+            <a:r>
+              <a:rPr lang="en-US" sz="1600" b="1" dirty="0">
+                <a:solidFill>
+                  <a:srgbClr val="0D9488"/>
+                </a:solidFill>
+                <a:latin typeface="Trebuchet MS" pitchFamily="34" charset="0"/>
+                <a:ea typeface="Trebuchet MS" pitchFamily="34" charset="-122"/>
+                <a:cs typeface="Trebuchet MS" pitchFamily="34" charset="-120"/>
+              </a:rPr>
+              <a:t>·</a:t>
+            </a:r>
+            <a:endParaRPr lang="en-US" sz="1600" dirty="0"/>
+          </a:p>
+        </p:txBody>
+      </p:sp>
+      <p:sp>
+        <p:nvSpPr>
+          <p:cNvPr id="34" name="Shape 32"/>
+          <p:cNvSpPr/>
+          <p:nvPr/>
+        </p:nvSpPr>
+        <p:spPr>
+          <a:xfrm>
+            <a:off x="5230368" y="3364992"/>
+            <a:ext cx="1554480" cy="475488"/>
+          </a:xfrm>
+          <a:prstGeom prst="rect">
+            <a:avLst>
+              <a:gd name="adj" fmla="val 9615"/>
+            </a:avLst>
+          </a:prstGeom>
+          <a:solidFill>
+            <a:srgbClr val="FFFFFF"/>
+          </a:solidFill>
+          <a:ln w="12700">
+            <a:solidFill>
+              <a:srgbClr val="0D9488"/>
+            </a:solidFill>
+            <a:prstDash val="solid"/>
+          </a:ln>
+        </p:spPr>
+      </p:sp>
+      <p:sp>
+        <p:nvSpPr>
+          <p:cNvPr id="35" name="Text 33"/>
+          <p:cNvSpPr/>
+          <p:nvPr/>
+        </p:nvSpPr>
+        <p:spPr>
+          <a:xfrm>
+            <a:off x="5230368" y="3364992"/>
+            <a:ext cx="1554480" cy="475488"/>
+          </a:xfrm>
+          <a:prstGeom prst="rect">
+            <a:avLst/>
+          </a:prstGeom>
+          <a:noFill/>
+          <a:ln/>
+        </p:spPr>
+        <p:txBody>
+          <a:bodyPr wrap="square" lIns="0" tIns="0" rIns="0" bIns="0" rtlCol="0" anchor="ctr"/>
+          <a:lstStyle/>
+          <a:p>
+            <a:pPr algn="ctr" indent="0" marL="0">
+              <a:buNone/>
+            </a:pPr>
+            <a:r>
+              <a:rPr lang="en-US" sz="1400" b="1" dirty="0">
+                <a:solidFill>
+                  <a:srgbClr val="0D9488"/>
+                </a:solidFill>
+                <a:latin typeface="Trebuchet MS" pitchFamily="34" charset="0"/>
+                <a:ea typeface="Trebuchet MS" pitchFamily="34" charset="-122"/>
+                <a:cs typeface="Trebuchet MS" pitchFamily="34" charset="-120"/>
+              </a:rPr>
+              <a:t>a</a:t>
+            </a:r>
+            <a:endParaRPr lang="en-US" sz="1400" dirty="0"/>
+          </a:p>
+        </p:txBody>
+      </p:sp>
+      <p:sp>
+        <p:nvSpPr>
+          <p:cNvPr id="36" name="Text 34"/>
+          <p:cNvSpPr/>
+          <p:nvPr/>
+        </p:nvSpPr>
+        <p:spPr>
+          <a:xfrm>
+            <a:off x="6784848" y="3364992"/>
+            <a:ext cx="73152" cy="475488"/>
+          </a:xfrm>
+          <a:prstGeom prst="rect">
+            <a:avLst/>
+          </a:prstGeom>
+          <a:noFill/>
+          <a:ln/>
+        </p:spPr>
+        <p:txBody>
+          <a:bodyPr wrap="square" lIns="0" tIns="0" rIns="0" bIns="0" rtlCol="0" anchor="ctr"/>
+          <a:lstStyle/>
+          <a:p>
+            <a:pPr algn="ctr" indent="0" marL="0">
+              <a:buNone/>
+            </a:pPr>
+            <a:r>
+              <a:rPr lang="en-US" sz="1600" b="1" dirty="0">
+                <a:solidFill>
+                  <a:srgbClr val="0D9488"/>
+                </a:solidFill>
+                <a:latin typeface="Trebuchet MS" pitchFamily="34" charset="0"/>
+                <a:ea typeface="Trebuchet MS" pitchFamily="34" charset="-122"/>
+                <a:cs typeface="Trebuchet MS" pitchFamily="34" charset="-120"/>
+              </a:rPr>
+              <a:t>·</a:t>
+            </a:r>
+            <a:endParaRPr lang="en-US" sz="1600" dirty="0"/>
+          </a:p>
+        </p:txBody>
+      </p:sp>
+      <p:sp>
+        <p:nvSpPr>
+          <p:cNvPr id="37" name="Shape 35"/>
+          <p:cNvSpPr/>
+          <p:nvPr/>
+        </p:nvSpPr>
+        <p:spPr>
+          <a:xfrm>
+            <a:off x="6858000" y="3364992"/>
+            <a:ext cx="1554480" cy="475488"/>
+          </a:xfrm>
+          <a:prstGeom prst="rect">
+            <a:avLst>
+              <a:gd name="adj" fmla="val 9615"/>
+            </a:avLst>
+          </a:prstGeom>
+          <a:solidFill>
+            <a:srgbClr val="FFFFFF"/>
+          </a:solidFill>
+          <a:ln w="12700">
+            <a:solidFill>
+              <a:srgbClr val="0D9488"/>
+            </a:solidFill>
+            <a:prstDash val="solid"/>
+          </a:ln>
+        </p:spPr>
+      </p:sp>
+      <p:sp>
+        <p:nvSpPr>
+          <p:cNvPr id="38" name="Text 36"/>
+          <p:cNvSpPr/>
+          <p:nvPr/>
+        </p:nvSpPr>
+        <p:spPr>
+          <a:xfrm>
+            <a:off x="6858000" y="3364992"/>
+            <a:ext cx="1554480" cy="475488"/>
+          </a:xfrm>
+          <a:prstGeom prst="rect">
+            <a:avLst/>
+          </a:prstGeom>
+          <a:noFill/>
+          <a:ln/>
+        </p:spPr>
+        <p:txBody>
+          <a:bodyPr wrap="square" lIns="0" tIns="0" rIns="0" bIns="0" rtlCol="0" anchor="ctr"/>
+          <a:lstStyle/>
+          <a:p>
+            <a:pPr algn="ctr" indent="0" marL="0">
+              <a:buNone/>
+            </a:pPr>
+            <a:r>
+              <a:rPr lang="en-US" sz="1400" b="1" dirty="0">
+                <a:solidFill>
+                  <a:srgbClr val="0D9488"/>
+                </a:solidFill>
+                <a:latin typeface="Trebuchet MS" pitchFamily="34" charset="0"/>
+                <a:ea typeface="Trebuchet MS" pitchFamily="34" charset="-122"/>
+                <a:cs typeface="Trebuchet MS" pitchFamily="34" charset="-120"/>
+              </a:rPr>
+              <a:t>ble</a:t>
+            </a:r>
+            <a:endParaRPr lang="en-US" sz="1400" dirty="0"/>
+          </a:p>
+        </p:txBody>
+      </p:sp>
+      <p:sp>
+        <p:nvSpPr>
+          <p:cNvPr id="39" name="Shape 37"/>
           <p:cNvSpPr/>
           <p:nvPr/>
         </p:nvSpPr>
@@ -10373,7 +11129,7 @@
       </p:sp>
       <p:sp>
         <p:nvSpPr>
-          <p:cNvPr id="31" name="Text 29"/>
+          <p:cNvPr id="40" name="Text 38"/>
           <p:cNvSpPr/>
           <p:nvPr/>
         </p:nvSpPr>
@@ -10412,18 +11168,18 @@
       </p:sp>
       <p:sp>
         <p:nvSpPr>
-          <p:cNvPr id="32" name="Shape 30"/>
+          <p:cNvPr id="41" name="Shape 39"/>
           <p:cNvSpPr/>
           <p:nvPr/>
         </p:nvSpPr>
         <p:spPr>
           <a:xfrm>
             <a:off x="1874520" y="4096512"/>
-            <a:ext cx="6903720" cy="804672"/>
+            <a:ext cx="6903720" cy="658368"/>
           </a:xfrm>
           <a:prstGeom prst="rect">
             <a:avLst>
-              <a:gd name="adj" fmla="val 6818"/>
+              <a:gd name="adj" fmla="val 8333"/>
             </a:avLst>
           </a:prstGeom>
           <a:solidFill>
@@ -10439,18 +11195,18 @@
       </p:sp>
       <p:sp>
         <p:nvSpPr>
-          <p:cNvPr id="33" name="Shape 31"/>
-          <p:cNvSpPr/>
-          <p:nvPr/>
-        </p:nvSpPr>
-        <p:spPr>
-          <a:xfrm>
-            <a:off x="2427732" y="4169664"/>
-            <a:ext cx="685800" cy="384048"/>
+          <p:cNvPr id="42" name="Shape 40"/>
+          <p:cNvSpPr/>
+          <p:nvPr/>
+        </p:nvSpPr>
+        <p:spPr>
+          <a:xfrm>
+            <a:off x="2124837" y="4169664"/>
+            <a:ext cx="685800" cy="475488"/>
           </a:xfrm>
           <a:prstGeom prst="rect">
             <a:avLst>
-              <a:gd name="adj" fmla="val 9524"/>
+              <a:gd name="adj" fmla="val 7692"/>
             </a:avLst>
           </a:prstGeom>
           <a:solidFill>
@@ -10466,14 +11222,14 @@
       </p:sp>
       <p:sp>
         <p:nvSpPr>
-          <p:cNvPr id="34" name="Text 32"/>
-          <p:cNvSpPr/>
-          <p:nvPr/>
-        </p:nvSpPr>
-        <p:spPr>
-          <a:xfrm>
-            <a:off x="2427732" y="4169664"/>
-            <a:ext cx="685800" cy="384048"/>
+          <p:cNvPr id="43" name="Text 41"/>
+          <p:cNvSpPr/>
+          <p:nvPr/>
+        </p:nvSpPr>
+        <p:spPr>
+          <a:xfrm>
+            <a:off x="2124837" y="4169664"/>
+            <a:ext cx="685800" cy="475488"/>
           </a:xfrm>
           <a:prstGeom prst="rect">
             <a:avLst/>
@@ -10497,7 +11253,7 @@
                 <a:ea typeface="Trebuchet MS" pitchFamily="34" charset="-122"/>
                 <a:cs typeface="Trebuchet MS" pitchFamily="34" charset="-120"/>
               </a:rPr>
-              <a:t>u</a:t>
+              <a:t>r</a:t>
             </a:r>
             <a:endParaRPr lang="en-US" sz="900" dirty="0"/>
           </a:p>
@@ -10505,18 +11261,18 @@
       </p:sp>
       <p:sp>
         <p:nvSpPr>
-          <p:cNvPr id="35" name="Shape 33"/>
-          <p:cNvSpPr/>
-          <p:nvPr/>
-        </p:nvSpPr>
-        <p:spPr>
-          <a:xfrm>
-            <a:off x="3639312" y="4169664"/>
-            <a:ext cx="685800" cy="384048"/>
+          <p:cNvPr id="44" name="Shape 42"/>
+          <p:cNvSpPr/>
+          <p:nvPr/>
+        </p:nvSpPr>
+        <p:spPr>
+          <a:xfrm>
+            <a:off x="3033522" y="4169664"/>
+            <a:ext cx="685800" cy="475488"/>
           </a:xfrm>
           <a:prstGeom prst="rect">
             <a:avLst>
-              <a:gd name="adj" fmla="val 9524"/>
+              <a:gd name="adj" fmla="val 7692"/>
             </a:avLst>
           </a:prstGeom>
           <a:solidFill>
@@ -10532,14 +11288,14 @@
       </p:sp>
       <p:sp>
         <p:nvSpPr>
-          <p:cNvPr id="36" name="Text 34"/>
-          <p:cNvSpPr/>
-          <p:nvPr/>
-        </p:nvSpPr>
-        <p:spPr>
-          <a:xfrm>
-            <a:off x="3639312" y="4169664"/>
-            <a:ext cx="685800" cy="384048"/>
+          <p:cNvPr id="45" name="Text 43"/>
+          <p:cNvSpPr/>
+          <p:nvPr/>
+        </p:nvSpPr>
+        <p:spPr>
+          <a:xfrm>
+            <a:off x="3033522" y="4169664"/>
+            <a:ext cx="685800" cy="475488"/>
           </a:xfrm>
           <a:prstGeom prst="rect">
             <a:avLst/>
@@ -10563,7 +11319,7 @@
                 <a:ea typeface="Trebuchet MS" pitchFamily="34" charset="-122"/>
                 <a:cs typeface="Trebuchet MS" pitchFamily="34" charset="-120"/>
               </a:rPr>
-              <a:t>se</a:t>
+              <a:t>e</a:t>
             </a:r>
             <a:endParaRPr lang="en-US" sz="900" dirty="0"/>
           </a:p>
@@ -10571,57 +11327,18 @@
       </p:sp>
       <p:sp>
         <p:nvSpPr>
-          <p:cNvPr id="37" name="Text 35"/>
-          <p:cNvSpPr/>
-          <p:nvPr/>
-        </p:nvSpPr>
-        <p:spPr>
-          <a:xfrm>
-            <a:off x="3639312" y="4572000"/>
-            <a:ext cx="685800" cy="219456"/>
-          </a:xfrm>
-          <a:prstGeom prst="rect">
-            <a:avLst/>
-          </a:prstGeom>
-          <a:noFill/>
-          <a:ln/>
-        </p:spPr>
-        <p:txBody>
-          <a:bodyPr wrap="square" lIns="0" tIns="0" rIns="0" bIns="0" rtlCol="0" anchor="t"/>
-          <a:lstStyle/>
-          <a:p>
-            <a:pPr algn="ctr" indent="0" marL="0">
-              <a:buNone/>
-            </a:pPr>
-            <a:r>
-              <a:rPr lang="en-US" sz="750" i="1" dirty="0">
-                <a:solidFill>
-                  <a:srgbClr val="94A3B8"/>
-                </a:solidFill>
-                <a:latin typeface="Calibri" pitchFamily="34" charset="0"/>
-                <a:ea typeface="Calibri" pitchFamily="34" charset="-122"/>
-                <a:cs typeface="Calibri" pitchFamily="34" charset="-120"/>
-              </a:rPr>
-              <a:t>/z/</a:t>
-            </a:r>
-            <a:endParaRPr lang="en-US" sz="750" dirty="0"/>
-          </a:p>
-        </p:txBody>
-      </p:sp>
-      <p:sp>
-        <p:nvSpPr>
-          <p:cNvPr id="38" name="Shape 36"/>
-          <p:cNvSpPr/>
-          <p:nvPr/>
-        </p:nvSpPr>
-        <p:spPr>
-          <a:xfrm>
-            <a:off x="4850892" y="4169664"/>
-            <a:ext cx="685800" cy="384048"/>
+          <p:cNvPr id="46" name="Shape 44"/>
+          <p:cNvSpPr/>
+          <p:nvPr/>
+        </p:nvSpPr>
+        <p:spPr>
+          <a:xfrm>
+            <a:off x="3942207" y="4169664"/>
+            <a:ext cx="685800" cy="475488"/>
           </a:xfrm>
           <a:prstGeom prst="rect">
             <a:avLst>
-              <a:gd name="adj" fmla="val 9524"/>
+              <a:gd name="adj" fmla="val 7692"/>
             </a:avLst>
           </a:prstGeom>
           <a:solidFill>
@@ -10637,14 +11354,14 @@
       </p:sp>
       <p:sp>
         <p:nvSpPr>
-          <p:cNvPr id="39" name="Text 37"/>
-          <p:cNvSpPr/>
-          <p:nvPr/>
-        </p:nvSpPr>
-        <p:spPr>
-          <a:xfrm>
-            <a:off x="4850892" y="4169664"/>
-            <a:ext cx="685800" cy="384048"/>
+          <p:cNvPr id="47" name="Text 45"/>
+          <p:cNvSpPr/>
+          <p:nvPr/>
+        </p:nvSpPr>
+        <p:spPr>
+          <a:xfrm>
+            <a:off x="3942207" y="4169664"/>
+            <a:ext cx="685800" cy="475488"/>
           </a:xfrm>
           <a:prstGeom prst="rect">
             <a:avLst/>
@@ -10668,7 +11385,7 @@
                 <a:ea typeface="Trebuchet MS" pitchFamily="34" charset="-122"/>
                 <a:cs typeface="Trebuchet MS" pitchFamily="34" charset="-120"/>
               </a:rPr>
-              <a:t>f</a:t>
+              <a:t>u</a:t>
             </a:r>
             <a:endParaRPr lang="en-US" sz="900" dirty="0"/>
           </a:p>
@@ -10676,18 +11393,18 @@
       </p:sp>
       <p:sp>
         <p:nvSpPr>
-          <p:cNvPr id="40" name="Shape 38"/>
-          <p:cNvSpPr/>
-          <p:nvPr/>
-        </p:nvSpPr>
-        <p:spPr>
-          <a:xfrm>
-            <a:off x="6062472" y="4169664"/>
-            <a:ext cx="685800" cy="384048"/>
+          <p:cNvPr id="48" name="Shape 46"/>
+          <p:cNvSpPr/>
+          <p:nvPr/>
+        </p:nvSpPr>
+        <p:spPr>
+          <a:xfrm>
+            <a:off x="4850892" y="4169664"/>
+            <a:ext cx="685800" cy="475488"/>
           </a:xfrm>
           <a:prstGeom prst="rect">
             <a:avLst>
-              <a:gd name="adj" fmla="val 9524"/>
+              <a:gd name="adj" fmla="val 7692"/>
             </a:avLst>
           </a:prstGeom>
           <a:solidFill>
@@ -10703,14 +11420,14 @@
       </p:sp>
       <p:sp>
         <p:nvSpPr>
-          <p:cNvPr id="41" name="Text 39"/>
-          <p:cNvSpPr/>
-          <p:nvPr/>
-        </p:nvSpPr>
-        <p:spPr>
-          <a:xfrm>
-            <a:off x="6062472" y="4169664"/>
-            <a:ext cx="685800" cy="384048"/>
+          <p:cNvPr id="49" name="Text 47"/>
+          <p:cNvSpPr/>
+          <p:nvPr/>
+        </p:nvSpPr>
+        <p:spPr>
+          <a:xfrm>
+            <a:off x="4850892" y="4169664"/>
+            <a:ext cx="685800" cy="475488"/>
           </a:xfrm>
           <a:prstGeom prst="rect">
             <a:avLst/>
@@ -10734,7 +11451,7 @@
                 <a:ea typeface="Trebuchet MS" pitchFamily="34" charset="-122"/>
                 <a:cs typeface="Trebuchet MS" pitchFamily="34" charset="-120"/>
               </a:rPr>
-              <a:t>u</a:t>
+              <a:t>s</a:t>
             </a:r>
             <a:endParaRPr lang="en-US" sz="900" dirty="0"/>
           </a:p>
@@ -10742,18 +11459,18 @@
       </p:sp>
       <p:sp>
         <p:nvSpPr>
-          <p:cNvPr id="42" name="Shape 40"/>
-          <p:cNvSpPr/>
-          <p:nvPr/>
-        </p:nvSpPr>
-        <p:spPr>
-          <a:xfrm>
-            <a:off x="7274052" y="4169664"/>
-            <a:ext cx="685800" cy="384048"/>
+          <p:cNvPr id="50" name="Shape 48"/>
+          <p:cNvSpPr/>
+          <p:nvPr/>
+        </p:nvSpPr>
+        <p:spPr>
+          <a:xfrm>
+            <a:off x="5759577" y="4169664"/>
+            <a:ext cx="685800" cy="475488"/>
           </a:xfrm>
           <a:prstGeom prst="rect">
             <a:avLst>
-              <a:gd name="adj" fmla="val 9524"/>
+              <a:gd name="adj" fmla="val 7692"/>
             </a:avLst>
           </a:prstGeom>
           <a:solidFill>
@@ -10769,14 +11486,14 @@
       </p:sp>
       <p:sp>
         <p:nvSpPr>
-          <p:cNvPr id="43" name="Text 41"/>
-          <p:cNvSpPr/>
-          <p:nvPr/>
-        </p:nvSpPr>
-        <p:spPr>
-          <a:xfrm>
-            <a:off x="7274052" y="4169664"/>
-            <a:ext cx="685800" cy="384048"/>
+          <p:cNvPr id="51" name="Text 49"/>
+          <p:cNvSpPr/>
+          <p:nvPr/>
+        </p:nvSpPr>
+        <p:spPr>
+          <a:xfrm>
+            <a:off x="5759577" y="4169664"/>
+            <a:ext cx="685800" cy="475488"/>
           </a:xfrm>
           <a:prstGeom prst="rect">
             <a:avLst/>
@@ -10800,7 +11517,139 @@
                 <a:ea typeface="Trebuchet MS" pitchFamily="34" charset="-122"/>
                 <a:cs typeface="Trebuchet MS" pitchFamily="34" charset="-120"/>
               </a:rPr>
-              <a:t>l</a:t>
+              <a:t>a</a:t>
+            </a:r>
+            <a:endParaRPr lang="en-US" sz="900" dirty="0"/>
+          </a:p>
+        </p:txBody>
+      </p:sp>
+      <p:sp>
+        <p:nvSpPr>
+          <p:cNvPr id="52" name="Shape 50"/>
+          <p:cNvSpPr/>
+          <p:nvPr/>
+        </p:nvSpPr>
+        <p:spPr>
+          <a:xfrm>
+            <a:off x="6668262" y="4169664"/>
+            <a:ext cx="685800" cy="475488"/>
+          </a:xfrm>
+          <a:prstGeom prst="rect">
+            <a:avLst>
+              <a:gd name="adj" fmla="val 7692"/>
+            </a:avLst>
+          </a:prstGeom>
+          <a:solidFill>
+            <a:srgbClr val="FFFFFF"/>
+          </a:solidFill>
+          <a:ln w="12700">
+            <a:solidFill>
+              <a:srgbClr val="DB2777"/>
+            </a:solidFill>
+            <a:prstDash val="solid"/>
+          </a:ln>
+        </p:spPr>
+      </p:sp>
+      <p:sp>
+        <p:nvSpPr>
+          <p:cNvPr id="53" name="Text 51"/>
+          <p:cNvSpPr/>
+          <p:nvPr/>
+        </p:nvSpPr>
+        <p:spPr>
+          <a:xfrm>
+            <a:off x="6668262" y="4169664"/>
+            <a:ext cx="685800" cy="475488"/>
+          </a:xfrm>
+          <a:prstGeom prst="rect">
+            <a:avLst/>
+          </a:prstGeom>
+          <a:noFill/>
+          <a:ln/>
+        </p:spPr>
+        <p:txBody>
+          <a:bodyPr wrap="square" lIns="0" tIns="0" rIns="0" bIns="0" rtlCol="0" anchor="ctr"/>
+          <a:lstStyle/>
+          <a:p>
+            <a:pPr algn="ctr" indent="0" marL="0">
+              <a:buNone/>
+            </a:pPr>
+            <a:r>
+              <a:rPr lang="en-US" sz="900" b="1" dirty="0">
+                <a:solidFill>
+                  <a:srgbClr val="9D174D"/>
+                </a:solidFill>
+                <a:latin typeface="Trebuchet MS" pitchFamily="34" charset="0"/>
+                <a:ea typeface="Trebuchet MS" pitchFamily="34" charset="-122"/>
+                <a:cs typeface="Trebuchet MS" pitchFamily="34" charset="-120"/>
+              </a:rPr>
+              <a:t>b</a:t>
+            </a:r>
+            <a:endParaRPr lang="en-US" sz="900" dirty="0"/>
+          </a:p>
+        </p:txBody>
+      </p:sp>
+      <p:sp>
+        <p:nvSpPr>
+          <p:cNvPr id="54" name="Shape 52"/>
+          <p:cNvSpPr/>
+          <p:nvPr/>
+        </p:nvSpPr>
+        <p:spPr>
+          <a:xfrm>
+            <a:off x="7576947" y="4169664"/>
+            <a:ext cx="685800" cy="475488"/>
+          </a:xfrm>
+          <a:prstGeom prst="rect">
+            <a:avLst>
+              <a:gd name="adj" fmla="val 7692"/>
+            </a:avLst>
+          </a:prstGeom>
+          <a:solidFill>
+            <a:srgbClr val="FFFFFF"/>
+          </a:solidFill>
+          <a:ln w="12700">
+            <a:solidFill>
+              <a:srgbClr val="DB2777"/>
+            </a:solidFill>
+            <a:prstDash val="solid"/>
+          </a:ln>
+        </p:spPr>
+      </p:sp>
+      <p:sp>
+        <p:nvSpPr>
+          <p:cNvPr id="55" name="Text 53"/>
+          <p:cNvSpPr/>
+          <p:nvPr/>
+        </p:nvSpPr>
+        <p:spPr>
+          <a:xfrm>
+            <a:off x="7576947" y="4169664"/>
+            <a:ext cx="685800" cy="475488"/>
+          </a:xfrm>
+          <a:prstGeom prst="rect">
+            <a:avLst/>
+          </a:prstGeom>
+          <a:noFill/>
+          <a:ln/>
+        </p:spPr>
+        <p:txBody>
+          <a:bodyPr wrap="square" lIns="0" tIns="0" rIns="0" bIns="0" rtlCol="0" anchor="ctr"/>
+          <a:lstStyle/>
+          <a:p>
+            <a:pPr algn="ctr" indent="0" marL="0">
+              <a:buNone/>
+            </a:pPr>
+            <a:r>
+              <a:rPr lang="en-US" sz="900" b="1" dirty="0">
+                <a:solidFill>
+                  <a:srgbClr val="9D174D"/>
+                </a:solidFill>
+                <a:latin typeface="Trebuchet MS" pitchFamily="34" charset="0"/>
+                <a:ea typeface="Trebuchet MS" pitchFamily="34" charset="-122"/>
+                <a:cs typeface="Trebuchet MS" pitchFamily="34" charset="-120"/>
+              </a:rPr>
+              <a:t>le</a:t>
             </a:r>
             <a:endParaRPr lang="en-US" sz="900" dirty="0"/>
           </a:p>
@@ -11092,7 +11941,7 @@
                 <a:ea typeface="Calibri" pitchFamily="34" charset="-122"/>
                 <a:cs typeface="Calibri" pitchFamily="34" charset="-120"/>
               </a:rPr>
-              <a:t>Word Labs  •  wordlabs.app  •  Root: 'use' = to employ or utilise</a:t>
+              <a:t>Word Labs  •  wordlabs.app  •  Root: 'use' = do something with</a:t>
             </a:r>
             <a:endParaRPr lang="en-US" sz="800" dirty="0"/>
           </a:p>
@@ -11231,7 +12080,7 @@
                 <a:ea typeface="Trebuchet MS" pitchFamily="34" charset="-122"/>
                 <a:cs typeface="Trebuchet MS" pitchFamily="34" charset="-120"/>
               </a:rPr>
-              <a:t>reuse</a:t>
+              <a:t>underuse</a:t>
             </a:r>
             <a:endParaRPr lang="en-US" sz="2800" dirty="0"/>
           </a:p>
@@ -11919,7 +12768,7 @@
                 <a:ea typeface="Calibri" pitchFamily="34" charset="-122"/>
                 <a:cs typeface="Calibri" pitchFamily="34" charset="-120"/>
               </a:rPr>
-              <a:t>Word Labs  •  wordlabs.app  •  Root: 'use' = to employ or utilise</a:t>
+              <a:t>Word Labs  •  wordlabs.app  •  Root: 'use' = do something with</a:t>
             </a:r>
             <a:endParaRPr lang="en-US" sz="800" dirty="0"/>
           </a:p>
@@ -12058,7 +12907,7 @@
                 <a:ea typeface="Trebuchet MS" pitchFamily="34" charset="-122"/>
                 <a:cs typeface="Trebuchet MS" pitchFamily="34" charset="-120"/>
               </a:rPr>
-              <a:t>reuse</a:t>
+              <a:t>underuse</a:t>
             </a:r>
             <a:endParaRPr lang="en-US" sz="2800" dirty="0"/>
           </a:p>
@@ -12197,7 +13046,7 @@
                 <a:ea typeface="Trebuchet MS" pitchFamily="34" charset="-122"/>
                 <a:cs typeface="Trebuchet MS" pitchFamily="34" charset="-120"/>
               </a:rPr>
-              <a:t>re</a:t>
+              <a:t>under</a:t>
             </a:r>
             <a:endParaRPr lang="en-US" sz="1300" dirty="0"/>
           </a:p>
@@ -12236,7 +13085,7 @@
                 <a:ea typeface="Calibri" pitchFamily="34" charset="-122"/>
                 <a:cs typeface="Calibri" pitchFamily="34" charset="-120"/>
               </a:rPr>
-              <a:t>again</a:t>
+              <a:t>below</a:t>
             </a:r>
             <a:endParaRPr lang="en-US" sz="850" dirty="0"/>
           </a:p>
@@ -12348,7 +13197,7 @@
                 <a:ea typeface="Calibri" pitchFamily="34" charset="-122"/>
                 <a:cs typeface="Calibri" pitchFamily="34" charset="-120"/>
               </a:rPr>
-              <a:t>to employ or utilise</a:t>
+              <a:t>do something with</a:t>
             </a:r>
             <a:endParaRPr lang="en-US" sz="850" dirty="0"/>
           </a:p>
@@ -12904,7 +13753,7 @@
                 <a:ea typeface="Calibri" pitchFamily="34" charset="-122"/>
                 <a:cs typeface="Calibri" pitchFamily="34" charset="-120"/>
               </a:rPr>
-              <a:t>Word Labs  •  wordlabs.app  •  Root: 'use' = to employ or utilise</a:t>
+              <a:t>Word Labs  •  wordlabs.app  •  Root: 'use' = do something with</a:t>
             </a:r>
             <a:endParaRPr lang="en-US" sz="800" dirty="0"/>
           </a:p>
@@ -13043,7 +13892,7 @@
                 <a:ea typeface="Trebuchet MS" pitchFamily="34" charset="-122"/>
                 <a:cs typeface="Trebuchet MS" pitchFamily="34" charset="-120"/>
               </a:rPr>
-              <a:t>reuse</a:t>
+              <a:t>underuse</a:t>
             </a:r>
             <a:endParaRPr lang="en-US" sz="2800" dirty="0"/>
           </a:p>
@@ -13182,7 +14031,7 @@
                 <a:ea typeface="Trebuchet MS" pitchFamily="34" charset="-122"/>
                 <a:cs typeface="Trebuchet MS" pitchFamily="34" charset="-120"/>
               </a:rPr>
-              <a:t>re</a:t>
+              <a:t>under</a:t>
             </a:r>
             <a:endParaRPr lang="en-US" sz="1300" dirty="0"/>
           </a:p>
@@ -13221,7 +14070,7 @@
                 <a:ea typeface="Calibri" pitchFamily="34" charset="-122"/>
                 <a:cs typeface="Calibri" pitchFamily="34" charset="-120"/>
               </a:rPr>
-              <a:t>again</a:t>
+              <a:t>below</a:t>
             </a:r>
             <a:endParaRPr lang="en-US" sz="850" dirty="0"/>
           </a:p>
@@ -13333,7 +14182,7 @@
                 <a:ea typeface="Calibri" pitchFamily="34" charset="-122"/>
                 <a:cs typeface="Calibri" pitchFamily="34" charset="-120"/>
               </a:rPr>
-              <a:t>to employ or utilise</a:t>
+              <a:t>do something with</a:t>
             </a:r>
             <a:endParaRPr lang="en-US" sz="850" dirty="0"/>
           </a:p>
@@ -13440,7 +14289,7 @@
         </p:nvSpPr>
         <p:spPr>
           <a:xfrm>
-            <a:off x="2999232" y="3364992"/>
+            <a:off x="2313432" y="3364992"/>
             <a:ext cx="1645920" cy="475488"/>
           </a:xfrm>
           <a:prstGeom prst="rect">
@@ -13467,7 +14316,7 @@
         </p:nvSpPr>
         <p:spPr>
           <a:xfrm>
-            <a:off x="2999232" y="3364992"/>
+            <a:off x="2313432" y="3364992"/>
             <a:ext cx="1645920" cy="475488"/>
           </a:xfrm>
           <a:prstGeom prst="rect">
@@ -13492,7 +14341,7 @@
                 <a:ea typeface="Trebuchet MS" pitchFamily="34" charset="-122"/>
                 <a:cs typeface="Trebuchet MS" pitchFamily="34" charset="-120"/>
               </a:rPr>
-              <a:t>re</a:t>
+              <a:t>un</a:t>
             </a:r>
             <a:endParaRPr lang="en-US" sz="1400" dirty="0"/>
           </a:p>
@@ -13506,8 +14355,8 @@
         </p:nvSpPr>
         <p:spPr>
           <a:xfrm>
-            <a:off x="4645152" y="3364992"/>
-            <a:ext cx="1097280" cy="475488"/>
+            <a:off x="3959352" y="3364992"/>
+            <a:ext cx="411480" cy="475488"/>
           </a:xfrm>
           <a:prstGeom prst="rect">
             <a:avLst/>
@@ -13545,7 +14394,7 @@
         </p:nvSpPr>
         <p:spPr>
           <a:xfrm>
-            <a:off x="5742432" y="3364992"/>
+            <a:off x="4370832" y="3364992"/>
             <a:ext cx="1645920" cy="475488"/>
           </a:xfrm>
           <a:prstGeom prst="rect">
@@ -13572,7 +14421,7 @@
         </p:nvSpPr>
         <p:spPr>
           <a:xfrm>
-            <a:off x="5742432" y="3364992"/>
+            <a:off x="4370832" y="3364992"/>
             <a:ext cx="1645920" cy="475488"/>
           </a:xfrm>
           <a:prstGeom prst="rect">
@@ -13597,6 +14446,111 @@
                 <a:ea typeface="Trebuchet MS" pitchFamily="34" charset="-122"/>
                 <a:cs typeface="Trebuchet MS" pitchFamily="34" charset="-120"/>
               </a:rPr>
+              <a:t>der</a:t>
+            </a:r>
+            <a:endParaRPr lang="en-US" sz="1400" dirty="0"/>
+          </a:p>
+        </p:txBody>
+      </p:sp>
+      <p:sp>
+        <p:nvSpPr>
+          <p:cNvPr id="30" name="Text 28"/>
+          <p:cNvSpPr/>
+          <p:nvPr/>
+        </p:nvSpPr>
+        <p:spPr>
+          <a:xfrm>
+            <a:off x="6016752" y="3364992"/>
+            <a:ext cx="411480" cy="475488"/>
+          </a:xfrm>
+          <a:prstGeom prst="rect">
+            <a:avLst/>
+          </a:prstGeom>
+          <a:noFill/>
+          <a:ln/>
+        </p:spPr>
+        <p:txBody>
+          <a:bodyPr wrap="square" lIns="0" tIns="0" rIns="0" bIns="0" rtlCol="0" anchor="ctr"/>
+          <a:lstStyle/>
+          <a:p>
+            <a:pPr algn="ctr" indent="0" marL="0">
+              <a:buNone/>
+            </a:pPr>
+            <a:r>
+              <a:rPr lang="en-US" sz="1600" b="1" dirty="0">
+                <a:solidFill>
+                  <a:srgbClr val="0D9488"/>
+                </a:solidFill>
+                <a:latin typeface="Trebuchet MS" pitchFamily="34" charset="0"/>
+                <a:ea typeface="Trebuchet MS" pitchFamily="34" charset="-122"/>
+                <a:cs typeface="Trebuchet MS" pitchFamily="34" charset="-120"/>
+              </a:rPr>
+              <a:t>·</a:t>
+            </a:r>
+            <a:endParaRPr lang="en-US" sz="1600" dirty="0"/>
+          </a:p>
+        </p:txBody>
+      </p:sp>
+      <p:sp>
+        <p:nvSpPr>
+          <p:cNvPr id="31" name="Shape 29"/>
+          <p:cNvSpPr/>
+          <p:nvPr/>
+        </p:nvSpPr>
+        <p:spPr>
+          <a:xfrm>
+            <a:off x="6428232" y="3364992"/>
+            <a:ext cx="1645920" cy="475488"/>
+          </a:xfrm>
+          <a:prstGeom prst="rect">
+            <a:avLst>
+              <a:gd name="adj" fmla="val 9615"/>
+            </a:avLst>
+          </a:prstGeom>
+          <a:solidFill>
+            <a:srgbClr val="FFFFFF"/>
+          </a:solidFill>
+          <a:ln w="12700">
+            <a:solidFill>
+              <a:srgbClr val="0D9488"/>
+            </a:solidFill>
+            <a:prstDash val="solid"/>
+          </a:ln>
+        </p:spPr>
+      </p:sp>
+      <p:sp>
+        <p:nvSpPr>
+          <p:cNvPr id="32" name="Text 30"/>
+          <p:cNvSpPr/>
+          <p:nvPr/>
+        </p:nvSpPr>
+        <p:spPr>
+          <a:xfrm>
+            <a:off x="6428232" y="3364992"/>
+            <a:ext cx="1645920" cy="475488"/>
+          </a:xfrm>
+          <a:prstGeom prst="rect">
+            <a:avLst/>
+          </a:prstGeom>
+          <a:noFill/>
+          <a:ln/>
+        </p:spPr>
+        <p:txBody>
+          <a:bodyPr wrap="square" lIns="0" tIns="0" rIns="0" bIns="0" rtlCol="0" anchor="ctr"/>
+          <a:lstStyle/>
+          <a:p>
+            <a:pPr algn="ctr" indent="0" marL="0">
+              <a:buNone/>
+            </a:pPr>
+            <a:r>
+              <a:rPr lang="en-US" sz="1400" b="1" dirty="0">
+                <a:solidFill>
+                  <a:srgbClr val="0D9488"/>
+                </a:solidFill>
+                <a:latin typeface="Trebuchet MS" pitchFamily="34" charset="0"/>
+                <a:ea typeface="Trebuchet MS" pitchFamily="34" charset="-122"/>
+                <a:cs typeface="Trebuchet MS" pitchFamily="34" charset="-120"/>
+              </a:rPr>
               <a:t>use</a:t>
             </a:r>
             <a:endParaRPr lang="en-US" sz="1400" dirty="0"/>
@@ -13605,7 +14559,7 @@
       </p:sp>
       <p:sp>
         <p:nvSpPr>
-          <p:cNvPr id="30" name="Shape 28"/>
+          <p:cNvPr id="33" name="Shape 31"/>
           <p:cNvSpPr/>
           <p:nvPr/>
         </p:nvSpPr>
@@ -13632,7 +14586,7 @@
       </p:sp>
       <p:sp>
         <p:nvSpPr>
-          <p:cNvPr id="31" name="Text 29"/>
+          <p:cNvPr id="34" name="Text 32"/>
           <p:cNvSpPr/>
           <p:nvPr/>
         </p:nvSpPr>
@@ -13671,7 +14625,7 @@
       </p:sp>
       <p:sp>
         <p:nvSpPr>
-          <p:cNvPr id="32" name="Shape 30"/>
+          <p:cNvPr id="35" name="Shape 33"/>
           <p:cNvSpPr/>
           <p:nvPr/>
         </p:nvSpPr>
@@ -13698,7 +14652,7 @@
       </p:sp>
       <p:sp>
         <p:nvSpPr>
-          <p:cNvPr id="33" name="Text 31"/>
+          <p:cNvPr id="36" name="Text 34"/>
           <p:cNvSpPr/>
           <p:nvPr/>
         </p:nvSpPr>
@@ -13930,7 +14884,7 @@
                 <a:ea typeface="Calibri" pitchFamily="34" charset="-122"/>
                 <a:cs typeface="Calibri" pitchFamily="34" charset="-120"/>
               </a:rPr>
-              <a:t>Root 'use' — to employ or utilise</a:t>
+              <a:t>Root 'use' — do something with</a:t>
             </a:r>
             <a:endParaRPr lang="en-US" sz="1600" dirty="0"/>
           </a:p>
@@ -14286,7 +15240,7 @@
                 <a:ea typeface="Calibri" pitchFamily="34" charset="-122"/>
                 <a:cs typeface="Calibri" pitchFamily="34" charset="-120"/>
               </a:rPr>
-              <a:t>Word Labs  •  wordlabs.app  •  Root: 'use' = to employ or utilise</a:t>
+              <a:t>Word Labs  •  wordlabs.app  •  Root: 'use' = do something with</a:t>
             </a:r>
             <a:endParaRPr lang="en-US" sz="800" dirty="0"/>
           </a:p>
@@ -14425,7 +15379,7 @@
                 <a:ea typeface="Trebuchet MS" pitchFamily="34" charset="-122"/>
                 <a:cs typeface="Trebuchet MS" pitchFamily="34" charset="-120"/>
               </a:rPr>
-              <a:t>reuse</a:t>
+              <a:t>underuse</a:t>
             </a:r>
             <a:endParaRPr lang="en-US" sz="2800" dirty="0"/>
           </a:p>
@@ -14564,7 +15518,7 @@
                 <a:ea typeface="Trebuchet MS" pitchFamily="34" charset="-122"/>
                 <a:cs typeface="Trebuchet MS" pitchFamily="34" charset="-120"/>
               </a:rPr>
-              <a:t>re</a:t>
+              <a:t>under</a:t>
             </a:r>
             <a:endParaRPr lang="en-US" sz="1300" dirty="0"/>
           </a:p>
@@ -14603,7 +15557,7 @@
                 <a:ea typeface="Calibri" pitchFamily="34" charset="-122"/>
                 <a:cs typeface="Calibri" pitchFamily="34" charset="-120"/>
               </a:rPr>
-              <a:t>again</a:t>
+              <a:t>below</a:t>
             </a:r>
             <a:endParaRPr lang="en-US" sz="850" dirty="0"/>
           </a:p>
@@ -14715,7 +15669,7 @@
                 <a:ea typeface="Calibri" pitchFamily="34" charset="-122"/>
                 <a:cs typeface="Calibri" pitchFamily="34" charset="-120"/>
               </a:rPr>
-              <a:t>to employ or utilise</a:t>
+              <a:t>do something with</a:t>
             </a:r>
             <a:endParaRPr lang="en-US" sz="850" dirty="0"/>
           </a:p>
@@ -14822,7 +15776,7 @@
         </p:nvSpPr>
         <p:spPr>
           <a:xfrm>
-            <a:off x="2999232" y="3364992"/>
+            <a:off x="2313432" y="3364992"/>
             <a:ext cx="1645920" cy="475488"/>
           </a:xfrm>
           <a:prstGeom prst="rect">
@@ -14849,7 +15803,7 @@
         </p:nvSpPr>
         <p:spPr>
           <a:xfrm>
-            <a:off x="2999232" y="3364992"/>
+            <a:off x="2313432" y="3364992"/>
             <a:ext cx="1645920" cy="475488"/>
           </a:xfrm>
           <a:prstGeom prst="rect">
@@ -14874,7 +15828,7 @@
                 <a:ea typeface="Trebuchet MS" pitchFamily="34" charset="-122"/>
                 <a:cs typeface="Trebuchet MS" pitchFamily="34" charset="-120"/>
               </a:rPr>
-              <a:t>re</a:t>
+              <a:t>un</a:t>
             </a:r>
             <a:endParaRPr lang="en-US" sz="1400" dirty="0"/>
           </a:p>
@@ -14888,8 +15842,8 @@
         </p:nvSpPr>
         <p:spPr>
           <a:xfrm>
-            <a:off x="4645152" y="3364992"/>
-            <a:ext cx="1097280" cy="475488"/>
+            <a:off x="3959352" y="3364992"/>
+            <a:ext cx="411480" cy="475488"/>
           </a:xfrm>
           <a:prstGeom prst="rect">
             <a:avLst/>
@@ -14927,7 +15881,7 @@
         </p:nvSpPr>
         <p:spPr>
           <a:xfrm>
-            <a:off x="5742432" y="3364992"/>
+            <a:off x="4370832" y="3364992"/>
             <a:ext cx="1645920" cy="475488"/>
           </a:xfrm>
           <a:prstGeom prst="rect">
@@ -14954,7 +15908,7 @@
         </p:nvSpPr>
         <p:spPr>
           <a:xfrm>
-            <a:off x="5742432" y="3364992"/>
+            <a:off x="4370832" y="3364992"/>
             <a:ext cx="1645920" cy="475488"/>
           </a:xfrm>
           <a:prstGeom prst="rect">
@@ -14979,6 +15933,111 @@
                 <a:ea typeface="Trebuchet MS" pitchFamily="34" charset="-122"/>
                 <a:cs typeface="Trebuchet MS" pitchFamily="34" charset="-120"/>
               </a:rPr>
+              <a:t>der</a:t>
+            </a:r>
+            <a:endParaRPr lang="en-US" sz="1400" dirty="0"/>
+          </a:p>
+        </p:txBody>
+      </p:sp>
+      <p:sp>
+        <p:nvSpPr>
+          <p:cNvPr id="30" name="Text 28"/>
+          <p:cNvSpPr/>
+          <p:nvPr/>
+        </p:nvSpPr>
+        <p:spPr>
+          <a:xfrm>
+            <a:off x="6016752" y="3364992"/>
+            <a:ext cx="411480" cy="475488"/>
+          </a:xfrm>
+          <a:prstGeom prst="rect">
+            <a:avLst/>
+          </a:prstGeom>
+          <a:noFill/>
+          <a:ln/>
+        </p:spPr>
+        <p:txBody>
+          <a:bodyPr wrap="square" lIns="0" tIns="0" rIns="0" bIns="0" rtlCol="0" anchor="ctr"/>
+          <a:lstStyle/>
+          <a:p>
+            <a:pPr algn="ctr" indent="0" marL="0">
+              <a:buNone/>
+            </a:pPr>
+            <a:r>
+              <a:rPr lang="en-US" sz="1600" b="1" dirty="0">
+                <a:solidFill>
+                  <a:srgbClr val="0D9488"/>
+                </a:solidFill>
+                <a:latin typeface="Trebuchet MS" pitchFamily="34" charset="0"/>
+                <a:ea typeface="Trebuchet MS" pitchFamily="34" charset="-122"/>
+                <a:cs typeface="Trebuchet MS" pitchFamily="34" charset="-120"/>
+              </a:rPr>
+              <a:t>·</a:t>
+            </a:r>
+            <a:endParaRPr lang="en-US" sz="1600" dirty="0"/>
+          </a:p>
+        </p:txBody>
+      </p:sp>
+      <p:sp>
+        <p:nvSpPr>
+          <p:cNvPr id="31" name="Shape 29"/>
+          <p:cNvSpPr/>
+          <p:nvPr/>
+        </p:nvSpPr>
+        <p:spPr>
+          <a:xfrm>
+            <a:off x="6428232" y="3364992"/>
+            <a:ext cx="1645920" cy="475488"/>
+          </a:xfrm>
+          <a:prstGeom prst="rect">
+            <a:avLst>
+              <a:gd name="adj" fmla="val 9615"/>
+            </a:avLst>
+          </a:prstGeom>
+          <a:solidFill>
+            <a:srgbClr val="FFFFFF"/>
+          </a:solidFill>
+          <a:ln w="12700">
+            <a:solidFill>
+              <a:srgbClr val="0D9488"/>
+            </a:solidFill>
+            <a:prstDash val="solid"/>
+          </a:ln>
+        </p:spPr>
+      </p:sp>
+      <p:sp>
+        <p:nvSpPr>
+          <p:cNvPr id="32" name="Text 30"/>
+          <p:cNvSpPr/>
+          <p:nvPr/>
+        </p:nvSpPr>
+        <p:spPr>
+          <a:xfrm>
+            <a:off x="6428232" y="3364992"/>
+            <a:ext cx="1645920" cy="475488"/>
+          </a:xfrm>
+          <a:prstGeom prst="rect">
+            <a:avLst/>
+          </a:prstGeom>
+          <a:noFill/>
+          <a:ln/>
+        </p:spPr>
+        <p:txBody>
+          <a:bodyPr wrap="square" lIns="0" tIns="0" rIns="0" bIns="0" rtlCol="0" anchor="ctr"/>
+          <a:lstStyle/>
+          <a:p>
+            <a:pPr algn="ctr" indent="0" marL="0">
+              <a:buNone/>
+            </a:pPr>
+            <a:r>
+              <a:rPr lang="en-US" sz="1400" b="1" dirty="0">
+                <a:solidFill>
+                  <a:srgbClr val="0D9488"/>
+                </a:solidFill>
+                <a:latin typeface="Trebuchet MS" pitchFamily="34" charset="0"/>
+                <a:ea typeface="Trebuchet MS" pitchFamily="34" charset="-122"/>
+                <a:cs typeface="Trebuchet MS" pitchFamily="34" charset="-120"/>
+              </a:rPr>
               <a:t>use</a:t>
             </a:r>
             <a:endParaRPr lang="en-US" sz="1400" dirty="0"/>
@@ -14987,7 +16046,7 @@
       </p:sp>
       <p:sp>
         <p:nvSpPr>
-          <p:cNvPr id="30" name="Shape 28"/>
+          <p:cNvPr id="33" name="Shape 31"/>
           <p:cNvSpPr/>
           <p:nvPr/>
         </p:nvSpPr>
@@ -15014,7 +16073,7 @@
       </p:sp>
       <p:sp>
         <p:nvSpPr>
-          <p:cNvPr id="31" name="Text 29"/>
+          <p:cNvPr id="34" name="Text 32"/>
           <p:cNvSpPr/>
           <p:nvPr/>
         </p:nvSpPr>
@@ -15053,18 +16112,18 @@
       </p:sp>
       <p:sp>
         <p:nvSpPr>
-          <p:cNvPr id="32" name="Shape 30"/>
+          <p:cNvPr id="35" name="Shape 33"/>
           <p:cNvSpPr/>
           <p:nvPr/>
         </p:nvSpPr>
         <p:spPr>
           <a:xfrm>
             <a:off x="1874520" y="4096512"/>
-            <a:ext cx="6903720" cy="804672"/>
+            <a:ext cx="6903720" cy="658368"/>
           </a:xfrm>
           <a:prstGeom prst="rect">
             <a:avLst>
-              <a:gd name="adj" fmla="val 6818"/>
+              <a:gd name="adj" fmla="val 8333"/>
             </a:avLst>
           </a:prstGeom>
           <a:solidFill>
@@ -15080,18 +16139,18 @@
       </p:sp>
       <p:sp>
         <p:nvSpPr>
-          <p:cNvPr id="33" name="Shape 31"/>
-          <p:cNvSpPr/>
-          <p:nvPr/>
-        </p:nvSpPr>
-        <p:spPr>
-          <a:xfrm>
-            <a:off x="2670048" y="4169664"/>
-            <a:ext cx="685800" cy="384048"/>
+          <p:cNvPr id="36" name="Shape 34"/>
+          <p:cNvSpPr/>
+          <p:nvPr/>
+        </p:nvSpPr>
+        <p:spPr>
+          <a:xfrm>
+            <a:off x="2254649" y="4169664"/>
+            <a:ext cx="685800" cy="475488"/>
           </a:xfrm>
           <a:prstGeom prst="rect">
             <a:avLst>
-              <a:gd name="adj" fmla="val 9524"/>
+              <a:gd name="adj" fmla="val 7692"/>
             </a:avLst>
           </a:prstGeom>
           <a:solidFill>
@@ -15107,14 +16166,14 @@
       </p:sp>
       <p:sp>
         <p:nvSpPr>
-          <p:cNvPr id="34" name="Text 32"/>
-          <p:cNvSpPr/>
-          <p:nvPr/>
-        </p:nvSpPr>
-        <p:spPr>
-          <a:xfrm>
-            <a:off x="2670048" y="4169664"/>
-            <a:ext cx="685800" cy="384048"/>
+          <p:cNvPr id="37" name="Text 35"/>
+          <p:cNvSpPr/>
+          <p:nvPr/>
+        </p:nvSpPr>
+        <p:spPr>
+          <a:xfrm>
+            <a:off x="2254649" y="4169664"/>
+            <a:ext cx="685800" cy="475488"/>
           </a:xfrm>
           <a:prstGeom prst="rect">
             <a:avLst/>
@@ -15138,7 +16197,7 @@
                 <a:ea typeface="Trebuchet MS" pitchFamily="34" charset="-122"/>
                 <a:cs typeface="Trebuchet MS" pitchFamily="34" charset="-120"/>
               </a:rPr>
-              <a:t>r</a:t>
+              <a:t>u</a:t>
             </a:r>
             <a:endParaRPr lang="en-US" sz="900" dirty="0"/>
           </a:p>
@@ -15146,18 +16205,18 @@
       </p:sp>
       <p:sp>
         <p:nvSpPr>
-          <p:cNvPr id="35" name="Shape 33"/>
-          <p:cNvSpPr/>
-          <p:nvPr/>
-        </p:nvSpPr>
-        <p:spPr>
-          <a:xfrm>
-            <a:off x="4123944" y="4169664"/>
-            <a:ext cx="685800" cy="384048"/>
+          <p:cNvPr id="38" name="Shape 36"/>
+          <p:cNvSpPr/>
+          <p:nvPr/>
+        </p:nvSpPr>
+        <p:spPr>
+          <a:xfrm>
+            <a:off x="3293146" y="4169664"/>
+            <a:ext cx="685800" cy="475488"/>
           </a:xfrm>
           <a:prstGeom prst="rect">
             <a:avLst>
-              <a:gd name="adj" fmla="val 9524"/>
+              <a:gd name="adj" fmla="val 7692"/>
             </a:avLst>
           </a:prstGeom>
           <a:solidFill>
@@ -15173,14 +16232,14 @@
       </p:sp>
       <p:sp>
         <p:nvSpPr>
-          <p:cNvPr id="36" name="Text 34"/>
-          <p:cNvSpPr/>
-          <p:nvPr/>
-        </p:nvSpPr>
-        <p:spPr>
-          <a:xfrm>
-            <a:off x="4123944" y="4169664"/>
-            <a:ext cx="685800" cy="384048"/>
+          <p:cNvPr id="39" name="Text 37"/>
+          <p:cNvSpPr/>
+          <p:nvPr/>
+        </p:nvSpPr>
+        <p:spPr>
+          <a:xfrm>
+            <a:off x="3293146" y="4169664"/>
+            <a:ext cx="685800" cy="475488"/>
           </a:xfrm>
           <a:prstGeom prst="rect">
             <a:avLst/>
@@ -15204,7 +16263,7 @@
                 <a:ea typeface="Trebuchet MS" pitchFamily="34" charset="-122"/>
                 <a:cs typeface="Trebuchet MS" pitchFamily="34" charset="-120"/>
               </a:rPr>
-              <a:t>e</a:t>
+              <a:t>n</a:t>
             </a:r>
             <a:endParaRPr lang="en-US" sz="900" dirty="0"/>
           </a:p>
@@ -15212,18 +16271,18 @@
       </p:sp>
       <p:sp>
         <p:nvSpPr>
-          <p:cNvPr id="37" name="Shape 35"/>
-          <p:cNvSpPr/>
-          <p:nvPr/>
-        </p:nvSpPr>
-        <p:spPr>
-          <a:xfrm>
-            <a:off x="5577840" y="4169664"/>
-            <a:ext cx="685800" cy="384048"/>
+          <p:cNvPr id="40" name="Shape 38"/>
+          <p:cNvSpPr/>
+          <p:nvPr/>
+        </p:nvSpPr>
+        <p:spPr>
+          <a:xfrm>
+            <a:off x="4331643" y="4169664"/>
+            <a:ext cx="685800" cy="475488"/>
           </a:xfrm>
           <a:prstGeom prst="rect">
             <a:avLst>
-              <a:gd name="adj" fmla="val 9524"/>
+              <a:gd name="adj" fmla="val 7692"/>
             </a:avLst>
           </a:prstGeom>
           <a:solidFill>
@@ -15239,14 +16298,14 @@
       </p:sp>
       <p:sp>
         <p:nvSpPr>
-          <p:cNvPr id="38" name="Text 36"/>
-          <p:cNvSpPr/>
-          <p:nvPr/>
-        </p:nvSpPr>
-        <p:spPr>
-          <a:xfrm>
-            <a:off x="5577840" y="4169664"/>
-            <a:ext cx="685800" cy="384048"/>
+          <p:cNvPr id="41" name="Text 39"/>
+          <p:cNvSpPr/>
+          <p:nvPr/>
+        </p:nvSpPr>
+        <p:spPr>
+          <a:xfrm>
+            <a:off x="4331643" y="4169664"/>
+            <a:ext cx="685800" cy="475488"/>
           </a:xfrm>
           <a:prstGeom prst="rect">
             <a:avLst/>
@@ -15270,7 +16329,7 @@
                 <a:ea typeface="Trebuchet MS" pitchFamily="34" charset="-122"/>
                 <a:cs typeface="Trebuchet MS" pitchFamily="34" charset="-120"/>
               </a:rPr>
-              <a:t>u</a:t>
+              <a:t>d</a:t>
             </a:r>
             <a:endParaRPr lang="en-US" sz="900" dirty="0"/>
           </a:p>
@@ -15278,18 +16337,18 @@
       </p:sp>
       <p:sp>
         <p:nvSpPr>
-          <p:cNvPr id="39" name="Shape 37"/>
-          <p:cNvSpPr/>
-          <p:nvPr/>
-        </p:nvSpPr>
-        <p:spPr>
-          <a:xfrm>
-            <a:off x="7031736" y="4169664"/>
-            <a:ext cx="685800" cy="384048"/>
+          <p:cNvPr id="42" name="Shape 40"/>
+          <p:cNvSpPr/>
+          <p:nvPr/>
+        </p:nvSpPr>
+        <p:spPr>
+          <a:xfrm>
+            <a:off x="5370141" y="4169664"/>
+            <a:ext cx="685800" cy="475488"/>
           </a:xfrm>
           <a:prstGeom prst="rect">
             <a:avLst>
-              <a:gd name="adj" fmla="val 9524"/>
+              <a:gd name="adj" fmla="val 7692"/>
             </a:avLst>
           </a:prstGeom>
           <a:solidFill>
@@ -15305,14 +16364,14 @@
       </p:sp>
       <p:sp>
         <p:nvSpPr>
-          <p:cNvPr id="40" name="Text 38"/>
-          <p:cNvSpPr/>
-          <p:nvPr/>
-        </p:nvSpPr>
-        <p:spPr>
-          <a:xfrm>
-            <a:off x="7031736" y="4169664"/>
-            <a:ext cx="685800" cy="384048"/>
+          <p:cNvPr id="43" name="Text 41"/>
+          <p:cNvSpPr/>
+          <p:nvPr/>
+        </p:nvSpPr>
+        <p:spPr>
+          <a:xfrm>
+            <a:off x="5370141" y="4169664"/>
+            <a:ext cx="685800" cy="475488"/>
           </a:xfrm>
           <a:prstGeom prst="rect">
             <a:avLst/>
@@ -15336,7 +16395,7 @@
                 <a:ea typeface="Trebuchet MS" pitchFamily="34" charset="-122"/>
                 <a:cs typeface="Trebuchet MS" pitchFamily="34" charset="-120"/>
               </a:rPr>
-              <a:t>se</a:t>
+              <a:t>er</a:t>
             </a:r>
             <a:endParaRPr lang="en-US" sz="900" dirty="0"/>
           </a:p>
@@ -15344,40 +16403,133 @@
       </p:sp>
       <p:sp>
         <p:nvSpPr>
-          <p:cNvPr id="41" name="Text 39"/>
-          <p:cNvSpPr/>
-          <p:nvPr/>
-        </p:nvSpPr>
-        <p:spPr>
-          <a:xfrm>
-            <a:off x="7031736" y="4572000"/>
-            <a:ext cx="685800" cy="219456"/>
-          </a:xfrm>
-          <a:prstGeom prst="rect">
-            <a:avLst/>
-          </a:prstGeom>
-          <a:noFill/>
-          <a:ln/>
-        </p:spPr>
-        <p:txBody>
-          <a:bodyPr wrap="square" lIns="0" tIns="0" rIns="0" bIns="0" rtlCol="0" anchor="t"/>
-          <a:lstStyle/>
-          <a:p>
-            <a:pPr algn="ctr" indent="0" marL="0">
-              <a:buNone/>
-            </a:pPr>
-            <a:r>
-              <a:rPr lang="en-US" sz="750" i="1" dirty="0">
-                <a:solidFill>
-                  <a:srgbClr val="94A3B8"/>
-                </a:solidFill>
-                <a:latin typeface="Calibri" pitchFamily="34" charset="0"/>
-                <a:ea typeface="Calibri" pitchFamily="34" charset="-122"/>
-                <a:cs typeface="Calibri" pitchFamily="34" charset="-120"/>
-              </a:rPr>
-              <a:t>/z/</a:t>
-            </a:r>
-            <a:endParaRPr lang="en-US" sz="750" dirty="0"/>
+          <p:cNvPr id="44" name="Shape 42"/>
+          <p:cNvSpPr/>
+          <p:nvPr/>
+        </p:nvSpPr>
+        <p:spPr>
+          <a:xfrm>
+            <a:off x="6408638" y="4169664"/>
+            <a:ext cx="685800" cy="475488"/>
+          </a:xfrm>
+          <a:prstGeom prst="rect">
+            <a:avLst>
+              <a:gd name="adj" fmla="val 7692"/>
+            </a:avLst>
+          </a:prstGeom>
+          <a:solidFill>
+            <a:srgbClr val="FFFFFF"/>
+          </a:solidFill>
+          <a:ln w="12700">
+            <a:solidFill>
+              <a:srgbClr val="DB2777"/>
+            </a:solidFill>
+            <a:prstDash val="solid"/>
+          </a:ln>
+        </p:spPr>
+      </p:sp>
+      <p:sp>
+        <p:nvSpPr>
+          <p:cNvPr id="45" name="Text 43"/>
+          <p:cNvSpPr/>
+          <p:nvPr/>
+        </p:nvSpPr>
+        <p:spPr>
+          <a:xfrm>
+            <a:off x="6408638" y="4169664"/>
+            <a:ext cx="685800" cy="475488"/>
+          </a:xfrm>
+          <a:prstGeom prst="rect">
+            <a:avLst/>
+          </a:prstGeom>
+          <a:noFill/>
+          <a:ln/>
+        </p:spPr>
+        <p:txBody>
+          <a:bodyPr wrap="square" lIns="0" tIns="0" rIns="0" bIns="0" rtlCol="0" anchor="ctr"/>
+          <a:lstStyle/>
+          <a:p>
+            <a:pPr algn="ctr" indent="0" marL="0">
+              <a:buNone/>
+            </a:pPr>
+            <a:r>
+              <a:rPr lang="en-US" sz="900" b="1" dirty="0">
+                <a:solidFill>
+                  <a:srgbClr val="9D174D"/>
+                </a:solidFill>
+                <a:latin typeface="Trebuchet MS" pitchFamily="34" charset="0"/>
+                <a:ea typeface="Trebuchet MS" pitchFamily="34" charset="-122"/>
+                <a:cs typeface="Trebuchet MS" pitchFamily="34" charset="-120"/>
+              </a:rPr>
+              <a:t>u_e</a:t>
+            </a:r>
+            <a:endParaRPr lang="en-US" sz="900" dirty="0"/>
+          </a:p>
+        </p:txBody>
+      </p:sp>
+      <p:sp>
+        <p:nvSpPr>
+          <p:cNvPr id="46" name="Shape 44"/>
+          <p:cNvSpPr/>
+          <p:nvPr/>
+        </p:nvSpPr>
+        <p:spPr>
+          <a:xfrm>
+            <a:off x="7447135" y="4169664"/>
+            <a:ext cx="685800" cy="475488"/>
+          </a:xfrm>
+          <a:prstGeom prst="rect">
+            <a:avLst>
+              <a:gd name="adj" fmla="val 7692"/>
+            </a:avLst>
+          </a:prstGeom>
+          <a:solidFill>
+            <a:srgbClr val="FFFFFF"/>
+          </a:solidFill>
+          <a:ln w="12700">
+            <a:solidFill>
+              <a:srgbClr val="DB2777"/>
+            </a:solidFill>
+            <a:prstDash val="solid"/>
+          </a:ln>
+        </p:spPr>
+      </p:sp>
+      <p:sp>
+        <p:nvSpPr>
+          <p:cNvPr id="47" name="Text 45"/>
+          <p:cNvSpPr/>
+          <p:nvPr/>
+        </p:nvSpPr>
+        <p:spPr>
+          <a:xfrm>
+            <a:off x="7447135" y="4169664"/>
+            <a:ext cx="685800" cy="475488"/>
+          </a:xfrm>
+          <a:prstGeom prst="rect">
+            <a:avLst/>
+          </a:prstGeom>
+          <a:noFill/>
+          <a:ln/>
+        </p:spPr>
+        <p:txBody>
+          <a:bodyPr wrap="square" lIns="0" tIns="0" rIns="0" bIns="0" rtlCol="0" anchor="ctr"/>
+          <a:lstStyle/>
+          <a:p>
+            <a:pPr algn="ctr" indent="0" marL="0">
+              <a:buNone/>
+            </a:pPr>
+            <a:r>
+              <a:rPr lang="en-US" sz="900" b="1" dirty="0">
+                <a:solidFill>
+                  <a:srgbClr val="9D174D"/>
+                </a:solidFill>
+                <a:latin typeface="Trebuchet MS" pitchFamily="34" charset="0"/>
+                <a:ea typeface="Trebuchet MS" pitchFamily="34" charset="-122"/>
+                <a:cs typeface="Trebuchet MS" pitchFamily="34" charset="-120"/>
+              </a:rPr>
+              <a:t>s</a:t>
+            </a:r>
+            <a:endParaRPr lang="en-US" sz="900" dirty="0"/>
           </a:p>
         </p:txBody>
       </p:sp>
@@ -15949,7 +17101,7 @@
                 <a:ea typeface="Calibri" pitchFamily="34" charset="-122"/>
                 <a:cs typeface="Calibri" pitchFamily="34" charset="-120"/>
               </a:rPr>
-              <a:t>Word Labs  •  wordlabs.app  •  Root: 'use' = to employ or utilise</a:t>
+              <a:t>Word Labs  •  wordlabs.app  •  Root: 'use' = do something with</a:t>
             </a:r>
             <a:endParaRPr lang="en-US" sz="800" dirty="0"/>
           </a:p>
@@ -16283,7 +17435,7 @@
                 <a:ea typeface="Trebuchet MS" pitchFamily="34" charset="-122"/>
                 <a:cs typeface="Trebuchet MS" pitchFamily="34" charset="-120"/>
               </a:rPr>
-              <a:t>2</a:t>
+              <a:t>0</a:t>
             </a:r>
             <a:pPr algn="ctr" indent="0" marL="0">
               <a:buNone/>
@@ -16297,7 +17449,7 @@
                 <a:ea typeface="Trebuchet MS" pitchFamily="34" charset="-122"/>
                 <a:cs typeface="Trebuchet MS" pitchFamily="34" charset="-120"/>
               </a:rPr>
-              <a:t>  punctuation marks</a:t>
+              <a:t>  punctuation mark</a:t>
             </a:r>
             <a:endParaRPr lang="en-US" sz="2800" dirty="0"/>
           </a:p>
@@ -16589,7 +17741,7 @@
                 <a:ea typeface="Calibri" pitchFamily="34" charset="-122"/>
                 <a:cs typeface="Calibri" pitchFamily="34" charset="-120"/>
               </a:rPr>
-              <a:t>Word Labs  •  wordlabs.app  •  Root: 'use' = to employ or utilise</a:t>
+              <a:t>Word Labs  •  wordlabs.app  •  Root: 'use' = do something with</a:t>
             </a:r>
             <a:endParaRPr lang="en-US" sz="800" dirty="0"/>
           </a:p>
@@ -16693,6 +17845,20 @@
               <a:buNone/>
             </a:pPr>
             <a:r>
+              <a:rPr lang="en-US" sz="1800" dirty="0">
+                <a:solidFill>
+                  <a:srgbClr val="0F172A"/>
+                </a:solidFill>
+                <a:latin typeface="Calibri" pitchFamily="34" charset="0"/>
+                <a:ea typeface="Calibri" pitchFamily="34" charset="-122"/>
+                <a:cs typeface="Calibri" pitchFamily="34" charset="-120"/>
+              </a:rPr>
+              <a:t>The school hall is a wonderful </a:t>
+            </a:r>
+            <a:pPr algn="l" indent="0" marL="0">
+              <a:buNone/>
+            </a:pPr>
+            <a:r>
               <a:rPr lang="en-US" sz="1800" b="1" dirty="0">
                 <a:solidFill>
                   <a:srgbClr val="0D9488"/>
@@ -16704,7 +17870,7 @@
                 <a:ea typeface="Calibri" pitchFamily="34" charset="-122"/>
                 <a:cs typeface="Calibri" pitchFamily="34" charset="-120"/>
               </a:rPr>
-              <a:t>Overuse</a:t>
+              <a:t>underused</a:t>
             </a:r>
             <a:pPr algn="l" indent="0" marL="0">
               <a:buNone/>
@@ -16718,7 +17884,7 @@
                 <a:ea typeface="Calibri" pitchFamily="34" charset="-122"/>
                 <a:cs typeface="Calibri" pitchFamily="34" charset="-120"/>
               </a:rPr>
-              <a:t> of plastic is </a:t>
+              <a:t> space for extra clubs. The teacher explained the correct </a:t>
             </a:r>
             <a:pPr algn="l" indent="0" marL="0">
               <a:buNone/>
@@ -16735,7 +17901,7 @@
                 <a:ea typeface="Calibri" pitchFamily="34" charset="-122"/>
                 <a:cs typeface="Calibri" pitchFamily="34" charset="-120"/>
               </a:rPr>
-              <a:t>useless</a:t>
+              <a:t>usage</a:t>
             </a:r>
             <a:pPr algn="l" indent="0" marL="0">
               <a:buNone/>
@@ -16749,7 +17915,7 @@
                 <a:ea typeface="Calibri" pitchFamily="34" charset="-122"/>
                 <a:cs typeface="Calibri" pitchFamily="34" charset="-120"/>
               </a:rPr>
-              <a:t> for our planet; we must stop the </a:t>
+              <a:t> of the comma. The old tools were still </a:t>
             </a:r>
             <a:pPr algn="l" indent="0" marL="0">
               <a:buNone/>
@@ -16766,7 +17932,7 @@
                 <a:ea typeface="Calibri" pitchFamily="34" charset="-122"/>
                 <a:cs typeface="Calibri" pitchFamily="34" charset="-120"/>
               </a:rPr>
-              <a:t>misuse</a:t>
+              <a:t>useable</a:t>
             </a:r>
             <a:pPr algn="l" indent="0" marL="0">
               <a:buNone/>
@@ -16780,7 +17946,7 @@
                 <a:ea typeface="Calibri" pitchFamily="34" charset="-122"/>
                 <a:cs typeface="Calibri" pitchFamily="34" charset="-120"/>
               </a:rPr>
-              <a:t> of resources.</a:t>
+              <a:t> after years in the shed.</a:t>
             </a:r>
             <a:endParaRPr lang="en-US" sz="1800" dirty="0"/>
           </a:p>
@@ -16935,7 +18101,7 @@
                 <a:ea typeface="Trebuchet MS" pitchFamily="34" charset="-122"/>
                 <a:cs typeface="Trebuchet MS" pitchFamily="34" charset="-120"/>
               </a:rPr>
-              <a:t>overuse</a:t>
+              <a:t>underused</a:t>
             </a:r>
             <a:endParaRPr lang="en-US" sz="1400" dirty="0"/>
           </a:p>
@@ -17063,7 +18229,7 @@
                 <a:ea typeface="Trebuchet MS" pitchFamily="34" charset="-122"/>
                 <a:cs typeface="Trebuchet MS" pitchFamily="34" charset="-120"/>
               </a:rPr>
-              <a:t>useless</a:t>
+              <a:t>usage</a:t>
             </a:r>
             <a:endParaRPr lang="en-US" sz="1400" dirty="0"/>
           </a:p>
@@ -17191,7 +18357,7 @@
                 <a:ea typeface="Trebuchet MS" pitchFamily="34" charset="-122"/>
                 <a:cs typeface="Trebuchet MS" pitchFamily="34" charset="-120"/>
               </a:rPr>
-              <a:t>misuse</a:t>
+              <a:t>useable</a:t>
             </a:r>
             <a:endParaRPr lang="en-US" sz="1400" dirty="0"/>
           </a:p>
@@ -17522,7 +18688,7 @@
                 <a:ea typeface="Calibri" pitchFamily="34" charset="-122"/>
                 <a:cs typeface="Calibri" pitchFamily="34" charset="-120"/>
               </a:rPr>
-              <a:t>Word Labs  •  wordlabs.app  •  Root: 'use' = to employ or utilise</a:t>
+              <a:t>Word Labs  •  wordlabs.app  •  Root: 'use' = do something with</a:t>
             </a:r>
             <a:endParaRPr lang="en-US" sz="800" dirty="0"/>
           </a:p>
@@ -17661,7 +18827,7 @@
                 <a:ea typeface="Trebuchet MS" pitchFamily="34" charset="-122"/>
                 <a:cs typeface="Trebuchet MS" pitchFamily="34" charset="-120"/>
               </a:rPr>
-              <a:t>overuse</a:t>
+              <a:t>underused</a:t>
             </a:r>
             <a:endParaRPr lang="en-US" sz="2800" dirty="0"/>
           </a:p>
@@ -18349,7 +19515,7 @@
                 <a:ea typeface="Calibri" pitchFamily="34" charset="-122"/>
                 <a:cs typeface="Calibri" pitchFamily="34" charset="-120"/>
               </a:rPr>
-              <a:t>Word Labs  •  wordlabs.app  •  Root: 'use' = to employ or utilise</a:t>
+              <a:t>Word Labs  •  wordlabs.app  •  Root: 'use' = do something with</a:t>
             </a:r>
             <a:endParaRPr lang="en-US" sz="800" dirty="0"/>
           </a:p>
@@ -18488,7 +19654,7 @@
                 <a:ea typeface="Trebuchet MS" pitchFamily="34" charset="-122"/>
                 <a:cs typeface="Trebuchet MS" pitchFamily="34" charset="-120"/>
               </a:rPr>
-              <a:t>overuse</a:t>
+              <a:t>underused</a:t>
             </a:r>
             <a:endParaRPr lang="en-US" sz="2800" dirty="0"/>
           </a:p>
@@ -18568,7 +19734,7 @@
         </p:nvSpPr>
         <p:spPr>
           <a:xfrm>
-            <a:off x="2938272" y="2258568"/>
+            <a:off x="2221992" y="2258568"/>
             <a:ext cx="1828800" cy="292608"/>
           </a:xfrm>
           <a:prstGeom prst="rect">
@@ -18602,7 +19768,7 @@
         </p:nvSpPr>
         <p:spPr>
           <a:xfrm>
-            <a:off x="2938272" y="2258568"/>
+            <a:off x="2221992" y="2258568"/>
             <a:ext cx="1828800" cy="292608"/>
           </a:xfrm>
           <a:prstGeom prst="rect">
@@ -18627,7 +19793,7 @@
                 <a:ea typeface="Trebuchet MS" pitchFamily="34" charset="-122"/>
                 <a:cs typeface="Trebuchet MS" pitchFamily="34" charset="-120"/>
               </a:rPr>
-              <a:t>over</a:t>
+              <a:t>under</a:t>
             </a:r>
             <a:endParaRPr lang="en-US" sz="1300" dirty="0"/>
           </a:p>
@@ -18641,7 +19807,7 @@
         </p:nvSpPr>
         <p:spPr>
           <a:xfrm>
-            <a:off x="2938272" y="2569464"/>
+            <a:off x="2221992" y="2569464"/>
             <a:ext cx="1828800" cy="201168"/>
           </a:xfrm>
           <a:prstGeom prst="rect">
@@ -18666,7 +19832,7 @@
                 <a:ea typeface="Calibri" pitchFamily="34" charset="-122"/>
                 <a:cs typeface="Calibri" pitchFamily="34" charset="-120"/>
               </a:rPr>
-              <a:t>too much, above</a:t>
+              <a:t>below</a:t>
             </a:r>
             <a:endParaRPr lang="en-US" sz="850" dirty="0"/>
           </a:p>
@@ -18680,7 +19846,7 @@
         </p:nvSpPr>
         <p:spPr>
           <a:xfrm>
-            <a:off x="5803392" y="2258568"/>
+            <a:off x="4370832" y="2258568"/>
             <a:ext cx="1828800" cy="292608"/>
           </a:xfrm>
           <a:prstGeom prst="rect">
@@ -18714,7 +19880,7 @@
         </p:nvSpPr>
         <p:spPr>
           <a:xfrm>
-            <a:off x="5803392" y="2258568"/>
+            <a:off x="4370832" y="2258568"/>
             <a:ext cx="1828800" cy="292608"/>
           </a:xfrm>
           <a:prstGeom prst="rect">
@@ -18753,7 +19919,7 @@
         </p:nvSpPr>
         <p:spPr>
           <a:xfrm>
-            <a:off x="5803392" y="2569464"/>
+            <a:off x="4370832" y="2569464"/>
             <a:ext cx="1828800" cy="201168"/>
           </a:xfrm>
           <a:prstGeom prst="rect">
@@ -18778,7 +19944,7 @@
                 <a:ea typeface="Calibri" pitchFamily="34" charset="-122"/>
                 <a:cs typeface="Calibri" pitchFamily="34" charset="-120"/>
               </a:rPr>
-              <a:t>to employ or utilise</a:t>
+              <a:t>do something with</a:t>
             </a:r>
             <a:endParaRPr lang="en-US" sz="850" dirty="0"/>
           </a:p>
@@ -18787,6 +19953,118 @@
       <p:sp>
         <p:nvSpPr>
           <p:cNvPr id="22" name="Shape 20"/>
+          <p:cNvSpPr/>
+          <p:nvPr/>
+        </p:nvSpPr>
+        <p:spPr>
+          <a:xfrm>
+            <a:off x="6519672" y="2258568"/>
+            <a:ext cx="1828800" cy="292608"/>
+          </a:xfrm>
+          <a:prstGeom prst="rect">
+            <a:avLst>
+              <a:gd name="adj" fmla="val 25000"/>
+            </a:avLst>
+          </a:prstGeom>
+          <a:solidFill>
+            <a:srgbClr val="FCE7F3"/>
+          </a:solidFill>
+          <a:ln w="19050">
+            <a:solidFill>
+              <a:srgbClr val="DB2777"/>
+            </a:solidFill>
+            <a:prstDash val="solid"/>
+          </a:ln>
+          <a:effectLst>
+            <a:outerShdw sx="100000" sy="100000" kx="0" ky="0" algn="bl" rotWithShape="0" blurRad="101600" dist="38100" dir="8100000">
+              <a:srgbClr val="000000">
+                <a:alpha val="12000"/>
+              </a:srgbClr>
+            </a:outerShdw>
+          </a:effectLst>
+        </p:spPr>
+      </p:sp>
+      <p:sp>
+        <p:nvSpPr>
+          <p:cNvPr id="23" name="Text 21"/>
+          <p:cNvSpPr/>
+          <p:nvPr/>
+        </p:nvSpPr>
+        <p:spPr>
+          <a:xfrm>
+            <a:off x="6519672" y="2258568"/>
+            <a:ext cx="1828800" cy="292608"/>
+          </a:xfrm>
+          <a:prstGeom prst="rect">
+            <a:avLst/>
+          </a:prstGeom>
+          <a:noFill/>
+          <a:ln/>
+        </p:spPr>
+        <p:txBody>
+          <a:bodyPr wrap="square" lIns="0" tIns="0" rIns="0" bIns="0" rtlCol="0" anchor="ctr"/>
+          <a:lstStyle/>
+          <a:p>
+            <a:pPr algn="ctr" indent="0" marL="0">
+              <a:buNone/>
+            </a:pPr>
+            <a:r>
+              <a:rPr lang="en-US" sz="1300" b="1" dirty="0">
+                <a:solidFill>
+                  <a:srgbClr val="9D174D"/>
+                </a:solidFill>
+                <a:latin typeface="Trebuchet MS" pitchFamily="34" charset="0"/>
+                <a:ea typeface="Trebuchet MS" pitchFamily="34" charset="-122"/>
+                <a:cs typeface="Trebuchet MS" pitchFamily="34" charset="-120"/>
+              </a:rPr>
+              <a:t>ed</a:t>
+            </a:r>
+            <a:endParaRPr lang="en-US" sz="1300" dirty="0"/>
+          </a:p>
+        </p:txBody>
+      </p:sp>
+      <p:sp>
+        <p:nvSpPr>
+          <p:cNvPr id="24" name="Text 22"/>
+          <p:cNvSpPr/>
+          <p:nvPr/>
+        </p:nvSpPr>
+        <p:spPr>
+          <a:xfrm>
+            <a:off x="6519672" y="2569464"/>
+            <a:ext cx="1828800" cy="201168"/>
+          </a:xfrm>
+          <a:prstGeom prst="rect">
+            <a:avLst/>
+          </a:prstGeom>
+          <a:noFill/>
+          <a:ln/>
+        </p:spPr>
+        <p:txBody>
+          <a:bodyPr wrap="square" lIns="0" tIns="0" rIns="0" bIns="0" rtlCol="0" anchor="t"/>
+          <a:lstStyle/>
+          <a:p>
+            <a:pPr algn="ctr" indent="0" marL="0">
+              <a:buNone/>
+            </a:pPr>
+            <a:r>
+              <a:rPr lang="en-US" sz="850" dirty="0">
+                <a:solidFill>
+                  <a:srgbClr val="475569"/>
+                </a:solidFill>
+                <a:latin typeface="Calibri" pitchFamily="34" charset="0"/>
+                <a:ea typeface="Calibri" pitchFamily="34" charset="-122"/>
+                <a:cs typeface="Calibri" pitchFamily="34" charset="-120"/>
+              </a:rPr>
+              <a:t>past tense</a:t>
+            </a:r>
+            <a:endParaRPr lang="en-US" sz="850" dirty="0"/>
+          </a:p>
+        </p:txBody>
+      </p:sp>
+      <p:sp>
+        <p:nvSpPr>
+          <p:cNvPr id="25" name="Shape 23"/>
           <p:cNvSpPr/>
           <p:nvPr/>
         </p:nvSpPr>
@@ -18813,7 +20091,7 @@
       </p:sp>
       <p:sp>
         <p:nvSpPr>
-          <p:cNvPr id="23" name="Text 21"/>
+          <p:cNvPr id="26" name="Text 24"/>
           <p:cNvSpPr/>
           <p:nvPr/>
         </p:nvSpPr>
@@ -18852,7 +20130,7 @@
       </p:sp>
       <p:sp>
         <p:nvSpPr>
-          <p:cNvPr id="24" name="Shape 22"/>
+          <p:cNvPr id="27" name="Shape 25"/>
           <p:cNvSpPr/>
           <p:nvPr/>
         </p:nvSpPr>
@@ -18879,7 +20157,7 @@
       </p:sp>
       <p:sp>
         <p:nvSpPr>
-          <p:cNvPr id="25" name="Text 23"/>
+          <p:cNvPr id="28" name="Text 26"/>
           <p:cNvSpPr/>
           <p:nvPr/>
         </p:nvSpPr>
@@ -18918,7 +20196,7 @@
       </p:sp>
       <p:sp>
         <p:nvSpPr>
-          <p:cNvPr id="26" name="Shape 24"/>
+          <p:cNvPr id="29" name="Shape 27"/>
           <p:cNvSpPr/>
           <p:nvPr/>
         </p:nvSpPr>
@@ -18945,7 +20223,7 @@
       </p:sp>
       <p:sp>
         <p:nvSpPr>
-          <p:cNvPr id="27" name="Text 25"/>
+          <p:cNvPr id="30" name="Text 28"/>
           <p:cNvSpPr/>
           <p:nvPr/>
         </p:nvSpPr>
@@ -18984,7 +20262,7 @@
       </p:sp>
       <p:sp>
         <p:nvSpPr>
-          <p:cNvPr id="28" name="Shape 26"/>
+          <p:cNvPr id="31" name="Shape 29"/>
           <p:cNvSpPr/>
           <p:nvPr/>
         </p:nvSpPr>
@@ -19011,7 +20289,7 @@
       </p:sp>
       <p:sp>
         <p:nvSpPr>
-          <p:cNvPr id="29" name="Text 27"/>
+          <p:cNvPr id="32" name="Text 30"/>
           <p:cNvSpPr/>
           <p:nvPr/>
         </p:nvSpPr>
@@ -19334,7 +20612,7 @@
                 <a:ea typeface="Calibri" pitchFamily="34" charset="-122"/>
                 <a:cs typeface="Calibri" pitchFamily="34" charset="-120"/>
               </a:rPr>
-              <a:t>Word Labs  •  wordlabs.app  •  Root: 'use' = to employ or utilise</a:t>
+              <a:t>Word Labs  •  wordlabs.app  •  Root: 'use' = do something with</a:t>
             </a:r>
             <a:endParaRPr lang="en-US" sz="800" dirty="0"/>
           </a:p>
@@ -19473,7 +20751,7 @@
                 <a:ea typeface="Trebuchet MS" pitchFamily="34" charset="-122"/>
                 <a:cs typeface="Trebuchet MS" pitchFamily="34" charset="-120"/>
               </a:rPr>
-              <a:t>overuse</a:t>
+              <a:t>underused</a:t>
             </a:r>
             <a:endParaRPr lang="en-US" sz="2800" dirty="0"/>
           </a:p>
@@ -19553,7 +20831,7 @@
         </p:nvSpPr>
         <p:spPr>
           <a:xfrm>
-            <a:off x="2938272" y="2258568"/>
+            <a:off x="2221992" y="2258568"/>
             <a:ext cx="1828800" cy="292608"/>
           </a:xfrm>
           <a:prstGeom prst="rect">
@@ -19587,7 +20865,7 @@
         </p:nvSpPr>
         <p:spPr>
           <a:xfrm>
-            <a:off x="2938272" y="2258568"/>
+            <a:off x="2221992" y="2258568"/>
             <a:ext cx="1828800" cy="292608"/>
           </a:xfrm>
           <a:prstGeom prst="rect">
@@ -19612,7 +20890,7 @@
                 <a:ea typeface="Trebuchet MS" pitchFamily="34" charset="-122"/>
                 <a:cs typeface="Trebuchet MS" pitchFamily="34" charset="-120"/>
               </a:rPr>
-              <a:t>over</a:t>
+              <a:t>under</a:t>
             </a:r>
             <a:endParaRPr lang="en-US" sz="1300" dirty="0"/>
           </a:p>
@@ -19626,7 +20904,7 @@
         </p:nvSpPr>
         <p:spPr>
           <a:xfrm>
-            <a:off x="2938272" y="2569464"/>
+            <a:off x="2221992" y="2569464"/>
             <a:ext cx="1828800" cy="201168"/>
           </a:xfrm>
           <a:prstGeom prst="rect">
@@ -19651,7 +20929,7 @@
                 <a:ea typeface="Calibri" pitchFamily="34" charset="-122"/>
                 <a:cs typeface="Calibri" pitchFamily="34" charset="-120"/>
               </a:rPr>
-              <a:t>too much, above</a:t>
+              <a:t>below</a:t>
             </a:r>
             <a:endParaRPr lang="en-US" sz="850" dirty="0"/>
           </a:p>
@@ -19665,7 +20943,7 @@
         </p:nvSpPr>
         <p:spPr>
           <a:xfrm>
-            <a:off x="5803392" y="2258568"/>
+            <a:off x="4370832" y="2258568"/>
             <a:ext cx="1828800" cy="292608"/>
           </a:xfrm>
           <a:prstGeom prst="rect">
@@ -19699,7 +20977,7 @@
         </p:nvSpPr>
         <p:spPr>
           <a:xfrm>
-            <a:off x="5803392" y="2258568"/>
+            <a:off x="4370832" y="2258568"/>
             <a:ext cx="1828800" cy="292608"/>
           </a:xfrm>
           <a:prstGeom prst="rect">
@@ -19738,7 +21016,7 @@
         </p:nvSpPr>
         <p:spPr>
           <a:xfrm>
-            <a:off x="5803392" y="2569464"/>
+            <a:off x="4370832" y="2569464"/>
             <a:ext cx="1828800" cy="201168"/>
           </a:xfrm>
           <a:prstGeom prst="rect">
@@ -19763,7 +21041,7 @@
                 <a:ea typeface="Calibri" pitchFamily="34" charset="-122"/>
                 <a:cs typeface="Calibri" pitchFamily="34" charset="-120"/>
               </a:rPr>
-              <a:t>to employ or utilise</a:t>
+              <a:t>do something with</a:t>
             </a:r>
             <a:endParaRPr lang="en-US" sz="850" dirty="0"/>
           </a:p>
@@ -19772,6 +21050,118 @@
       <p:sp>
         <p:nvSpPr>
           <p:cNvPr id="22" name="Shape 20"/>
+          <p:cNvSpPr/>
+          <p:nvPr/>
+        </p:nvSpPr>
+        <p:spPr>
+          <a:xfrm>
+            <a:off x="6519672" y="2258568"/>
+            <a:ext cx="1828800" cy="292608"/>
+          </a:xfrm>
+          <a:prstGeom prst="rect">
+            <a:avLst>
+              <a:gd name="adj" fmla="val 25000"/>
+            </a:avLst>
+          </a:prstGeom>
+          <a:solidFill>
+            <a:srgbClr val="FCE7F3"/>
+          </a:solidFill>
+          <a:ln w="19050">
+            <a:solidFill>
+              <a:srgbClr val="DB2777"/>
+            </a:solidFill>
+            <a:prstDash val="solid"/>
+          </a:ln>
+          <a:effectLst>
+            <a:outerShdw sx="100000" sy="100000" kx="0" ky="0" algn="bl" rotWithShape="0" blurRad="101600" dist="38100" dir="8100000">
+              <a:srgbClr val="000000">
+                <a:alpha val="12000"/>
+              </a:srgbClr>
+            </a:outerShdw>
+          </a:effectLst>
+        </p:spPr>
+      </p:sp>
+      <p:sp>
+        <p:nvSpPr>
+          <p:cNvPr id="23" name="Text 21"/>
+          <p:cNvSpPr/>
+          <p:nvPr/>
+        </p:nvSpPr>
+        <p:spPr>
+          <a:xfrm>
+            <a:off x="6519672" y="2258568"/>
+            <a:ext cx="1828800" cy="292608"/>
+          </a:xfrm>
+          <a:prstGeom prst="rect">
+            <a:avLst/>
+          </a:prstGeom>
+          <a:noFill/>
+          <a:ln/>
+        </p:spPr>
+        <p:txBody>
+          <a:bodyPr wrap="square" lIns="0" tIns="0" rIns="0" bIns="0" rtlCol="0" anchor="ctr"/>
+          <a:lstStyle/>
+          <a:p>
+            <a:pPr algn="ctr" indent="0" marL="0">
+              <a:buNone/>
+            </a:pPr>
+            <a:r>
+              <a:rPr lang="en-US" sz="1300" b="1" dirty="0">
+                <a:solidFill>
+                  <a:srgbClr val="9D174D"/>
+                </a:solidFill>
+                <a:latin typeface="Trebuchet MS" pitchFamily="34" charset="0"/>
+                <a:ea typeface="Trebuchet MS" pitchFamily="34" charset="-122"/>
+                <a:cs typeface="Trebuchet MS" pitchFamily="34" charset="-120"/>
+              </a:rPr>
+              <a:t>ed</a:t>
+            </a:r>
+            <a:endParaRPr lang="en-US" sz="1300" dirty="0"/>
+          </a:p>
+        </p:txBody>
+      </p:sp>
+      <p:sp>
+        <p:nvSpPr>
+          <p:cNvPr id="24" name="Text 22"/>
+          <p:cNvSpPr/>
+          <p:nvPr/>
+        </p:nvSpPr>
+        <p:spPr>
+          <a:xfrm>
+            <a:off x="6519672" y="2569464"/>
+            <a:ext cx="1828800" cy="201168"/>
+          </a:xfrm>
+          <a:prstGeom prst="rect">
+            <a:avLst/>
+          </a:prstGeom>
+          <a:noFill/>
+          <a:ln/>
+        </p:spPr>
+        <p:txBody>
+          <a:bodyPr wrap="square" lIns="0" tIns="0" rIns="0" bIns="0" rtlCol="0" anchor="t"/>
+          <a:lstStyle/>
+          <a:p>
+            <a:pPr algn="ctr" indent="0" marL="0">
+              <a:buNone/>
+            </a:pPr>
+            <a:r>
+              <a:rPr lang="en-US" sz="850" dirty="0">
+                <a:solidFill>
+                  <a:srgbClr val="475569"/>
+                </a:solidFill>
+                <a:latin typeface="Calibri" pitchFamily="34" charset="0"/>
+                <a:ea typeface="Calibri" pitchFamily="34" charset="-122"/>
+                <a:cs typeface="Calibri" pitchFamily="34" charset="-120"/>
+              </a:rPr>
+              <a:t>past tense</a:t>
+            </a:r>
+            <a:endParaRPr lang="en-US" sz="850" dirty="0"/>
+          </a:p>
+        </p:txBody>
+      </p:sp>
+      <p:sp>
+        <p:nvSpPr>
+          <p:cNvPr id="25" name="Shape 23"/>
           <p:cNvSpPr/>
           <p:nvPr/>
         </p:nvSpPr>
@@ -19798,7 +21188,7 @@
       </p:sp>
       <p:sp>
         <p:nvSpPr>
-          <p:cNvPr id="23" name="Text 21"/>
+          <p:cNvPr id="26" name="Text 24"/>
           <p:cNvSpPr/>
           <p:nvPr/>
         </p:nvSpPr>
@@ -19837,7 +21227,7 @@
       </p:sp>
       <p:sp>
         <p:nvSpPr>
-          <p:cNvPr id="24" name="Shape 22"/>
+          <p:cNvPr id="27" name="Shape 25"/>
           <p:cNvSpPr/>
           <p:nvPr/>
         </p:nvSpPr>
@@ -19864,7 +21254,7 @@
       </p:sp>
       <p:sp>
         <p:nvSpPr>
-          <p:cNvPr id="25" name="Shape 23"/>
+          <p:cNvPr id="28" name="Shape 26"/>
           <p:cNvSpPr/>
           <p:nvPr/>
         </p:nvSpPr>
@@ -19891,7 +21281,7 @@
       </p:sp>
       <p:sp>
         <p:nvSpPr>
-          <p:cNvPr id="26" name="Text 24"/>
+          <p:cNvPr id="29" name="Text 27"/>
           <p:cNvSpPr/>
           <p:nvPr/>
         </p:nvSpPr>
@@ -19922,7 +21312,7 @@
                 <a:ea typeface="Trebuchet MS" pitchFamily="34" charset="-122"/>
                 <a:cs typeface="Trebuchet MS" pitchFamily="34" charset="-120"/>
               </a:rPr>
-              <a:t>o</a:t>
+              <a:t>un</a:t>
             </a:r>
             <a:endParaRPr lang="en-US" sz="1400" dirty="0"/>
           </a:p>
@@ -19930,7 +21320,7 @@
       </p:sp>
       <p:sp>
         <p:nvSpPr>
-          <p:cNvPr id="27" name="Text 25"/>
+          <p:cNvPr id="30" name="Text 28"/>
           <p:cNvSpPr/>
           <p:nvPr/>
         </p:nvSpPr>
@@ -19969,7 +21359,7 @@
       </p:sp>
       <p:sp>
         <p:nvSpPr>
-          <p:cNvPr id="28" name="Shape 26"/>
+          <p:cNvPr id="31" name="Shape 29"/>
           <p:cNvSpPr/>
           <p:nvPr/>
         </p:nvSpPr>
@@ -19996,7 +21386,7 @@
       </p:sp>
       <p:sp>
         <p:nvSpPr>
-          <p:cNvPr id="29" name="Text 27"/>
+          <p:cNvPr id="32" name="Text 30"/>
           <p:cNvSpPr/>
           <p:nvPr/>
         </p:nvSpPr>
@@ -20027,7 +21417,7 @@
                 <a:ea typeface="Trebuchet MS" pitchFamily="34" charset="-122"/>
                 <a:cs typeface="Trebuchet MS" pitchFamily="34" charset="-120"/>
               </a:rPr>
-              <a:t>ver</a:t>
+              <a:t>der</a:t>
             </a:r>
             <a:endParaRPr lang="en-US" sz="1400" dirty="0"/>
           </a:p>
@@ -20035,7 +21425,7 @@
       </p:sp>
       <p:sp>
         <p:nvSpPr>
-          <p:cNvPr id="30" name="Text 28"/>
+          <p:cNvPr id="33" name="Text 31"/>
           <p:cNvSpPr/>
           <p:nvPr/>
         </p:nvSpPr>
@@ -20074,7 +21464,7 @@
       </p:sp>
       <p:sp>
         <p:nvSpPr>
-          <p:cNvPr id="31" name="Shape 29"/>
+          <p:cNvPr id="34" name="Shape 32"/>
           <p:cNvSpPr/>
           <p:nvPr/>
         </p:nvSpPr>
@@ -20101,7 +21491,7 @@
       </p:sp>
       <p:sp>
         <p:nvSpPr>
-          <p:cNvPr id="32" name="Text 30"/>
+          <p:cNvPr id="35" name="Text 33"/>
           <p:cNvSpPr/>
           <p:nvPr/>
         </p:nvSpPr>
@@ -20132,7 +21522,7 @@
                 <a:ea typeface="Trebuchet MS" pitchFamily="34" charset="-122"/>
                 <a:cs typeface="Trebuchet MS" pitchFamily="34" charset="-120"/>
               </a:rPr>
-              <a:t>use</a:t>
+              <a:t>used</a:t>
             </a:r>
             <a:endParaRPr lang="en-US" sz="1400" dirty="0"/>
           </a:p>
@@ -20140,7 +21530,7 @@
       </p:sp>
       <p:sp>
         <p:nvSpPr>
-          <p:cNvPr id="33" name="Shape 31"/>
+          <p:cNvPr id="36" name="Shape 34"/>
           <p:cNvSpPr/>
           <p:nvPr/>
         </p:nvSpPr>
@@ -20167,7 +21557,7 @@
       </p:sp>
       <p:sp>
         <p:nvSpPr>
-          <p:cNvPr id="34" name="Text 32"/>
+          <p:cNvPr id="37" name="Text 35"/>
           <p:cNvSpPr/>
           <p:nvPr/>
         </p:nvSpPr>
@@ -20206,7 +21596,7 @@
       </p:sp>
       <p:sp>
         <p:nvSpPr>
-          <p:cNvPr id="35" name="Shape 33"/>
+          <p:cNvPr id="38" name="Shape 36"/>
           <p:cNvSpPr/>
           <p:nvPr/>
         </p:nvSpPr>
@@ -20233,7 +21623,7 @@
       </p:sp>
       <p:sp>
         <p:nvSpPr>
-          <p:cNvPr id="36" name="Text 34"/>
+          <p:cNvPr id="39" name="Text 37"/>
           <p:cNvSpPr/>
           <p:nvPr/>
         </p:nvSpPr>
@@ -20556,7 +21946,7 @@
                 <a:ea typeface="Calibri" pitchFamily="34" charset="-122"/>
                 <a:cs typeface="Calibri" pitchFamily="34" charset="-120"/>
               </a:rPr>
-              <a:t>Word Labs  •  wordlabs.app  •  Root: 'use' = to employ or utilise</a:t>
+              <a:t>Word Labs  •  wordlabs.app  •  Root: 'use' = do something with</a:t>
             </a:r>
             <a:endParaRPr lang="en-US" sz="800" dirty="0"/>
           </a:p>
@@ -20695,7 +22085,7 @@
                 <a:ea typeface="Trebuchet MS" pitchFamily="34" charset="-122"/>
                 <a:cs typeface="Trebuchet MS" pitchFamily="34" charset="-120"/>
               </a:rPr>
-              <a:t>overuse</a:t>
+              <a:t>underused</a:t>
             </a:r>
             <a:endParaRPr lang="en-US" sz="2800" dirty="0"/>
           </a:p>
@@ -20775,7 +22165,7 @@
         </p:nvSpPr>
         <p:spPr>
           <a:xfrm>
-            <a:off x="2938272" y="2258568"/>
+            <a:off x="2221992" y="2258568"/>
             <a:ext cx="1828800" cy="292608"/>
           </a:xfrm>
           <a:prstGeom prst="rect">
@@ -20809,7 +22199,7 @@
         </p:nvSpPr>
         <p:spPr>
           <a:xfrm>
-            <a:off x="2938272" y="2258568"/>
+            <a:off x="2221992" y="2258568"/>
             <a:ext cx="1828800" cy="292608"/>
           </a:xfrm>
           <a:prstGeom prst="rect">
@@ -20834,7 +22224,7 @@
                 <a:ea typeface="Trebuchet MS" pitchFamily="34" charset="-122"/>
                 <a:cs typeface="Trebuchet MS" pitchFamily="34" charset="-120"/>
               </a:rPr>
-              <a:t>over</a:t>
+              <a:t>under</a:t>
             </a:r>
             <a:endParaRPr lang="en-US" sz="1300" dirty="0"/>
           </a:p>
@@ -20848,7 +22238,7 @@
         </p:nvSpPr>
         <p:spPr>
           <a:xfrm>
-            <a:off x="2938272" y="2569464"/>
+            <a:off x="2221992" y="2569464"/>
             <a:ext cx="1828800" cy="201168"/>
           </a:xfrm>
           <a:prstGeom prst="rect">
@@ -20873,7 +22263,7 @@
                 <a:ea typeface="Calibri" pitchFamily="34" charset="-122"/>
                 <a:cs typeface="Calibri" pitchFamily="34" charset="-120"/>
               </a:rPr>
-              <a:t>too much, above</a:t>
+              <a:t>below</a:t>
             </a:r>
             <a:endParaRPr lang="en-US" sz="850" dirty="0"/>
           </a:p>
@@ -20887,7 +22277,7 @@
         </p:nvSpPr>
         <p:spPr>
           <a:xfrm>
-            <a:off x="5803392" y="2258568"/>
+            <a:off x="4370832" y="2258568"/>
             <a:ext cx="1828800" cy="292608"/>
           </a:xfrm>
           <a:prstGeom prst="rect">
@@ -20921,7 +22311,7 @@
         </p:nvSpPr>
         <p:spPr>
           <a:xfrm>
-            <a:off x="5803392" y="2258568"/>
+            <a:off x="4370832" y="2258568"/>
             <a:ext cx="1828800" cy="292608"/>
           </a:xfrm>
           <a:prstGeom prst="rect">
@@ -20960,7 +22350,7 @@
         </p:nvSpPr>
         <p:spPr>
           <a:xfrm>
-            <a:off x="5803392" y="2569464"/>
+            <a:off x="4370832" y="2569464"/>
             <a:ext cx="1828800" cy="201168"/>
           </a:xfrm>
           <a:prstGeom prst="rect">
@@ -20985,7 +22375,7 @@
                 <a:ea typeface="Calibri" pitchFamily="34" charset="-122"/>
                 <a:cs typeface="Calibri" pitchFamily="34" charset="-120"/>
               </a:rPr>
-              <a:t>to employ or utilise</a:t>
+              <a:t>do something with</a:t>
             </a:r>
             <a:endParaRPr lang="en-US" sz="850" dirty="0"/>
           </a:p>
@@ -20994,6 +22384,118 @@
       <p:sp>
         <p:nvSpPr>
           <p:cNvPr id="22" name="Shape 20"/>
+          <p:cNvSpPr/>
+          <p:nvPr/>
+        </p:nvSpPr>
+        <p:spPr>
+          <a:xfrm>
+            <a:off x="6519672" y="2258568"/>
+            <a:ext cx="1828800" cy="292608"/>
+          </a:xfrm>
+          <a:prstGeom prst="rect">
+            <a:avLst>
+              <a:gd name="adj" fmla="val 25000"/>
+            </a:avLst>
+          </a:prstGeom>
+          <a:solidFill>
+            <a:srgbClr val="FCE7F3"/>
+          </a:solidFill>
+          <a:ln w="19050">
+            <a:solidFill>
+              <a:srgbClr val="DB2777"/>
+            </a:solidFill>
+            <a:prstDash val="solid"/>
+          </a:ln>
+          <a:effectLst>
+            <a:outerShdw sx="100000" sy="100000" kx="0" ky="0" algn="bl" rotWithShape="0" blurRad="101600" dist="38100" dir="8100000">
+              <a:srgbClr val="000000">
+                <a:alpha val="12000"/>
+              </a:srgbClr>
+            </a:outerShdw>
+          </a:effectLst>
+        </p:spPr>
+      </p:sp>
+      <p:sp>
+        <p:nvSpPr>
+          <p:cNvPr id="23" name="Text 21"/>
+          <p:cNvSpPr/>
+          <p:nvPr/>
+        </p:nvSpPr>
+        <p:spPr>
+          <a:xfrm>
+            <a:off x="6519672" y="2258568"/>
+            <a:ext cx="1828800" cy="292608"/>
+          </a:xfrm>
+          <a:prstGeom prst="rect">
+            <a:avLst/>
+          </a:prstGeom>
+          <a:noFill/>
+          <a:ln/>
+        </p:spPr>
+        <p:txBody>
+          <a:bodyPr wrap="square" lIns="0" tIns="0" rIns="0" bIns="0" rtlCol="0" anchor="ctr"/>
+          <a:lstStyle/>
+          <a:p>
+            <a:pPr algn="ctr" indent="0" marL="0">
+              <a:buNone/>
+            </a:pPr>
+            <a:r>
+              <a:rPr lang="en-US" sz="1300" b="1" dirty="0">
+                <a:solidFill>
+                  <a:srgbClr val="9D174D"/>
+                </a:solidFill>
+                <a:latin typeface="Trebuchet MS" pitchFamily="34" charset="0"/>
+                <a:ea typeface="Trebuchet MS" pitchFamily="34" charset="-122"/>
+                <a:cs typeface="Trebuchet MS" pitchFamily="34" charset="-120"/>
+              </a:rPr>
+              <a:t>ed</a:t>
+            </a:r>
+            <a:endParaRPr lang="en-US" sz="1300" dirty="0"/>
+          </a:p>
+        </p:txBody>
+      </p:sp>
+      <p:sp>
+        <p:nvSpPr>
+          <p:cNvPr id="24" name="Text 22"/>
+          <p:cNvSpPr/>
+          <p:nvPr/>
+        </p:nvSpPr>
+        <p:spPr>
+          <a:xfrm>
+            <a:off x="6519672" y="2569464"/>
+            <a:ext cx="1828800" cy="201168"/>
+          </a:xfrm>
+          <a:prstGeom prst="rect">
+            <a:avLst/>
+          </a:prstGeom>
+          <a:noFill/>
+          <a:ln/>
+        </p:spPr>
+        <p:txBody>
+          <a:bodyPr wrap="square" lIns="0" tIns="0" rIns="0" bIns="0" rtlCol="0" anchor="t"/>
+          <a:lstStyle/>
+          <a:p>
+            <a:pPr algn="ctr" indent="0" marL="0">
+              <a:buNone/>
+            </a:pPr>
+            <a:r>
+              <a:rPr lang="en-US" sz="850" dirty="0">
+                <a:solidFill>
+                  <a:srgbClr val="475569"/>
+                </a:solidFill>
+                <a:latin typeface="Calibri" pitchFamily="34" charset="0"/>
+                <a:ea typeface="Calibri" pitchFamily="34" charset="-122"/>
+                <a:cs typeface="Calibri" pitchFamily="34" charset="-120"/>
+              </a:rPr>
+              <a:t>past tense</a:t>
+            </a:r>
+            <a:endParaRPr lang="en-US" sz="850" dirty="0"/>
+          </a:p>
+        </p:txBody>
+      </p:sp>
+      <p:sp>
+        <p:nvSpPr>
+          <p:cNvPr id="25" name="Shape 23"/>
           <p:cNvSpPr/>
           <p:nvPr/>
         </p:nvSpPr>
@@ -21020,7 +22522,7 @@
       </p:sp>
       <p:sp>
         <p:nvSpPr>
-          <p:cNvPr id="23" name="Text 21"/>
+          <p:cNvPr id="26" name="Text 24"/>
           <p:cNvSpPr/>
           <p:nvPr/>
         </p:nvSpPr>
@@ -21059,7 +22561,7 @@
       </p:sp>
       <p:sp>
         <p:nvSpPr>
-          <p:cNvPr id="24" name="Shape 22"/>
+          <p:cNvPr id="27" name="Shape 25"/>
           <p:cNvSpPr/>
           <p:nvPr/>
         </p:nvSpPr>
@@ -21086,7 +22588,7 @@
       </p:sp>
       <p:sp>
         <p:nvSpPr>
-          <p:cNvPr id="25" name="Shape 23"/>
+          <p:cNvPr id="28" name="Shape 26"/>
           <p:cNvSpPr/>
           <p:nvPr/>
         </p:nvSpPr>
@@ -21113,7 +22615,7 @@
       </p:sp>
       <p:sp>
         <p:nvSpPr>
-          <p:cNvPr id="26" name="Text 24"/>
+          <p:cNvPr id="29" name="Text 27"/>
           <p:cNvSpPr/>
           <p:nvPr/>
         </p:nvSpPr>
@@ -21144,7 +22646,7 @@
                 <a:ea typeface="Trebuchet MS" pitchFamily="34" charset="-122"/>
                 <a:cs typeface="Trebuchet MS" pitchFamily="34" charset="-120"/>
               </a:rPr>
-              <a:t>o</a:t>
+              <a:t>un</a:t>
             </a:r>
             <a:endParaRPr lang="en-US" sz="1400" dirty="0"/>
           </a:p>
@@ -21152,7 +22654,7 @@
       </p:sp>
       <p:sp>
         <p:nvSpPr>
-          <p:cNvPr id="27" name="Text 25"/>
+          <p:cNvPr id="30" name="Text 28"/>
           <p:cNvSpPr/>
           <p:nvPr/>
         </p:nvSpPr>
@@ -21191,7 +22693,7 @@
       </p:sp>
       <p:sp>
         <p:nvSpPr>
-          <p:cNvPr id="28" name="Shape 26"/>
+          <p:cNvPr id="31" name="Shape 29"/>
           <p:cNvSpPr/>
           <p:nvPr/>
         </p:nvSpPr>
@@ -21218,7 +22720,7 @@
       </p:sp>
       <p:sp>
         <p:nvSpPr>
-          <p:cNvPr id="29" name="Text 27"/>
+          <p:cNvPr id="32" name="Text 30"/>
           <p:cNvSpPr/>
           <p:nvPr/>
         </p:nvSpPr>
@@ -21249,7 +22751,7 @@
                 <a:ea typeface="Trebuchet MS" pitchFamily="34" charset="-122"/>
                 <a:cs typeface="Trebuchet MS" pitchFamily="34" charset="-120"/>
               </a:rPr>
-              <a:t>ver</a:t>
+              <a:t>der</a:t>
             </a:r>
             <a:endParaRPr lang="en-US" sz="1400" dirty="0"/>
           </a:p>
@@ -21257,7 +22759,7 @@
       </p:sp>
       <p:sp>
         <p:nvSpPr>
-          <p:cNvPr id="30" name="Text 28"/>
+          <p:cNvPr id="33" name="Text 31"/>
           <p:cNvSpPr/>
           <p:nvPr/>
         </p:nvSpPr>
@@ -21296,7 +22798,7 @@
       </p:sp>
       <p:sp>
         <p:nvSpPr>
-          <p:cNvPr id="31" name="Shape 29"/>
+          <p:cNvPr id="34" name="Shape 32"/>
           <p:cNvSpPr/>
           <p:nvPr/>
         </p:nvSpPr>
@@ -21323,7 +22825,7 @@
       </p:sp>
       <p:sp>
         <p:nvSpPr>
-          <p:cNvPr id="32" name="Text 30"/>
+          <p:cNvPr id="35" name="Text 33"/>
           <p:cNvSpPr/>
           <p:nvPr/>
         </p:nvSpPr>
@@ -21354,7 +22856,7 @@
                 <a:ea typeface="Trebuchet MS" pitchFamily="34" charset="-122"/>
                 <a:cs typeface="Trebuchet MS" pitchFamily="34" charset="-120"/>
               </a:rPr>
-              <a:t>use</a:t>
+              <a:t>used</a:t>
             </a:r>
             <a:endParaRPr lang="en-US" sz="1400" dirty="0"/>
           </a:p>
@@ -21362,7 +22864,7 @@
       </p:sp>
       <p:sp>
         <p:nvSpPr>
-          <p:cNvPr id="33" name="Shape 31"/>
+          <p:cNvPr id="36" name="Shape 34"/>
           <p:cNvSpPr/>
           <p:nvPr/>
         </p:nvSpPr>
@@ -21389,7 +22891,7 @@
       </p:sp>
       <p:sp>
         <p:nvSpPr>
-          <p:cNvPr id="34" name="Text 32"/>
+          <p:cNvPr id="37" name="Text 35"/>
           <p:cNvSpPr/>
           <p:nvPr/>
         </p:nvSpPr>
@@ -21428,18 +22930,18 @@
       </p:sp>
       <p:sp>
         <p:nvSpPr>
-          <p:cNvPr id="35" name="Shape 33"/>
+          <p:cNvPr id="38" name="Shape 36"/>
           <p:cNvSpPr/>
           <p:nvPr/>
         </p:nvSpPr>
         <p:spPr>
           <a:xfrm>
             <a:off x="1874520" y="4096512"/>
-            <a:ext cx="6903720" cy="804672"/>
+            <a:ext cx="6903720" cy="658368"/>
           </a:xfrm>
           <a:prstGeom prst="rect">
             <a:avLst>
-              <a:gd name="adj" fmla="val 6818"/>
+              <a:gd name="adj" fmla="val 8333"/>
             </a:avLst>
           </a:prstGeom>
           <a:solidFill>
@@ -21455,18 +22957,18 @@
       </p:sp>
       <p:sp>
         <p:nvSpPr>
-          <p:cNvPr id="36" name="Shape 34"/>
-          <p:cNvSpPr/>
-          <p:nvPr/>
-        </p:nvSpPr>
-        <p:spPr>
-          <a:xfrm>
-            <a:off x="2427732" y="4169664"/>
-            <a:ext cx="685800" cy="384048"/>
+          <p:cNvPr id="39" name="Shape 37"/>
+          <p:cNvSpPr/>
+          <p:nvPr/>
+        </p:nvSpPr>
+        <p:spPr>
+          <a:xfrm>
+            <a:off x="2124837" y="4169664"/>
+            <a:ext cx="685800" cy="475488"/>
           </a:xfrm>
           <a:prstGeom prst="rect">
             <a:avLst>
-              <a:gd name="adj" fmla="val 9524"/>
+              <a:gd name="adj" fmla="val 7692"/>
             </a:avLst>
           </a:prstGeom>
           <a:solidFill>
@@ -21482,14 +22984,14 @@
       </p:sp>
       <p:sp>
         <p:nvSpPr>
-          <p:cNvPr id="37" name="Text 35"/>
-          <p:cNvSpPr/>
-          <p:nvPr/>
-        </p:nvSpPr>
-        <p:spPr>
-          <a:xfrm>
-            <a:off x="2427732" y="4169664"/>
-            <a:ext cx="685800" cy="384048"/>
+          <p:cNvPr id="40" name="Text 38"/>
+          <p:cNvSpPr/>
+          <p:nvPr/>
+        </p:nvSpPr>
+        <p:spPr>
+          <a:xfrm>
+            <a:off x="2124837" y="4169664"/>
+            <a:ext cx="685800" cy="475488"/>
           </a:xfrm>
           <a:prstGeom prst="rect">
             <a:avLst/>
@@ -21513,7 +23015,7 @@
                 <a:ea typeface="Trebuchet MS" pitchFamily="34" charset="-122"/>
                 <a:cs typeface="Trebuchet MS" pitchFamily="34" charset="-120"/>
               </a:rPr>
-              <a:t>o</a:t>
+              <a:t>u</a:t>
             </a:r>
             <a:endParaRPr lang="en-US" sz="900" dirty="0"/>
           </a:p>
@@ -21521,18 +23023,18 @@
       </p:sp>
       <p:sp>
         <p:nvSpPr>
-          <p:cNvPr id="38" name="Shape 36"/>
-          <p:cNvSpPr/>
-          <p:nvPr/>
-        </p:nvSpPr>
-        <p:spPr>
-          <a:xfrm>
-            <a:off x="3639312" y="4169664"/>
-            <a:ext cx="685800" cy="384048"/>
+          <p:cNvPr id="41" name="Shape 39"/>
+          <p:cNvSpPr/>
+          <p:nvPr/>
+        </p:nvSpPr>
+        <p:spPr>
+          <a:xfrm>
+            <a:off x="3033522" y="4169664"/>
+            <a:ext cx="685800" cy="475488"/>
           </a:xfrm>
           <a:prstGeom prst="rect">
             <a:avLst>
-              <a:gd name="adj" fmla="val 9524"/>
+              <a:gd name="adj" fmla="val 7692"/>
             </a:avLst>
           </a:prstGeom>
           <a:solidFill>
@@ -21548,14 +23050,14 @@
       </p:sp>
       <p:sp>
         <p:nvSpPr>
-          <p:cNvPr id="39" name="Text 37"/>
-          <p:cNvSpPr/>
-          <p:nvPr/>
-        </p:nvSpPr>
-        <p:spPr>
-          <a:xfrm>
-            <a:off x="3639312" y="4169664"/>
-            <a:ext cx="685800" cy="384048"/>
+          <p:cNvPr id="42" name="Text 40"/>
+          <p:cNvSpPr/>
+          <p:nvPr/>
+        </p:nvSpPr>
+        <p:spPr>
+          <a:xfrm>
+            <a:off x="3033522" y="4169664"/>
+            <a:ext cx="685800" cy="475488"/>
           </a:xfrm>
           <a:prstGeom prst="rect">
             <a:avLst/>
@@ -21579,7 +23081,7 @@
                 <a:ea typeface="Trebuchet MS" pitchFamily="34" charset="-122"/>
                 <a:cs typeface="Trebuchet MS" pitchFamily="34" charset="-120"/>
               </a:rPr>
-              <a:t>v</a:t>
+              <a:t>n</a:t>
             </a:r>
             <a:endParaRPr lang="en-US" sz="900" dirty="0"/>
           </a:p>
@@ -21587,18 +23089,18 @@
       </p:sp>
       <p:sp>
         <p:nvSpPr>
-          <p:cNvPr id="40" name="Shape 38"/>
-          <p:cNvSpPr/>
-          <p:nvPr/>
-        </p:nvSpPr>
-        <p:spPr>
-          <a:xfrm>
-            <a:off x="4850892" y="4169664"/>
-            <a:ext cx="685800" cy="384048"/>
+          <p:cNvPr id="43" name="Shape 41"/>
+          <p:cNvSpPr/>
+          <p:nvPr/>
+        </p:nvSpPr>
+        <p:spPr>
+          <a:xfrm>
+            <a:off x="3942207" y="4169664"/>
+            <a:ext cx="685800" cy="475488"/>
           </a:xfrm>
           <a:prstGeom prst="rect">
             <a:avLst>
-              <a:gd name="adj" fmla="val 9524"/>
+              <a:gd name="adj" fmla="val 7692"/>
             </a:avLst>
           </a:prstGeom>
           <a:solidFill>
@@ -21614,14 +23116,14 @@
       </p:sp>
       <p:sp>
         <p:nvSpPr>
-          <p:cNvPr id="41" name="Text 39"/>
-          <p:cNvSpPr/>
-          <p:nvPr/>
-        </p:nvSpPr>
-        <p:spPr>
-          <a:xfrm>
-            <a:off x="4850892" y="4169664"/>
-            <a:ext cx="685800" cy="384048"/>
+          <p:cNvPr id="44" name="Text 42"/>
+          <p:cNvSpPr/>
+          <p:nvPr/>
+        </p:nvSpPr>
+        <p:spPr>
+          <a:xfrm>
+            <a:off x="3942207" y="4169664"/>
+            <a:ext cx="685800" cy="475488"/>
           </a:xfrm>
           <a:prstGeom prst="rect">
             <a:avLst/>
@@ -21645,7 +23147,7 @@
                 <a:ea typeface="Trebuchet MS" pitchFamily="34" charset="-122"/>
                 <a:cs typeface="Trebuchet MS" pitchFamily="34" charset="-120"/>
               </a:rPr>
-              <a:t>er</a:t>
+              <a:t>d</a:t>
             </a:r>
             <a:endParaRPr lang="en-US" sz="900" dirty="0"/>
           </a:p>
@@ -21653,18 +23155,18 @@
       </p:sp>
       <p:sp>
         <p:nvSpPr>
-          <p:cNvPr id="42" name="Shape 40"/>
-          <p:cNvSpPr/>
-          <p:nvPr/>
-        </p:nvSpPr>
-        <p:spPr>
-          <a:xfrm>
-            <a:off x="6062472" y="4169664"/>
-            <a:ext cx="685800" cy="384048"/>
+          <p:cNvPr id="45" name="Shape 43"/>
+          <p:cNvSpPr/>
+          <p:nvPr/>
+        </p:nvSpPr>
+        <p:spPr>
+          <a:xfrm>
+            <a:off x="4850892" y="4169664"/>
+            <a:ext cx="685800" cy="475488"/>
           </a:xfrm>
           <a:prstGeom prst="rect">
             <a:avLst>
-              <a:gd name="adj" fmla="val 9524"/>
+              <a:gd name="adj" fmla="val 7692"/>
             </a:avLst>
           </a:prstGeom>
           <a:solidFill>
@@ -21680,14 +23182,14 @@
       </p:sp>
       <p:sp>
         <p:nvSpPr>
-          <p:cNvPr id="43" name="Text 41"/>
-          <p:cNvSpPr/>
-          <p:nvPr/>
-        </p:nvSpPr>
-        <p:spPr>
-          <a:xfrm>
-            <a:off x="6062472" y="4169664"/>
-            <a:ext cx="685800" cy="384048"/>
+          <p:cNvPr id="46" name="Text 44"/>
+          <p:cNvSpPr/>
+          <p:nvPr/>
+        </p:nvSpPr>
+        <p:spPr>
+          <a:xfrm>
+            <a:off x="4850892" y="4169664"/>
+            <a:ext cx="685800" cy="475488"/>
           </a:xfrm>
           <a:prstGeom prst="rect">
             <a:avLst/>
@@ -21711,7 +23213,7 @@
                 <a:ea typeface="Trebuchet MS" pitchFamily="34" charset="-122"/>
                 <a:cs typeface="Trebuchet MS" pitchFamily="34" charset="-120"/>
               </a:rPr>
-              <a:t>u</a:t>
+              <a:t>er</a:t>
             </a:r>
             <a:endParaRPr lang="en-US" sz="900" dirty="0"/>
           </a:p>
@@ -21719,18 +23221,18 @@
       </p:sp>
       <p:sp>
         <p:nvSpPr>
-          <p:cNvPr id="44" name="Shape 42"/>
-          <p:cNvSpPr/>
-          <p:nvPr/>
-        </p:nvSpPr>
-        <p:spPr>
-          <a:xfrm>
-            <a:off x="7274052" y="4169664"/>
-            <a:ext cx="685800" cy="384048"/>
+          <p:cNvPr id="47" name="Shape 45"/>
+          <p:cNvSpPr/>
+          <p:nvPr/>
+        </p:nvSpPr>
+        <p:spPr>
+          <a:xfrm>
+            <a:off x="5759577" y="4169664"/>
+            <a:ext cx="685800" cy="475488"/>
           </a:xfrm>
           <a:prstGeom prst="rect">
             <a:avLst>
-              <a:gd name="adj" fmla="val 9524"/>
+              <a:gd name="adj" fmla="val 7692"/>
             </a:avLst>
           </a:prstGeom>
           <a:solidFill>
@@ -21746,14 +23248,14 @@
       </p:sp>
       <p:sp>
         <p:nvSpPr>
-          <p:cNvPr id="45" name="Text 43"/>
-          <p:cNvSpPr/>
-          <p:nvPr/>
-        </p:nvSpPr>
-        <p:spPr>
-          <a:xfrm>
-            <a:off x="7274052" y="4169664"/>
-            <a:ext cx="685800" cy="384048"/>
+          <p:cNvPr id="48" name="Text 46"/>
+          <p:cNvSpPr/>
+          <p:nvPr/>
+        </p:nvSpPr>
+        <p:spPr>
+          <a:xfrm>
+            <a:off x="5759577" y="4169664"/>
+            <a:ext cx="685800" cy="475488"/>
           </a:xfrm>
           <a:prstGeom prst="rect">
             <a:avLst/>
@@ -21777,7 +23279,7 @@
                 <a:ea typeface="Trebuchet MS" pitchFamily="34" charset="-122"/>
                 <a:cs typeface="Trebuchet MS" pitchFamily="34" charset="-120"/>
               </a:rPr>
-              <a:t>se</a:t>
+              <a:t>u_e</a:t>
             </a:r>
             <a:endParaRPr lang="en-US" sz="900" dirty="0"/>
           </a:p>
@@ -21785,40 +23287,133 @@
       </p:sp>
       <p:sp>
         <p:nvSpPr>
-          <p:cNvPr id="46" name="Text 44"/>
-          <p:cNvSpPr/>
-          <p:nvPr/>
-        </p:nvSpPr>
-        <p:spPr>
-          <a:xfrm>
-            <a:off x="7274052" y="4572000"/>
-            <a:ext cx="685800" cy="219456"/>
-          </a:xfrm>
-          <a:prstGeom prst="rect">
-            <a:avLst/>
-          </a:prstGeom>
-          <a:noFill/>
-          <a:ln/>
-        </p:spPr>
-        <p:txBody>
-          <a:bodyPr wrap="square" lIns="0" tIns="0" rIns="0" bIns="0" rtlCol="0" anchor="t"/>
-          <a:lstStyle/>
-          <a:p>
-            <a:pPr algn="ctr" indent="0" marL="0">
-              <a:buNone/>
-            </a:pPr>
-            <a:r>
-              <a:rPr lang="en-US" sz="750" i="1" dirty="0">
-                <a:solidFill>
-                  <a:srgbClr val="94A3B8"/>
-                </a:solidFill>
-                <a:latin typeface="Calibri" pitchFamily="34" charset="0"/>
-                <a:ea typeface="Calibri" pitchFamily="34" charset="-122"/>
-                <a:cs typeface="Calibri" pitchFamily="34" charset="-120"/>
-              </a:rPr>
-              <a:t>/z/</a:t>
-            </a:r>
-            <a:endParaRPr lang="en-US" sz="750" dirty="0"/>
+          <p:cNvPr id="49" name="Shape 47"/>
+          <p:cNvSpPr/>
+          <p:nvPr/>
+        </p:nvSpPr>
+        <p:spPr>
+          <a:xfrm>
+            <a:off x="6668262" y="4169664"/>
+            <a:ext cx="685800" cy="475488"/>
+          </a:xfrm>
+          <a:prstGeom prst="rect">
+            <a:avLst>
+              <a:gd name="adj" fmla="val 7692"/>
+            </a:avLst>
+          </a:prstGeom>
+          <a:solidFill>
+            <a:srgbClr val="FFFFFF"/>
+          </a:solidFill>
+          <a:ln w="12700">
+            <a:solidFill>
+              <a:srgbClr val="DB2777"/>
+            </a:solidFill>
+            <a:prstDash val="solid"/>
+          </a:ln>
+        </p:spPr>
+      </p:sp>
+      <p:sp>
+        <p:nvSpPr>
+          <p:cNvPr id="50" name="Text 48"/>
+          <p:cNvSpPr/>
+          <p:nvPr/>
+        </p:nvSpPr>
+        <p:spPr>
+          <a:xfrm>
+            <a:off x="6668262" y="4169664"/>
+            <a:ext cx="685800" cy="475488"/>
+          </a:xfrm>
+          <a:prstGeom prst="rect">
+            <a:avLst/>
+          </a:prstGeom>
+          <a:noFill/>
+          <a:ln/>
+        </p:spPr>
+        <p:txBody>
+          <a:bodyPr wrap="square" lIns="0" tIns="0" rIns="0" bIns="0" rtlCol="0" anchor="ctr"/>
+          <a:lstStyle/>
+          <a:p>
+            <a:pPr algn="ctr" indent="0" marL="0">
+              <a:buNone/>
+            </a:pPr>
+            <a:r>
+              <a:rPr lang="en-US" sz="900" b="1" dirty="0">
+                <a:solidFill>
+                  <a:srgbClr val="9D174D"/>
+                </a:solidFill>
+                <a:latin typeface="Trebuchet MS" pitchFamily="34" charset="0"/>
+                <a:ea typeface="Trebuchet MS" pitchFamily="34" charset="-122"/>
+                <a:cs typeface="Trebuchet MS" pitchFamily="34" charset="-120"/>
+              </a:rPr>
+              <a:t>s</a:t>
+            </a:r>
+            <a:endParaRPr lang="en-US" sz="900" dirty="0"/>
+          </a:p>
+        </p:txBody>
+      </p:sp>
+      <p:sp>
+        <p:nvSpPr>
+          <p:cNvPr id="51" name="Shape 49"/>
+          <p:cNvSpPr/>
+          <p:nvPr/>
+        </p:nvSpPr>
+        <p:spPr>
+          <a:xfrm>
+            <a:off x="7576947" y="4169664"/>
+            <a:ext cx="685800" cy="475488"/>
+          </a:xfrm>
+          <a:prstGeom prst="rect">
+            <a:avLst>
+              <a:gd name="adj" fmla="val 7692"/>
+            </a:avLst>
+          </a:prstGeom>
+          <a:solidFill>
+            <a:srgbClr val="FFFFFF"/>
+          </a:solidFill>
+          <a:ln w="12700">
+            <a:solidFill>
+              <a:srgbClr val="DB2777"/>
+            </a:solidFill>
+            <a:prstDash val="solid"/>
+          </a:ln>
+        </p:spPr>
+      </p:sp>
+      <p:sp>
+        <p:nvSpPr>
+          <p:cNvPr id="52" name="Text 50"/>
+          <p:cNvSpPr/>
+          <p:nvPr/>
+        </p:nvSpPr>
+        <p:spPr>
+          <a:xfrm>
+            <a:off x="7576947" y="4169664"/>
+            <a:ext cx="685800" cy="475488"/>
+          </a:xfrm>
+          <a:prstGeom prst="rect">
+            <a:avLst/>
+          </a:prstGeom>
+          <a:noFill/>
+          <a:ln/>
+        </p:spPr>
+        <p:txBody>
+          <a:bodyPr wrap="square" lIns="0" tIns="0" rIns="0" bIns="0" rtlCol="0" anchor="ctr"/>
+          <a:lstStyle/>
+          <a:p>
+            <a:pPr algn="ctr" indent="0" marL="0">
+              <a:buNone/>
+            </a:pPr>
+            <a:r>
+              <a:rPr lang="en-US" sz="900" b="1" dirty="0">
+                <a:solidFill>
+                  <a:srgbClr val="9D174D"/>
+                </a:solidFill>
+                <a:latin typeface="Trebuchet MS" pitchFamily="34" charset="0"/>
+                <a:ea typeface="Trebuchet MS" pitchFamily="34" charset="-122"/>
+                <a:cs typeface="Trebuchet MS" pitchFamily="34" charset="-120"/>
+              </a:rPr>
+              <a:t>d</a:t>
+            </a:r>
+            <a:endParaRPr lang="en-US" sz="900" dirty="0"/>
           </a:p>
         </p:txBody>
       </p:sp>
@@ -22108,7 +23703,7 @@
                 <a:ea typeface="Calibri" pitchFamily="34" charset="-122"/>
                 <a:cs typeface="Calibri" pitchFamily="34" charset="-120"/>
               </a:rPr>
-              <a:t>Word Labs  •  wordlabs.app  •  Root: 'use' = to employ or utilise</a:t>
+              <a:t>Word Labs  •  wordlabs.app  •  Root: 'use' = do something with</a:t>
             </a:r>
             <a:endParaRPr lang="en-US" sz="800" dirty="0"/>
           </a:p>
@@ -22247,7 +23842,7 @@
                 <a:ea typeface="Trebuchet MS" pitchFamily="34" charset="-122"/>
                 <a:cs typeface="Trebuchet MS" pitchFamily="34" charset="-120"/>
               </a:rPr>
-              <a:t>useless</a:t>
+              <a:t>usage</a:t>
             </a:r>
             <a:endParaRPr lang="en-US" sz="2800" dirty="0"/>
           </a:p>
@@ -22935,7 +24530,7 @@
                 <a:ea typeface="Calibri" pitchFamily="34" charset="-122"/>
                 <a:cs typeface="Calibri" pitchFamily="34" charset="-120"/>
               </a:rPr>
-              <a:t>Word Labs  •  wordlabs.app  •  Root: 'use' = to employ or utilise</a:t>
+              <a:t>Word Labs  •  wordlabs.app  •  Root: 'use' = do something with</a:t>
             </a:r>
             <a:endParaRPr lang="en-US" sz="800" dirty="0"/>
           </a:p>
@@ -23074,7 +24669,7 @@
                 <a:ea typeface="Trebuchet MS" pitchFamily="34" charset="-122"/>
                 <a:cs typeface="Trebuchet MS" pitchFamily="34" charset="-120"/>
               </a:rPr>
-              <a:t>useless</a:t>
+              <a:t>usage</a:t>
             </a:r>
             <a:endParaRPr lang="en-US" sz="2800" dirty="0"/>
           </a:p>
@@ -23252,7 +24847,7 @@
                 <a:ea typeface="Calibri" pitchFamily="34" charset="-122"/>
                 <a:cs typeface="Calibri" pitchFamily="34" charset="-120"/>
               </a:rPr>
-              <a:t>to employ or utilise</a:t>
+              <a:t>do something with</a:t>
             </a:r>
             <a:endParaRPr lang="en-US" sz="850" dirty="0"/>
           </a:p>
@@ -23275,11 +24870,11 @@
             </a:avLst>
           </a:prstGeom>
           <a:solidFill>
-            <a:srgbClr val="DDD6FE"/>
+            <a:srgbClr val="FCE7F3"/>
           </a:solidFill>
           <a:ln w="19050">
             <a:solidFill>
-              <a:srgbClr val="7C3AED"/>
+              <a:srgbClr val="DB2777"/>
             </a:solidFill>
             <a:prstDash val="solid"/>
           </a:ln>
@@ -23319,13 +24914,13 @@
             <a:r>
               <a:rPr lang="en-US" sz="1300" b="1" dirty="0">
                 <a:solidFill>
-                  <a:srgbClr val="4C1D95"/>
+                  <a:srgbClr val="9D174D"/>
                 </a:solidFill>
                 <a:latin typeface="Trebuchet MS" pitchFamily="34" charset="0"/>
                 <a:ea typeface="Trebuchet MS" pitchFamily="34" charset="-122"/>
                 <a:cs typeface="Trebuchet MS" pitchFamily="34" charset="-120"/>
               </a:rPr>
-              <a:t>less</a:t>
+              <a:t>age</a:t>
             </a:r>
             <a:endParaRPr lang="en-US" sz="1300" dirty="0"/>
           </a:p>
@@ -23364,7 +24959,7 @@
                 <a:ea typeface="Calibri" pitchFamily="34" charset="-122"/>
                 <a:cs typeface="Calibri" pitchFamily="34" charset="-120"/>
               </a:rPr>
-              <a:t>without, lacking</a:t>
+              <a:t>result of; state of</a:t>
             </a:r>
             <a:endParaRPr lang="en-US" sz="850" dirty="0"/>
           </a:p>
@@ -23920,7 +25515,7 @@
                 <a:ea typeface="Calibri" pitchFamily="34" charset="-122"/>
                 <a:cs typeface="Calibri" pitchFamily="34" charset="-120"/>
               </a:rPr>
-              <a:t>Word Labs  •  wordlabs.app  •  Root: 'use' = to employ or utilise</a:t>
+              <a:t>Word Labs  •  wordlabs.app  •  Root: 'use' = do something with</a:t>
             </a:r>
             <a:endParaRPr lang="en-US" sz="800" dirty="0"/>
           </a:p>
@@ -23993,7 +25588,7 @@
                 <a:ea typeface="Trebuchet MS" pitchFamily="34" charset="-122"/>
                 <a:cs typeface="Trebuchet MS" pitchFamily="34" charset="-120"/>
               </a:rPr>
-              <a:t>We are learning that the root 'use' means 'to employ or utilise'.</a:t>
+              <a:t>We are learning that the root 'use' means 'do something with'.</a:t>
             </a:r>
             <a:endParaRPr lang="en-US" sz="2000" dirty="0"/>
           </a:p>
@@ -24639,7 +26234,7 @@
                 <a:ea typeface="Calibri" pitchFamily="34" charset="-122"/>
                 <a:cs typeface="Calibri" pitchFamily="34" charset="-120"/>
               </a:rPr>
-              <a:t>Word Labs  •  wordlabs.app  •  Root: 'use' = to employ or utilise</a:t>
+              <a:t>Word Labs  •  wordlabs.app  •  Root: 'use' = do something with</a:t>
             </a:r>
             <a:endParaRPr lang="en-US" sz="800" dirty="0"/>
           </a:p>
@@ -24778,7 +26373,7 @@
                 <a:ea typeface="Trebuchet MS" pitchFamily="34" charset="-122"/>
                 <a:cs typeface="Trebuchet MS" pitchFamily="34" charset="-120"/>
               </a:rPr>
-              <a:t>useless</a:t>
+              <a:t>usage</a:t>
             </a:r>
             <a:endParaRPr lang="en-US" sz="2800" dirty="0"/>
           </a:p>
@@ -24956,7 +26551,7 @@
                 <a:ea typeface="Calibri" pitchFamily="34" charset="-122"/>
                 <a:cs typeface="Calibri" pitchFamily="34" charset="-120"/>
               </a:rPr>
-              <a:t>to employ or utilise</a:t>
+              <a:t>do something with</a:t>
             </a:r>
             <a:endParaRPr lang="en-US" sz="850" dirty="0"/>
           </a:p>
@@ -24979,11 +26574,11 @@
             </a:avLst>
           </a:prstGeom>
           <a:solidFill>
-            <a:srgbClr val="DDD6FE"/>
+            <a:srgbClr val="FCE7F3"/>
           </a:solidFill>
           <a:ln w="19050">
             <a:solidFill>
-              <a:srgbClr val="7C3AED"/>
+              <a:srgbClr val="DB2777"/>
             </a:solidFill>
             <a:prstDash val="solid"/>
           </a:ln>
@@ -25023,13 +26618,13 @@
             <a:r>
               <a:rPr lang="en-US" sz="1300" b="1" dirty="0">
                 <a:solidFill>
-                  <a:srgbClr val="4C1D95"/>
+                  <a:srgbClr val="9D174D"/>
                 </a:solidFill>
                 <a:latin typeface="Trebuchet MS" pitchFamily="34" charset="0"/>
                 <a:ea typeface="Trebuchet MS" pitchFamily="34" charset="-122"/>
                 <a:cs typeface="Trebuchet MS" pitchFamily="34" charset="-120"/>
               </a:rPr>
-              <a:t>less</a:t>
+              <a:t>age</a:t>
             </a:r>
             <a:endParaRPr lang="en-US" sz="1300" dirty="0"/>
           </a:p>
@@ -25068,7 +26663,7 @@
                 <a:ea typeface="Calibri" pitchFamily="34" charset="-122"/>
                 <a:cs typeface="Calibri" pitchFamily="34" charset="-120"/>
               </a:rPr>
-              <a:t>without, lacking</a:t>
+              <a:t>result of; state of</a:t>
             </a:r>
             <a:endParaRPr lang="en-US" sz="850" dirty="0"/>
           </a:p>
@@ -25227,7 +26822,7 @@
                 <a:ea typeface="Trebuchet MS" pitchFamily="34" charset="-122"/>
                 <a:cs typeface="Trebuchet MS" pitchFamily="34" charset="-120"/>
               </a:rPr>
-              <a:t>use</a:t>
+              <a:t>us</a:t>
             </a:r>
             <a:endParaRPr lang="en-US" sz="1400" dirty="0"/>
           </a:p>
@@ -25332,7 +26927,7 @@
                 <a:ea typeface="Trebuchet MS" pitchFamily="34" charset="-122"/>
                 <a:cs typeface="Trebuchet MS" pitchFamily="34" charset="-120"/>
               </a:rPr>
-              <a:t>less</a:t>
+              <a:t>age</a:t>
             </a:r>
             <a:endParaRPr lang="en-US" sz="1400" dirty="0"/>
           </a:p>
@@ -25756,7 +27351,7 @@
                 <a:ea typeface="Calibri" pitchFamily="34" charset="-122"/>
                 <a:cs typeface="Calibri" pitchFamily="34" charset="-120"/>
               </a:rPr>
-              <a:t>Word Labs  •  wordlabs.app  •  Root: 'use' = to employ or utilise</a:t>
+              <a:t>Word Labs  •  wordlabs.app  •  Root: 'use' = do something with</a:t>
             </a:r>
             <a:endParaRPr lang="en-US" sz="800" dirty="0"/>
           </a:p>
@@ -25895,7 +27490,7 @@
                 <a:ea typeface="Trebuchet MS" pitchFamily="34" charset="-122"/>
                 <a:cs typeface="Trebuchet MS" pitchFamily="34" charset="-120"/>
               </a:rPr>
-              <a:t>useless</a:t>
+              <a:t>usage</a:t>
             </a:r>
             <a:endParaRPr lang="en-US" sz="2800" dirty="0"/>
           </a:p>
@@ -26073,7 +27668,7 @@
                 <a:ea typeface="Calibri" pitchFamily="34" charset="-122"/>
                 <a:cs typeface="Calibri" pitchFamily="34" charset="-120"/>
               </a:rPr>
-              <a:t>to employ or utilise</a:t>
+              <a:t>do something with</a:t>
             </a:r>
             <a:endParaRPr lang="en-US" sz="850" dirty="0"/>
           </a:p>
@@ -26096,11 +27691,11 @@
             </a:avLst>
           </a:prstGeom>
           <a:solidFill>
-            <a:srgbClr val="DDD6FE"/>
+            <a:srgbClr val="FCE7F3"/>
           </a:solidFill>
           <a:ln w="19050">
             <a:solidFill>
-              <a:srgbClr val="7C3AED"/>
+              <a:srgbClr val="DB2777"/>
             </a:solidFill>
             <a:prstDash val="solid"/>
           </a:ln>
@@ -26140,13 +27735,13 @@
             <a:r>
               <a:rPr lang="en-US" sz="1300" b="1" dirty="0">
                 <a:solidFill>
-                  <a:srgbClr val="4C1D95"/>
+                  <a:srgbClr val="9D174D"/>
                 </a:solidFill>
                 <a:latin typeface="Trebuchet MS" pitchFamily="34" charset="0"/>
                 <a:ea typeface="Trebuchet MS" pitchFamily="34" charset="-122"/>
                 <a:cs typeface="Trebuchet MS" pitchFamily="34" charset="-120"/>
               </a:rPr>
-              <a:t>less</a:t>
+              <a:t>age</a:t>
             </a:r>
             <a:endParaRPr lang="en-US" sz="1300" dirty="0"/>
           </a:p>
@@ -26185,7 +27780,7 @@
                 <a:ea typeface="Calibri" pitchFamily="34" charset="-122"/>
                 <a:cs typeface="Calibri" pitchFamily="34" charset="-120"/>
               </a:rPr>
-              <a:t>without, lacking</a:t>
+              <a:t>result of; state of</a:t>
             </a:r>
             <a:endParaRPr lang="en-US" sz="850" dirty="0"/>
           </a:p>
@@ -26344,7 +27939,7 @@
                 <a:ea typeface="Trebuchet MS" pitchFamily="34" charset="-122"/>
                 <a:cs typeface="Trebuchet MS" pitchFamily="34" charset="-120"/>
               </a:rPr>
-              <a:t>use</a:t>
+              <a:t>us</a:t>
             </a:r>
             <a:endParaRPr lang="en-US" sz="1400" dirty="0"/>
           </a:p>
@@ -26449,7 +28044,7 @@
                 <a:ea typeface="Trebuchet MS" pitchFamily="34" charset="-122"/>
                 <a:cs typeface="Trebuchet MS" pitchFamily="34" charset="-120"/>
               </a:rPr>
-              <a:t>less</a:t>
+              <a:t>age</a:t>
             </a:r>
             <a:endParaRPr lang="en-US" sz="1400" dirty="0"/>
           </a:p>
@@ -26530,11 +28125,11 @@
         <p:spPr>
           <a:xfrm>
             <a:off x="1874520" y="4096512"/>
-            <a:ext cx="6903720" cy="804672"/>
+            <a:ext cx="6903720" cy="658368"/>
           </a:xfrm>
           <a:prstGeom prst="rect">
             <a:avLst>
-              <a:gd name="adj" fmla="val 6818"/>
+              <a:gd name="adj" fmla="val 8333"/>
             </a:avLst>
           </a:prstGeom>
           <a:solidFill>
@@ -26556,12 +28151,12 @@
         </p:nvSpPr>
         <p:spPr>
           <a:xfrm>
-            <a:off x="2427732" y="4169664"/>
-            <a:ext cx="685800" cy="384048"/>
+            <a:off x="3033522" y="4169664"/>
+            <a:ext cx="685800" cy="475488"/>
           </a:xfrm>
           <a:prstGeom prst="rect">
             <a:avLst>
-              <a:gd name="adj" fmla="val 9524"/>
+              <a:gd name="adj" fmla="val 7692"/>
             </a:avLst>
           </a:prstGeom>
           <a:solidFill>
@@ -26583,24 +28178,24 @@
         </p:nvSpPr>
         <p:spPr>
           <a:xfrm>
-            <a:off x="2427732" y="4169664"/>
-            <a:ext cx="685800" cy="384048"/>
-          </a:xfrm>
-          <a:prstGeom prst="rect">
-            <a:avLst/>
-          </a:prstGeom>
-          <a:noFill/>
-          <a:ln/>
-        </p:spPr>
-        <p:txBody>
-          <a:bodyPr wrap="square" lIns="0" tIns="0" rIns="0" bIns="0" rtlCol="0" anchor="ctr"/>
-          <a:lstStyle/>
-          <a:p>
-            <a:pPr algn="ctr" indent="0" marL="0">
-              <a:buNone/>
-            </a:pPr>
-            <a:r>
-              <a:rPr lang="en-US" sz="900" b="1" dirty="0">
+            <a:off x="3033522" y="4169664"/>
+            <a:ext cx="685800" cy="475488"/>
+          </a:xfrm>
+          <a:prstGeom prst="rect">
+            <a:avLst/>
+          </a:prstGeom>
+          <a:noFill/>
+          <a:ln/>
+        </p:spPr>
+        <p:txBody>
+          <a:bodyPr wrap="square" lIns="0" tIns="0" rIns="0" bIns="0" rtlCol="0" anchor="ctr"/>
+          <a:lstStyle/>
+          <a:p>
+            <a:pPr algn="ctr" indent="0" marL="0">
+              <a:buNone/>
+            </a:pPr>
+            <a:r>
+              <a:rPr lang="en-US" sz="1000" b="1" dirty="0">
                 <a:solidFill>
                   <a:srgbClr val="9D174D"/>
                 </a:solidFill>
@@ -26610,7 +28205,7 @@
               </a:rPr>
               <a:t>u</a:t>
             </a:r>
-            <a:endParaRPr lang="en-US" sz="900" dirty="0"/>
+            <a:endParaRPr lang="en-US" sz="1000" dirty="0"/>
           </a:p>
         </p:txBody>
       </p:sp>
@@ -26622,12 +28217,12 @@
         </p:nvSpPr>
         <p:spPr>
           <a:xfrm>
-            <a:off x="3639312" y="4169664"/>
-            <a:ext cx="685800" cy="384048"/>
+            <a:off x="4850892" y="4169664"/>
+            <a:ext cx="685800" cy="475488"/>
           </a:xfrm>
           <a:prstGeom prst="rect">
             <a:avLst>
-              <a:gd name="adj" fmla="val 9524"/>
+              <a:gd name="adj" fmla="val 7692"/>
             </a:avLst>
           </a:prstGeom>
           <a:solidFill>
@@ -26649,24 +28244,24 @@
         </p:nvSpPr>
         <p:spPr>
           <a:xfrm>
-            <a:off x="3639312" y="4169664"/>
-            <a:ext cx="685800" cy="384048"/>
-          </a:xfrm>
-          <a:prstGeom prst="rect">
-            <a:avLst/>
-          </a:prstGeom>
-          <a:noFill/>
-          <a:ln/>
-        </p:spPr>
-        <p:txBody>
-          <a:bodyPr wrap="square" lIns="0" tIns="0" rIns="0" bIns="0" rtlCol="0" anchor="ctr"/>
-          <a:lstStyle/>
-          <a:p>
-            <a:pPr algn="ctr" indent="0" marL="0">
-              <a:buNone/>
-            </a:pPr>
-            <a:r>
-              <a:rPr lang="en-US" sz="900" b="1" dirty="0">
+            <a:off x="4850892" y="4169664"/>
+            <a:ext cx="685800" cy="475488"/>
+          </a:xfrm>
+          <a:prstGeom prst="rect">
+            <a:avLst/>
+          </a:prstGeom>
+          <a:noFill/>
+          <a:ln/>
+        </p:spPr>
+        <p:txBody>
+          <a:bodyPr wrap="square" lIns="0" tIns="0" rIns="0" bIns="0" rtlCol="0" anchor="ctr"/>
+          <a:lstStyle/>
+          <a:p>
+            <a:pPr algn="ctr" indent="0" marL="0">
+              <a:buNone/>
+            </a:pPr>
+            <a:r>
+              <a:rPr lang="en-US" sz="1000" b="1" dirty="0">
                 <a:solidFill>
                   <a:srgbClr val="9D174D"/>
                 </a:solidFill>
@@ -26674,65 +28269,26 @@
                 <a:ea typeface="Trebuchet MS" pitchFamily="34" charset="-122"/>
                 <a:cs typeface="Trebuchet MS" pitchFamily="34" charset="-120"/>
               </a:rPr>
-              <a:t>se</a:t>
-            </a:r>
-            <a:endParaRPr lang="en-US" sz="900" dirty="0"/>
-          </a:p>
-        </p:txBody>
-      </p:sp>
-      <p:sp>
-        <p:nvSpPr>
-          <p:cNvPr id="37" name="Text 35"/>
-          <p:cNvSpPr/>
-          <p:nvPr/>
-        </p:nvSpPr>
-        <p:spPr>
-          <a:xfrm>
-            <a:off x="3639312" y="4572000"/>
-            <a:ext cx="685800" cy="219456"/>
-          </a:xfrm>
-          <a:prstGeom prst="rect">
-            <a:avLst/>
-          </a:prstGeom>
-          <a:noFill/>
-          <a:ln/>
-        </p:spPr>
-        <p:txBody>
-          <a:bodyPr wrap="square" lIns="0" tIns="0" rIns="0" bIns="0" rtlCol="0" anchor="t"/>
-          <a:lstStyle/>
-          <a:p>
-            <a:pPr algn="ctr" indent="0" marL="0">
-              <a:buNone/>
-            </a:pPr>
-            <a:r>
-              <a:rPr lang="en-US" sz="750" i="1" dirty="0">
-                <a:solidFill>
-                  <a:srgbClr val="94A3B8"/>
-                </a:solidFill>
-                <a:latin typeface="Calibri" pitchFamily="34" charset="0"/>
-                <a:ea typeface="Calibri" pitchFamily="34" charset="-122"/>
-                <a:cs typeface="Calibri" pitchFamily="34" charset="-120"/>
-              </a:rPr>
-              <a:t>/z/</a:t>
-            </a:r>
-            <a:endParaRPr lang="en-US" sz="750" dirty="0"/>
-          </a:p>
-        </p:txBody>
-      </p:sp>
-      <p:sp>
-        <p:nvSpPr>
-          <p:cNvPr id="38" name="Shape 36"/>
-          <p:cNvSpPr/>
-          <p:nvPr/>
-        </p:nvSpPr>
-        <p:spPr>
-          <a:xfrm>
-            <a:off x="4850892" y="4169664"/>
-            <a:ext cx="685800" cy="384048"/>
+              <a:t>s</a:t>
+            </a:r>
+            <a:endParaRPr lang="en-US" sz="1000" dirty="0"/>
+          </a:p>
+        </p:txBody>
+      </p:sp>
+      <p:sp>
+        <p:nvSpPr>
+          <p:cNvPr id="37" name="Shape 35"/>
+          <p:cNvSpPr/>
+          <p:nvPr/>
+        </p:nvSpPr>
+        <p:spPr>
+          <a:xfrm>
+            <a:off x="6668262" y="4169664"/>
+            <a:ext cx="685800" cy="475488"/>
           </a:xfrm>
           <a:prstGeom prst="rect">
             <a:avLst>
-              <a:gd name="adj" fmla="val 9524"/>
+              <a:gd name="adj" fmla="val 7692"/>
             </a:avLst>
           </a:prstGeom>
           <a:solidFill>
@@ -26748,30 +28304,30 @@
       </p:sp>
       <p:sp>
         <p:nvSpPr>
-          <p:cNvPr id="39" name="Text 37"/>
-          <p:cNvSpPr/>
-          <p:nvPr/>
-        </p:nvSpPr>
-        <p:spPr>
-          <a:xfrm>
-            <a:off x="4850892" y="4169664"/>
-            <a:ext cx="685800" cy="384048"/>
-          </a:xfrm>
-          <a:prstGeom prst="rect">
-            <a:avLst/>
-          </a:prstGeom>
-          <a:noFill/>
-          <a:ln/>
-        </p:spPr>
-        <p:txBody>
-          <a:bodyPr wrap="square" lIns="0" tIns="0" rIns="0" bIns="0" rtlCol="0" anchor="ctr"/>
-          <a:lstStyle/>
-          <a:p>
-            <a:pPr algn="ctr" indent="0" marL="0">
-              <a:buNone/>
-            </a:pPr>
-            <a:r>
-              <a:rPr lang="en-US" sz="900" b="1" dirty="0">
+          <p:cNvPr id="38" name="Text 36"/>
+          <p:cNvSpPr/>
+          <p:nvPr/>
+        </p:nvSpPr>
+        <p:spPr>
+          <a:xfrm>
+            <a:off x="6668262" y="4169664"/>
+            <a:ext cx="685800" cy="475488"/>
+          </a:xfrm>
+          <a:prstGeom prst="rect">
+            <a:avLst/>
+          </a:prstGeom>
+          <a:noFill/>
+          <a:ln/>
+        </p:spPr>
+        <p:txBody>
+          <a:bodyPr wrap="square" lIns="0" tIns="0" rIns="0" bIns="0" rtlCol="0" anchor="ctr"/>
+          <a:lstStyle/>
+          <a:p>
+            <a:pPr algn="ctr" indent="0" marL="0">
+              <a:buNone/>
+            </a:pPr>
+            <a:r>
+              <a:rPr lang="en-US" sz="1000" b="1" dirty="0">
                 <a:solidFill>
                   <a:srgbClr val="9D174D"/>
                 </a:solidFill>
@@ -26779,141 +28335,9 @@
                 <a:ea typeface="Trebuchet MS" pitchFamily="34" charset="-122"/>
                 <a:cs typeface="Trebuchet MS" pitchFamily="34" charset="-120"/>
               </a:rPr>
-              <a:t>l</a:t>
-            </a:r>
-            <a:endParaRPr lang="en-US" sz="900" dirty="0"/>
-          </a:p>
-        </p:txBody>
-      </p:sp>
-      <p:sp>
-        <p:nvSpPr>
-          <p:cNvPr id="40" name="Shape 38"/>
-          <p:cNvSpPr/>
-          <p:nvPr/>
-        </p:nvSpPr>
-        <p:spPr>
-          <a:xfrm>
-            <a:off x="6062472" y="4169664"/>
-            <a:ext cx="685800" cy="384048"/>
-          </a:xfrm>
-          <a:prstGeom prst="rect">
-            <a:avLst>
-              <a:gd name="adj" fmla="val 9524"/>
-            </a:avLst>
-          </a:prstGeom>
-          <a:solidFill>
-            <a:srgbClr val="FFFFFF"/>
-          </a:solidFill>
-          <a:ln w="12700">
-            <a:solidFill>
-              <a:srgbClr val="DB2777"/>
-            </a:solidFill>
-            <a:prstDash val="solid"/>
-          </a:ln>
-        </p:spPr>
-      </p:sp>
-      <p:sp>
-        <p:nvSpPr>
-          <p:cNvPr id="41" name="Text 39"/>
-          <p:cNvSpPr/>
-          <p:nvPr/>
-        </p:nvSpPr>
-        <p:spPr>
-          <a:xfrm>
-            <a:off x="6062472" y="4169664"/>
-            <a:ext cx="685800" cy="384048"/>
-          </a:xfrm>
-          <a:prstGeom prst="rect">
-            <a:avLst/>
-          </a:prstGeom>
-          <a:noFill/>
-          <a:ln/>
-        </p:spPr>
-        <p:txBody>
-          <a:bodyPr wrap="square" lIns="0" tIns="0" rIns="0" bIns="0" rtlCol="0" anchor="ctr"/>
-          <a:lstStyle/>
-          <a:p>
-            <a:pPr algn="ctr" indent="0" marL="0">
-              <a:buNone/>
-            </a:pPr>
-            <a:r>
-              <a:rPr lang="en-US" sz="900" b="1" dirty="0">
-                <a:solidFill>
-                  <a:srgbClr val="9D174D"/>
-                </a:solidFill>
-                <a:latin typeface="Trebuchet MS" pitchFamily="34" charset="0"/>
-                <a:ea typeface="Trebuchet MS" pitchFamily="34" charset="-122"/>
-                <a:cs typeface="Trebuchet MS" pitchFamily="34" charset="-120"/>
-              </a:rPr>
-              <a:t>e</a:t>
-            </a:r>
-            <a:endParaRPr lang="en-US" sz="900" dirty="0"/>
-          </a:p>
-        </p:txBody>
-      </p:sp>
-      <p:sp>
-        <p:nvSpPr>
-          <p:cNvPr id="42" name="Shape 40"/>
-          <p:cNvSpPr/>
-          <p:nvPr/>
-        </p:nvSpPr>
-        <p:spPr>
-          <a:xfrm>
-            <a:off x="7274052" y="4169664"/>
-            <a:ext cx="685800" cy="384048"/>
-          </a:xfrm>
-          <a:prstGeom prst="rect">
-            <a:avLst>
-              <a:gd name="adj" fmla="val 9524"/>
-            </a:avLst>
-          </a:prstGeom>
-          <a:solidFill>
-            <a:srgbClr val="FFFFFF"/>
-          </a:solidFill>
-          <a:ln w="12700">
-            <a:solidFill>
-              <a:srgbClr val="DB2777"/>
-            </a:solidFill>
-            <a:prstDash val="solid"/>
-          </a:ln>
-        </p:spPr>
-      </p:sp>
-      <p:sp>
-        <p:nvSpPr>
-          <p:cNvPr id="43" name="Text 41"/>
-          <p:cNvSpPr/>
-          <p:nvPr/>
-        </p:nvSpPr>
-        <p:spPr>
-          <a:xfrm>
-            <a:off x="7274052" y="4169664"/>
-            <a:ext cx="685800" cy="384048"/>
-          </a:xfrm>
-          <a:prstGeom prst="rect">
-            <a:avLst/>
-          </a:prstGeom>
-          <a:noFill/>
-          <a:ln/>
-        </p:spPr>
-        <p:txBody>
-          <a:bodyPr wrap="square" lIns="0" tIns="0" rIns="0" bIns="0" rtlCol="0" anchor="ctr"/>
-          <a:lstStyle/>
-          <a:p>
-            <a:pPr algn="ctr" indent="0" marL="0">
-              <a:buNone/>
-            </a:pPr>
-            <a:r>
-              <a:rPr lang="en-US" sz="900" b="1" dirty="0">
-                <a:solidFill>
-                  <a:srgbClr val="9D174D"/>
-                </a:solidFill>
-                <a:latin typeface="Trebuchet MS" pitchFamily="34" charset="0"/>
-                <a:ea typeface="Trebuchet MS" pitchFamily="34" charset="-122"/>
-                <a:cs typeface="Trebuchet MS" pitchFamily="34" charset="-120"/>
-              </a:rPr>
-              <a:t>ss</a:t>
-            </a:r>
-            <a:endParaRPr lang="en-US" sz="900" dirty="0"/>
+              <a:t>age</a:t>
+            </a:r>
+            <a:endParaRPr lang="en-US" sz="1000" dirty="0"/>
           </a:p>
         </p:txBody>
       </p:sp>
@@ -27203,7 +28627,7 @@
                 <a:ea typeface="Calibri" pitchFamily="34" charset="-122"/>
                 <a:cs typeface="Calibri" pitchFamily="34" charset="-120"/>
               </a:rPr>
-              <a:t>Word Labs  •  wordlabs.app  •  Root: 'use' = to employ or utilise</a:t>
+              <a:t>Word Labs  •  wordlabs.app  •  Root: 'use' = do something with</a:t>
             </a:r>
             <a:endParaRPr lang="en-US" sz="800" dirty="0"/>
           </a:p>
@@ -27342,7 +28766,7 @@
                 <a:ea typeface="Trebuchet MS" pitchFamily="34" charset="-122"/>
                 <a:cs typeface="Trebuchet MS" pitchFamily="34" charset="-120"/>
               </a:rPr>
-              <a:t>misuse</a:t>
+              <a:t>useable</a:t>
             </a:r>
             <a:endParaRPr lang="en-US" sz="2800" dirty="0"/>
           </a:p>
@@ -28030,7 +29454,7 @@
                 <a:ea typeface="Calibri" pitchFamily="34" charset="-122"/>
                 <a:cs typeface="Calibri" pitchFamily="34" charset="-120"/>
               </a:rPr>
-              <a:t>Word Labs  •  wordlabs.app  •  Root: 'use' = to employ or utilise</a:t>
+              <a:t>Word Labs  •  wordlabs.app  •  Root: 'use' = do something with</a:t>
             </a:r>
             <a:endParaRPr lang="en-US" sz="800" dirty="0"/>
           </a:p>
@@ -28169,7 +29593,7 @@
                 <a:ea typeface="Trebuchet MS" pitchFamily="34" charset="-122"/>
                 <a:cs typeface="Trebuchet MS" pitchFamily="34" charset="-120"/>
               </a:rPr>
-              <a:t>misuse</a:t>
+              <a:t>useable</a:t>
             </a:r>
             <a:endParaRPr lang="en-US" sz="2800" dirty="0"/>
           </a:p>
@@ -28249,7 +29673,7 @@
         </p:nvSpPr>
         <p:spPr>
           <a:xfrm>
-            <a:off x="2938272" y="2258568"/>
+            <a:off x="2221992" y="2258568"/>
             <a:ext cx="1828800" cy="292608"/>
           </a:xfrm>
           <a:prstGeom prst="rect">
@@ -28258,11 +29682,11 @@
             </a:avLst>
           </a:prstGeom>
           <a:solidFill>
-            <a:srgbClr val="DDD6FE"/>
+            <a:srgbClr val="CCFBF1"/>
           </a:solidFill>
           <a:ln w="19050">
             <a:solidFill>
-              <a:srgbClr val="7C3AED"/>
+              <a:srgbClr val="0D9488"/>
             </a:solidFill>
             <a:prstDash val="solid"/>
           </a:ln>
@@ -28283,7 +29707,7 @@
         </p:nvSpPr>
         <p:spPr>
           <a:xfrm>
-            <a:off x="2938272" y="2258568"/>
+            <a:off x="2221992" y="2258568"/>
             <a:ext cx="1828800" cy="292608"/>
           </a:xfrm>
           <a:prstGeom prst="rect">
@@ -28302,13 +29726,13 @@
             <a:r>
               <a:rPr lang="en-US" sz="1300" b="1" dirty="0">
                 <a:solidFill>
-                  <a:srgbClr val="4C1D95"/>
+                  <a:srgbClr val="0F766E"/>
                 </a:solidFill>
                 <a:latin typeface="Trebuchet MS" pitchFamily="34" charset="0"/>
                 <a:ea typeface="Trebuchet MS" pitchFamily="34" charset="-122"/>
                 <a:cs typeface="Trebuchet MS" pitchFamily="34" charset="-120"/>
               </a:rPr>
-              <a:t>mis</a:t>
+              <a:t>use</a:t>
             </a:r>
             <a:endParaRPr lang="en-US" sz="1300" dirty="0"/>
           </a:p>
@@ -28322,7 +29746,7 @@
         </p:nvSpPr>
         <p:spPr>
           <a:xfrm>
-            <a:off x="2938272" y="2569464"/>
+            <a:off x="2221992" y="2569464"/>
             <a:ext cx="1828800" cy="201168"/>
           </a:xfrm>
           <a:prstGeom prst="rect">
@@ -28347,7 +29771,7 @@
                 <a:ea typeface="Calibri" pitchFamily="34" charset="-122"/>
                 <a:cs typeface="Calibri" pitchFamily="34" charset="-120"/>
               </a:rPr>
-              <a:t>wrongly, badly</a:t>
+              <a:t>do something with</a:t>
             </a:r>
             <a:endParaRPr lang="en-US" sz="850" dirty="0"/>
           </a:p>
@@ -28361,7 +29785,7 @@
         </p:nvSpPr>
         <p:spPr>
           <a:xfrm>
-            <a:off x="5803392" y="2258568"/>
+            <a:off x="4370832" y="2258568"/>
             <a:ext cx="1828800" cy="292608"/>
           </a:xfrm>
           <a:prstGeom prst="rect">
@@ -28370,11 +29794,11 @@
             </a:avLst>
           </a:prstGeom>
           <a:solidFill>
-            <a:srgbClr val="CCFBF1"/>
+            <a:srgbClr val="FCE7F3"/>
           </a:solidFill>
           <a:ln w="19050">
             <a:solidFill>
-              <a:srgbClr val="0D9488"/>
+              <a:srgbClr val="DB2777"/>
             </a:solidFill>
             <a:prstDash val="solid"/>
           </a:ln>
@@ -28395,7 +29819,7 @@
         </p:nvSpPr>
         <p:spPr>
           <a:xfrm>
-            <a:off x="5803392" y="2258568"/>
+            <a:off x="4370832" y="2258568"/>
             <a:ext cx="1828800" cy="292608"/>
           </a:xfrm>
           <a:prstGeom prst="rect">
@@ -28414,13 +29838,13 @@
             <a:r>
               <a:rPr lang="en-US" sz="1300" b="1" dirty="0">
                 <a:solidFill>
-                  <a:srgbClr val="0F766E"/>
+                  <a:srgbClr val="9D174D"/>
                 </a:solidFill>
                 <a:latin typeface="Trebuchet MS" pitchFamily="34" charset="0"/>
                 <a:ea typeface="Trebuchet MS" pitchFamily="34" charset="-122"/>
                 <a:cs typeface="Trebuchet MS" pitchFamily="34" charset="-120"/>
               </a:rPr>
-              <a:t>use</a:t>
+              <a:t>ee</a:t>
             </a:r>
             <a:endParaRPr lang="en-US" sz="1300" dirty="0"/>
           </a:p>
@@ -28434,7 +29858,7 @@
         </p:nvSpPr>
         <p:spPr>
           <a:xfrm>
-            <a:off x="5803392" y="2569464"/>
+            <a:off x="4370832" y="2569464"/>
             <a:ext cx="1828800" cy="201168"/>
           </a:xfrm>
           <a:prstGeom prst="rect">
@@ -28459,7 +29883,7 @@
                 <a:ea typeface="Calibri" pitchFamily="34" charset="-122"/>
                 <a:cs typeface="Calibri" pitchFamily="34" charset="-120"/>
               </a:rPr>
-              <a:t>to employ or utilise</a:t>
+              <a:t>person who receives</a:t>
             </a:r>
             <a:endParaRPr lang="en-US" sz="850" dirty="0"/>
           </a:p>
@@ -28468,6 +29892,118 @@
       <p:sp>
         <p:nvSpPr>
           <p:cNvPr id="22" name="Shape 20"/>
+          <p:cNvSpPr/>
+          <p:nvPr/>
+        </p:nvSpPr>
+        <p:spPr>
+          <a:xfrm>
+            <a:off x="6519672" y="2258568"/>
+            <a:ext cx="1828800" cy="292608"/>
+          </a:xfrm>
+          <a:prstGeom prst="rect">
+            <a:avLst>
+              <a:gd name="adj" fmla="val 25000"/>
+            </a:avLst>
+          </a:prstGeom>
+          <a:solidFill>
+            <a:srgbClr val="FCE7F3"/>
+          </a:solidFill>
+          <a:ln w="19050">
+            <a:solidFill>
+              <a:srgbClr val="DB2777"/>
+            </a:solidFill>
+            <a:prstDash val="solid"/>
+          </a:ln>
+          <a:effectLst>
+            <a:outerShdw sx="100000" sy="100000" kx="0" ky="0" algn="bl" rotWithShape="0" blurRad="101600" dist="38100" dir="8100000">
+              <a:srgbClr val="000000">
+                <a:alpha val="12000"/>
+              </a:srgbClr>
+            </a:outerShdw>
+          </a:effectLst>
+        </p:spPr>
+      </p:sp>
+      <p:sp>
+        <p:nvSpPr>
+          <p:cNvPr id="23" name="Text 21"/>
+          <p:cNvSpPr/>
+          <p:nvPr/>
+        </p:nvSpPr>
+        <p:spPr>
+          <a:xfrm>
+            <a:off x="6519672" y="2258568"/>
+            <a:ext cx="1828800" cy="292608"/>
+          </a:xfrm>
+          <a:prstGeom prst="rect">
+            <a:avLst/>
+          </a:prstGeom>
+          <a:noFill/>
+          <a:ln/>
+        </p:spPr>
+        <p:txBody>
+          <a:bodyPr wrap="square" lIns="0" tIns="0" rIns="0" bIns="0" rtlCol="0" anchor="ctr"/>
+          <a:lstStyle/>
+          <a:p>
+            <a:pPr algn="ctr" indent="0" marL="0">
+              <a:buNone/>
+            </a:pPr>
+            <a:r>
+              <a:rPr lang="en-US" sz="1300" b="1" dirty="0">
+                <a:solidFill>
+                  <a:srgbClr val="9D174D"/>
+                </a:solidFill>
+                <a:latin typeface="Trebuchet MS" pitchFamily="34" charset="0"/>
+                <a:ea typeface="Trebuchet MS" pitchFamily="34" charset="-122"/>
+                <a:cs typeface="Trebuchet MS" pitchFamily="34" charset="-120"/>
+              </a:rPr>
+              <a:t>able</a:t>
+            </a:r>
+            <a:endParaRPr lang="en-US" sz="1300" dirty="0"/>
+          </a:p>
+        </p:txBody>
+      </p:sp>
+      <p:sp>
+        <p:nvSpPr>
+          <p:cNvPr id="24" name="Text 22"/>
+          <p:cNvSpPr/>
+          <p:nvPr/>
+        </p:nvSpPr>
+        <p:spPr>
+          <a:xfrm>
+            <a:off x="6519672" y="2569464"/>
+            <a:ext cx="1828800" cy="201168"/>
+          </a:xfrm>
+          <a:prstGeom prst="rect">
+            <a:avLst/>
+          </a:prstGeom>
+          <a:noFill/>
+          <a:ln/>
+        </p:spPr>
+        <p:txBody>
+          <a:bodyPr wrap="square" lIns="0" tIns="0" rIns="0" bIns="0" rtlCol="0" anchor="t"/>
+          <a:lstStyle/>
+          <a:p>
+            <a:pPr algn="ctr" indent="0" marL="0">
+              <a:buNone/>
+            </a:pPr>
+            <a:r>
+              <a:rPr lang="en-US" sz="850" dirty="0">
+                <a:solidFill>
+                  <a:srgbClr val="475569"/>
+                </a:solidFill>
+                <a:latin typeface="Calibri" pitchFamily="34" charset="0"/>
+                <a:ea typeface="Calibri" pitchFamily="34" charset="-122"/>
+                <a:cs typeface="Calibri" pitchFamily="34" charset="-120"/>
+              </a:rPr>
+              <a:t>able to</a:t>
+            </a:r>
+            <a:endParaRPr lang="en-US" sz="850" dirty="0"/>
+          </a:p>
+        </p:txBody>
+      </p:sp>
+      <p:sp>
+        <p:nvSpPr>
+          <p:cNvPr id="25" name="Shape 23"/>
           <p:cNvSpPr/>
           <p:nvPr/>
         </p:nvSpPr>
@@ -28494,7 +30030,7 @@
       </p:sp>
       <p:sp>
         <p:nvSpPr>
-          <p:cNvPr id="23" name="Text 21"/>
+          <p:cNvPr id="26" name="Text 24"/>
           <p:cNvSpPr/>
           <p:nvPr/>
         </p:nvSpPr>
@@ -28533,7 +30069,7 @@
       </p:sp>
       <p:sp>
         <p:nvSpPr>
-          <p:cNvPr id="24" name="Shape 22"/>
+          <p:cNvPr id="27" name="Shape 25"/>
           <p:cNvSpPr/>
           <p:nvPr/>
         </p:nvSpPr>
@@ -28560,7 +30096,7 @@
       </p:sp>
       <p:sp>
         <p:nvSpPr>
-          <p:cNvPr id="25" name="Text 23"/>
+          <p:cNvPr id="28" name="Text 26"/>
           <p:cNvSpPr/>
           <p:nvPr/>
         </p:nvSpPr>
@@ -28599,7 +30135,7 @@
       </p:sp>
       <p:sp>
         <p:nvSpPr>
-          <p:cNvPr id="26" name="Shape 24"/>
+          <p:cNvPr id="29" name="Shape 27"/>
           <p:cNvSpPr/>
           <p:nvPr/>
         </p:nvSpPr>
@@ -28626,7 +30162,7 @@
       </p:sp>
       <p:sp>
         <p:nvSpPr>
-          <p:cNvPr id="27" name="Text 25"/>
+          <p:cNvPr id="30" name="Text 28"/>
           <p:cNvSpPr/>
           <p:nvPr/>
         </p:nvSpPr>
@@ -28665,7 +30201,7 @@
       </p:sp>
       <p:sp>
         <p:nvSpPr>
-          <p:cNvPr id="28" name="Shape 26"/>
+          <p:cNvPr id="31" name="Shape 29"/>
           <p:cNvSpPr/>
           <p:nvPr/>
         </p:nvSpPr>
@@ -28692,7 +30228,7 @@
       </p:sp>
       <p:sp>
         <p:nvSpPr>
-          <p:cNvPr id="29" name="Text 27"/>
+          <p:cNvPr id="32" name="Text 30"/>
           <p:cNvSpPr/>
           <p:nvPr/>
         </p:nvSpPr>
@@ -29015,7 +30551,7 @@
                 <a:ea typeface="Calibri" pitchFamily="34" charset="-122"/>
                 <a:cs typeface="Calibri" pitchFamily="34" charset="-120"/>
               </a:rPr>
-              <a:t>Word Labs  •  wordlabs.app  •  Root: 'use' = to employ or utilise</a:t>
+              <a:t>Word Labs  •  wordlabs.app  •  Root: 'use' = do something with</a:t>
             </a:r>
             <a:endParaRPr lang="en-US" sz="800" dirty="0"/>
           </a:p>
@@ -29154,7 +30690,7 @@
                 <a:ea typeface="Trebuchet MS" pitchFamily="34" charset="-122"/>
                 <a:cs typeface="Trebuchet MS" pitchFamily="34" charset="-120"/>
               </a:rPr>
-              <a:t>misuse</a:t>
+              <a:t>useable</a:t>
             </a:r>
             <a:endParaRPr lang="en-US" sz="2800" dirty="0"/>
           </a:p>
@@ -29234,7 +30770,7 @@
         </p:nvSpPr>
         <p:spPr>
           <a:xfrm>
-            <a:off x="2938272" y="2258568"/>
+            <a:off x="2221992" y="2258568"/>
             <a:ext cx="1828800" cy="292608"/>
           </a:xfrm>
           <a:prstGeom prst="rect">
@@ -29243,11 +30779,11 @@
             </a:avLst>
           </a:prstGeom>
           <a:solidFill>
-            <a:srgbClr val="DDD6FE"/>
+            <a:srgbClr val="CCFBF1"/>
           </a:solidFill>
           <a:ln w="19050">
             <a:solidFill>
-              <a:srgbClr val="7C3AED"/>
+              <a:srgbClr val="0D9488"/>
             </a:solidFill>
             <a:prstDash val="solid"/>
           </a:ln>
@@ -29268,7 +30804,7 @@
         </p:nvSpPr>
         <p:spPr>
           <a:xfrm>
-            <a:off x="2938272" y="2258568"/>
+            <a:off x="2221992" y="2258568"/>
             <a:ext cx="1828800" cy="292608"/>
           </a:xfrm>
           <a:prstGeom prst="rect">
@@ -29287,13 +30823,13 @@
             <a:r>
               <a:rPr lang="en-US" sz="1300" b="1" dirty="0">
                 <a:solidFill>
-                  <a:srgbClr val="4C1D95"/>
+                  <a:srgbClr val="0F766E"/>
                 </a:solidFill>
                 <a:latin typeface="Trebuchet MS" pitchFamily="34" charset="0"/>
                 <a:ea typeface="Trebuchet MS" pitchFamily="34" charset="-122"/>
                 <a:cs typeface="Trebuchet MS" pitchFamily="34" charset="-120"/>
               </a:rPr>
-              <a:t>mis</a:t>
+              <a:t>use</a:t>
             </a:r>
             <a:endParaRPr lang="en-US" sz="1300" dirty="0"/>
           </a:p>
@@ -29307,7 +30843,7 @@
         </p:nvSpPr>
         <p:spPr>
           <a:xfrm>
-            <a:off x="2938272" y="2569464"/>
+            <a:off x="2221992" y="2569464"/>
             <a:ext cx="1828800" cy="201168"/>
           </a:xfrm>
           <a:prstGeom prst="rect">
@@ -29332,7 +30868,7 @@
                 <a:ea typeface="Calibri" pitchFamily="34" charset="-122"/>
                 <a:cs typeface="Calibri" pitchFamily="34" charset="-120"/>
               </a:rPr>
-              <a:t>wrongly, badly</a:t>
+              <a:t>do something with</a:t>
             </a:r>
             <a:endParaRPr lang="en-US" sz="850" dirty="0"/>
           </a:p>
@@ -29346,7 +30882,7 @@
         </p:nvSpPr>
         <p:spPr>
           <a:xfrm>
-            <a:off x="5803392" y="2258568"/>
+            <a:off x="4370832" y="2258568"/>
             <a:ext cx="1828800" cy="292608"/>
           </a:xfrm>
           <a:prstGeom prst="rect">
@@ -29355,11 +30891,11 @@
             </a:avLst>
           </a:prstGeom>
           <a:solidFill>
-            <a:srgbClr val="CCFBF1"/>
+            <a:srgbClr val="FCE7F3"/>
           </a:solidFill>
           <a:ln w="19050">
             <a:solidFill>
-              <a:srgbClr val="0D9488"/>
+              <a:srgbClr val="DB2777"/>
             </a:solidFill>
             <a:prstDash val="solid"/>
           </a:ln>
@@ -29380,7 +30916,7 @@
         </p:nvSpPr>
         <p:spPr>
           <a:xfrm>
-            <a:off x="5803392" y="2258568"/>
+            <a:off x="4370832" y="2258568"/>
             <a:ext cx="1828800" cy="292608"/>
           </a:xfrm>
           <a:prstGeom prst="rect">
@@ -29399,13 +30935,13 @@
             <a:r>
               <a:rPr lang="en-US" sz="1300" b="1" dirty="0">
                 <a:solidFill>
-                  <a:srgbClr val="0F766E"/>
+                  <a:srgbClr val="9D174D"/>
                 </a:solidFill>
                 <a:latin typeface="Trebuchet MS" pitchFamily="34" charset="0"/>
                 <a:ea typeface="Trebuchet MS" pitchFamily="34" charset="-122"/>
                 <a:cs typeface="Trebuchet MS" pitchFamily="34" charset="-120"/>
               </a:rPr>
-              <a:t>use</a:t>
+              <a:t>ee</a:t>
             </a:r>
             <a:endParaRPr lang="en-US" sz="1300" dirty="0"/>
           </a:p>
@@ -29419,7 +30955,7 @@
         </p:nvSpPr>
         <p:spPr>
           <a:xfrm>
-            <a:off x="5803392" y="2569464"/>
+            <a:off x="4370832" y="2569464"/>
             <a:ext cx="1828800" cy="201168"/>
           </a:xfrm>
           <a:prstGeom prst="rect">
@@ -29444,7 +30980,7 @@
                 <a:ea typeface="Calibri" pitchFamily="34" charset="-122"/>
                 <a:cs typeface="Calibri" pitchFamily="34" charset="-120"/>
               </a:rPr>
-              <a:t>to employ or utilise</a:t>
+              <a:t>person who receives</a:t>
             </a:r>
             <a:endParaRPr lang="en-US" sz="850" dirty="0"/>
           </a:p>
@@ -29453,6 +30989,118 @@
       <p:sp>
         <p:nvSpPr>
           <p:cNvPr id="22" name="Shape 20"/>
+          <p:cNvSpPr/>
+          <p:nvPr/>
+        </p:nvSpPr>
+        <p:spPr>
+          <a:xfrm>
+            <a:off x="6519672" y="2258568"/>
+            <a:ext cx="1828800" cy="292608"/>
+          </a:xfrm>
+          <a:prstGeom prst="rect">
+            <a:avLst>
+              <a:gd name="adj" fmla="val 25000"/>
+            </a:avLst>
+          </a:prstGeom>
+          <a:solidFill>
+            <a:srgbClr val="FCE7F3"/>
+          </a:solidFill>
+          <a:ln w="19050">
+            <a:solidFill>
+              <a:srgbClr val="DB2777"/>
+            </a:solidFill>
+            <a:prstDash val="solid"/>
+          </a:ln>
+          <a:effectLst>
+            <a:outerShdw sx="100000" sy="100000" kx="0" ky="0" algn="bl" rotWithShape="0" blurRad="101600" dist="38100" dir="8100000">
+              <a:srgbClr val="000000">
+                <a:alpha val="12000"/>
+              </a:srgbClr>
+            </a:outerShdw>
+          </a:effectLst>
+        </p:spPr>
+      </p:sp>
+      <p:sp>
+        <p:nvSpPr>
+          <p:cNvPr id="23" name="Text 21"/>
+          <p:cNvSpPr/>
+          <p:nvPr/>
+        </p:nvSpPr>
+        <p:spPr>
+          <a:xfrm>
+            <a:off x="6519672" y="2258568"/>
+            <a:ext cx="1828800" cy="292608"/>
+          </a:xfrm>
+          <a:prstGeom prst="rect">
+            <a:avLst/>
+          </a:prstGeom>
+          <a:noFill/>
+          <a:ln/>
+        </p:spPr>
+        <p:txBody>
+          <a:bodyPr wrap="square" lIns="0" tIns="0" rIns="0" bIns="0" rtlCol="0" anchor="ctr"/>
+          <a:lstStyle/>
+          <a:p>
+            <a:pPr algn="ctr" indent="0" marL="0">
+              <a:buNone/>
+            </a:pPr>
+            <a:r>
+              <a:rPr lang="en-US" sz="1300" b="1" dirty="0">
+                <a:solidFill>
+                  <a:srgbClr val="9D174D"/>
+                </a:solidFill>
+                <a:latin typeface="Trebuchet MS" pitchFamily="34" charset="0"/>
+                <a:ea typeface="Trebuchet MS" pitchFamily="34" charset="-122"/>
+                <a:cs typeface="Trebuchet MS" pitchFamily="34" charset="-120"/>
+              </a:rPr>
+              <a:t>able</a:t>
+            </a:r>
+            <a:endParaRPr lang="en-US" sz="1300" dirty="0"/>
+          </a:p>
+        </p:txBody>
+      </p:sp>
+      <p:sp>
+        <p:nvSpPr>
+          <p:cNvPr id="24" name="Text 22"/>
+          <p:cNvSpPr/>
+          <p:nvPr/>
+        </p:nvSpPr>
+        <p:spPr>
+          <a:xfrm>
+            <a:off x="6519672" y="2569464"/>
+            <a:ext cx="1828800" cy="201168"/>
+          </a:xfrm>
+          <a:prstGeom prst="rect">
+            <a:avLst/>
+          </a:prstGeom>
+          <a:noFill/>
+          <a:ln/>
+        </p:spPr>
+        <p:txBody>
+          <a:bodyPr wrap="square" lIns="0" tIns="0" rIns="0" bIns="0" rtlCol="0" anchor="t"/>
+          <a:lstStyle/>
+          <a:p>
+            <a:pPr algn="ctr" indent="0" marL="0">
+              <a:buNone/>
+            </a:pPr>
+            <a:r>
+              <a:rPr lang="en-US" sz="850" dirty="0">
+                <a:solidFill>
+                  <a:srgbClr val="475569"/>
+                </a:solidFill>
+                <a:latin typeface="Calibri" pitchFamily="34" charset="0"/>
+                <a:ea typeface="Calibri" pitchFamily="34" charset="-122"/>
+                <a:cs typeface="Calibri" pitchFamily="34" charset="-120"/>
+              </a:rPr>
+              <a:t>able to</a:t>
+            </a:r>
+            <a:endParaRPr lang="en-US" sz="850" dirty="0"/>
+          </a:p>
+        </p:txBody>
+      </p:sp>
+      <p:sp>
+        <p:nvSpPr>
+          <p:cNvPr id="25" name="Shape 23"/>
           <p:cNvSpPr/>
           <p:nvPr/>
         </p:nvSpPr>
@@ -29479,7 +31127,7 @@
       </p:sp>
       <p:sp>
         <p:nvSpPr>
-          <p:cNvPr id="23" name="Text 21"/>
+          <p:cNvPr id="26" name="Text 24"/>
           <p:cNvSpPr/>
           <p:nvPr/>
         </p:nvSpPr>
@@ -29518,7 +31166,7 @@
       </p:sp>
       <p:sp>
         <p:nvSpPr>
-          <p:cNvPr id="24" name="Shape 22"/>
+          <p:cNvPr id="27" name="Shape 25"/>
           <p:cNvSpPr/>
           <p:nvPr/>
         </p:nvSpPr>
@@ -29545,13 +31193,13 @@
       </p:sp>
       <p:sp>
         <p:nvSpPr>
-          <p:cNvPr id="25" name="Shape 23"/>
-          <p:cNvSpPr/>
-          <p:nvPr/>
-        </p:nvSpPr>
-        <p:spPr>
-          <a:xfrm>
-            <a:off x="2999232" y="3364992"/>
+          <p:cNvPr id="28" name="Shape 26"/>
+          <p:cNvSpPr/>
+          <p:nvPr/>
+        </p:nvSpPr>
+        <p:spPr>
+          <a:xfrm>
+            <a:off x="2313432" y="3364992"/>
             <a:ext cx="1645920" cy="475488"/>
           </a:xfrm>
           <a:prstGeom prst="rect">
@@ -29572,13 +31220,13 @@
       </p:sp>
       <p:sp>
         <p:nvSpPr>
-          <p:cNvPr id="26" name="Text 24"/>
-          <p:cNvSpPr/>
-          <p:nvPr/>
-        </p:nvSpPr>
-        <p:spPr>
-          <a:xfrm>
-            <a:off x="2999232" y="3364992"/>
+          <p:cNvPr id="29" name="Text 27"/>
+          <p:cNvSpPr/>
+          <p:nvPr/>
+        </p:nvSpPr>
+        <p:spPr>
+          <a:xfrm>
+            <a:off x="2313432" y="3364992"/>
             <a:ext cx="1645920" cy="475488"/>
           </a:xfrm>
           <a:prstGeom prst="rect">
@@ -29603,7 +31251,7 @@
                 <a:ea typeface="Trebuchet MS" pitchFamily="34" charset="-122"/>
                 <a:cs typeface="Trebuchet MS" pitchFamily="34" charset="-120"/>
               </a:rPr>
-              <a:t>mis</a:t>
+              <a:t>use</a:t>
             </a:r>
             <a:endParaRPr lang="en-US" sz="1400" dirty="0"/>
           </a:p>
@@ -29611,14 +31259,14 @@
       </p:sp>
       <p:sp>
         <p:nvSpPr>
-          <p:cNvPr id="27" name="Text 25"/>
-          <p:cNvSpPr/>
-          <p:nvPr/>
-        </p:nvSpPr>
-        <p:spPr>
-          <a:xfrm>
-            <a:off x="4645152" y="3364992"/>
-            <a:ext cx="1097280" cy="475488"/>
+          <p:cNvPr id="30" name="Text 28"/>
+          <p:cNvSpPr/>
+          <p:nvPr/>
+        </p:nvSpPr>
+        <p:spPr>
+          <a:xfrm>
+            <a:off x="3959352" y="3364992"/>
+            <a:ext cx="411480" cy="475488"/>
           </a:xfrm>
           <a:prstGeom prst="rect">
             <a:avLst/>
@@ -29650,13 +31298,13 @@
       </p:sp>
       <p:sp>
         <p:nvSpPr>
-          <p:cNvPr id="28" name="Shape 26"/>
-          <p:cNvSpPr/>
-          <p:nvPr/>
-        </p:nvSpPr>
-        <p:spPr>
-          <a:xfrm>
-            <a:off x="5742432" y="3364992"/>
+          <p:cNvPr id="31" name="Shape 29"/>
+          <p:cNvSpPr/>
+          <p:nvPr/>
+        </p:nvSpPr>
+        <p:spPr>
+          <a:xfrm>
+            <a:off x="4370832" y="3364992"/>
             <a:ext cx="1645920" cy="475488"/>
           </a:xfrm>
           <a:prstGeom prst="rect">
@@ -29677,13 +31325,13 @@
       </p:sp>
       <p:sp>
         <p:nvSpPr>
-          <p:cNvPr id="29" name="Text 27"/>
-          <p:cNvSpPr/>
-          <p:nvPr/>
-        </p:nvSpPr>
-        <p:spPr>
-          <a:xfrm>
-            <a:off x="5742432" y="3364992"/>
+          <p:cNvPr id="32" name="Text 30"/>
+          <p:cNvSpPr/>
+          <p:nvPr/>
+        </p:nvSpPr>
+        <p:spPr>
+          <a:xfrm>
+            <a:off x="4370832" y="3364992"/>
             <a:ext cx="1645920" cy="475488"/>
           </a:xfrm>
           <a:prstGeom prst="rect">
@@ -29708,7 +31356,7 @@
                 <a:ea typeface="Trebuchet MS" pitchFamily="34" charset="-122"/>
                 <a:cs typeface="Trebuchet MS" pitchFamily="34" charset="-120"/>
               </a:rPr>
-              <a:t>use</a:t>
+              <a:t>a</a:t>
             </a:r>
             <a:endParaRPr lang="en-US" sz="1400" dirty="0"/>
           </a:p>
@@ -29716,7 +31364,112 @@
       </p:sp>
       <p:sp>
         <p:nvSpPr>
-          <p:cNvPr id="30" name="Shape 28"/>
+          <p:cNvPr id="33" name="Text 31"/>
+          <p:cNvSpPr/>
+          <p:nvPr/>
+        </p:nvSpPr>
+        <p:spPr>
+          <a:xfrm>
+            <a:off x="6016752" y="3364992"/>
+            <a:ext cx="411480" cy="475488"/>
+          </a:xfrm>
+          <a:prstGeom prst="rect">
+            <a:avLst/>
+          </a:prstGeom>
+          <a:noFill/>
+          <a:ln/>
+        </p:spPr>
+        <p:txBody>
+          <a:bodyPr wrap="square" lIns="0" tIns="0" rIns="0" bIns="0" rtlCol="0" anchor="ctr"/>
+          <a:lstStyle/>
+          <a:p>
+            <a:pPr algn="ctr" indent="0" marL="0">
+              <a:buNone/>
+            </a:pPr>
+            <a:r>
+              <a:rPr lang="en-US" sz="1600" b="1" dirty="0">
+                <a:solidFill>
+                  <a:srgbClr val="0D9488"/>
+                </a:solidFill>
+                <a:latin typeface="Trebuchet MS" pitchFamily="34" charset="0"/>
+                <a:ea typeface="Trebuchet MS" pitchFamily="34" charset="-122"/>
+                <a:cs typeface="Trebuchet MS" pitchFamily="34" charset="-120"/>
+              </a:rPr>
+              <a:t>·</a:t>
+            </a:r>
+            <a:endParaRPr lang="en-US" sz="1600" dirty="0"/>
+          </a:p>
+        </p:txBody>
+      </p:sp>
+      <p:sp>
+        <p:nvSpPr>
+          <p:cNvPr id="34" name="Shape 32"/>
+          <p:cNvSpPr/>
+          <p:nvPr/>
+        </p:nvSpPr>
+        <p:spPr>
+          <a:xfrm>
+            <a:off x="6428232" y="3364992"/>
+            <a:ext cx="1645920" cy="475488"/>
+          </a:xfrm>
+          <a:prstGeom prst="rect">
+            <a:avLst>
+              <a:gd name="adj" fmla="val 9615"/>
+            </a:avLst>
+          </a:prstGeom>
+          <a:solidFill>
+            <a:srgbClr val="FFFFFF"/>
+          </a:solidFill>
+          <a:ln w="12700">
+            <a:solidFill>
+              <a:srgbClr val="0D9488"/>
+            </a:solidFill>
+            <a:prstDash val="solid"/>
+          </a:ln>
+        </p:spPr>
+      </p:sp>
+      <p:sp>
+        <p:nvSpPr>
+          <p:cNvPr id="35" name="Text 33"/>
+          <p:cNvSpPr/>
+          <p:nvPr/>
+        </p:nvSpPr>
+        <p:spPr>
+          <a:xfrm>
+            <a:off x="6428232" y="3364992"/>
+            <a:ext cx="1645920" cy="475488"/>
+          </a:xfrm>
+          <a:prstGeom prst="rect">
+            <a:avLst/>
+          </a:prstGeom>
+          <a:noFill/>
+          <a:ln/>
+        </p:spPr>
+        <p:txBody>
+          <a:bodyPr wrap="square" lIns="0" tIns="0" rIns="0" bIns="0" rtlCol="0" anchor="ctr"/>
+          <a:lstStyle/>
+          <a:p>
+            <a:pPr algn="ctr" indent="0" marL="0">
+              <a:buNone/>
+            </a:pPr>
+            <a:r>
+              <a:rPr lang="en-US" sz="1400" b="1" dirty="0">
+                <a:solidFill>
+                  <a:srgbClr val="0D9488"/>
+                </a:solidFill>
+                <a:latin typeface="Trebuchet MS" pitchFamily="34" charset="0"/>
+                <a:ea typeface="Trebuchet MS" pitchFamily="34" charset="-122"/>
+                <a:cs typeface="Trebuchet MS" pitchFamily="34" charset="-120"/>
+              </a:rPr>
+              <a:t>ble</a:t>
+            </a:r>
+            <a:endParaRPr lang="en-US" sz="1400" dirty="0"/>
+          </a:p>
+        </p:txBody>
+      </p:sp>
+      <p:sp>
+        <p:nvSpPr>
+          <p:cNvPr id="36" name="Shape 34"/>
           <p:cNvSpPr/>
           <p:nvPr/>
         </p:nvSpPr>
@@ -29743,7 +31496,7 @@
       </p:sp>
       <p:sp>
         <p:nvSpPr>
-          <p:cNvPr id="31" name="Text 29"/>
+          <p:cNvPr id="37" name="Text 35"/>
           <p:cNvSpPr/>
           <p:nvPr/>
         </p:nvSpPr>
@@ -29782,7 +31535,7 @@
       </p:sp>
       <p:sp>
         <p:nvSpPr>
-          <p:cNvPr id="32" name="Shape 30"/>
+          <p:cNvPr id="38" name="Shape 36"/>
           <p:cNvSpPr/>
           <p:nvPr/>
         </p:nvSpPr>
@@ -29809,7 +31562,7 @@
       </p:sp>
       <p:sp>
         <p:nvSpPr>
-          <p:cNvPr id="33" name="Text 31"/>
+          <p:cNvPr id="39" name="Text 37"/>
           <p:cNvSpPr/>
           <p:nvPr/>
         </p:nvSpPr>
@@ -30132,7 +31885,7 @@
                 <a:ea typeface="Calibri" pitchFamily="34" charset="-122"/>
                 <a:cs typeface="Calibri" pitchFamily="34" charset="-120"/>
               </a:rPr>
-              <a:t>Word Labs  •  wordlabs.app  •  Root: 'use' = to employ or utilise</a:t>
+              <a:t>Word Labs  •  wordlabs.app  •  Root: 'use' = do something with</a:t>
             </a:r>
             <a:endParaRPr lang="en-US" sz="800" dirty="0"/>
           </a:p>
@@ -30271,7 +32024,7 @@
                 <a:ea typeface="Trebuchet MS" pitchFamily="34" charset="-122"/>
                 <a:cs typeface="Trebuchet MS" pitchFamily="34" charset="-120"/>
               </a:rPr>
-              <a:t>misuse</a:t>
+              <a:t>useable</a:t>
             </a:r>
             <a:endParaRPr lang="en-US" sz="2800" dirty="0"/>
           </a:p>
@@ -30351,7 +32104,7 @@
         </p:nvSpPr>
         <p:spPr>
           <a:xfrm>
-            <a:off x="2938272" y="2258568"/>
+            <a:off x="2221992" y="2258568"/>
             <a:ext cx="1828800" cy="292608"/>
           </a:xfrm>
           <a:prstGeom prst="rect">
@@ -30360,11 +32113,11 @@
             </a:avLst>
           </a:prstGeom>
           <a:solidFill>
-            <a:srgbClr val="DDD6FE"/>
+            <a:srgbClr val="CCFBF1"/>
           </a:solidFill>
           <a:ln w="19050">
             <a:solidFill>
-              <a:srgbClr val="7C3AED"/>
+              <a:srgbClr val="0D9488"/>
             </a:solidFill>
             <a:prstDash val="solid"/>
           </a:ln>
@@ -30385,7 +32138,7 @@
         </p:nvSpPr>
         <p:spPr>
           <a:xfrm>
-            <a:off x="2938272" y="2258568"/>
+            <a:off x="2221992" y="2258568"/>
             <a:ext cx="1828800" cy="292608"/>
           </a:xfrm>
           <a:prstGeom prst="rect">
@@ -30404,13 +32157,13 @@
             <a:r>
               <a:rPr lang="en-US" sz="1300" b="1" dirty="0">
                 <a:solidFill>
-                  <a:srgbClr val="4C1D95"/>
+                  <a:srgbClr val="0F766E"/>
                 </a:solidFill>
                 <a:latin typeface="Trebuchet MS" pitchFamily="34" charset="0"/>
                 <a:ea typeface="Trebuchet MS" pitchFamily="34" charset="-122"/>
                 <a:cs typeface="Trebuchet MS" pitchFamily="34" charset="-120"/>
               </a:rPr>
-              <a:t>mis</a:t>
+              <a:t>use</a:t>
             </a:r>
             <a:endParaRPr lang="en-US" sz="1300" dirty="0"/>
           </a:p>
@@ -30424,7 +32177,7 @@
         </p:nvSpPr>
         <p:spPr>
           <a:xfrm>
-            <a:off x="2938272" y="2569464"/>
+            <a:off x="2221992" y="2569464"/>
             <a:ext cx="1828800" cy="201168"/>
           </a:xfrm>
           <a:prstGeom prst="rect">
@@ -30449,7 +32202,7 @@
                 <a:ea typeface="Calibri" pitchFamily="34" charset="-122"/>
                 <a:cs typeface="Calibri" pitchFamily="34" charset="-120"/>
               </a:rPr>
-              <a:t>wrongly, badly</a:t>
+              <a:t>do something with</a:t>
             </a:r>
             <a:endParaRPr lang="en-US" sz="850" dirty="0"/>
           </a:p>
@@ -30463,7 +32216,7 @@
         </p:nvSpPr>
         <p:spPr>
           <a:xfrm>
-            <a:off x="5803392" y="2258568"/>
+            <a:off x="4370832" y="2258568"/>
             <a:ext cx="1828800" cy="292608"/>
           </a:xfrm>
           <a:prstGeom prst="rect">
@@ -30472,11 +32225,11 @@
             </a:avLst>
           </a:prstGeom>
           <a:solidFill>
-            <a:srgbClr val="CCFBF1"/>
+            <a:srgbClr val="FCE7F3"/>
           </a:solidFill>
           <a:ln w="19050">
             <a:solidFill>
-              <a:srgbClr val="0D9488"/>
+              <a:srgbClr val="DB2777"/>
             </a:solidFill>
             <a:prstDash val="solid"/>
           </a:ln>
@@ -30497,7 +32250,7 @@
         </p:nvSpPr>
         <p:spPr>
           <a:xfrm>
-            <a:off x="5803392" y="2258568"/>
+            <a:off x="4370832" y="2258568"/>
             <a:ext cx="1828800" cy="292608"/>
           </a:xfrm>
           <a:prstGeom prst="rect">
@@ -30516,13 +32269,13 @@
             <a:r>
               <a:rPr lang="en-US" sz="1300" b="1" dirty="0">
                 <a:solidFill>
-                  <a:srgbClr val="0F766E"/>
+                  <a:srgbClr val="9D174D"/>
                 </a:solidFill>
                 <a:latin typeface="Trebuchet MS" pitchFamily="34" charset="0"/>
                 <a:ea typeface="Trebuchet MS" pitchFamily="34" charset="-122"/>
                 <a:cs typeface="Trebuchet MS" pitchFamily="34" charset="-120"/>
               </a:rPr>
-              <a:t>use</a:t>
+              <a:t>ee</a:t>
             </a:r>
             <a:endParaRPr lang="en-US" sz="1300" dirty="0"/>
           </a:p>
@@ -30536,7 +32289,7 @@
         </p:nvSpPr>
         <p:spPr>
           <a:xfrm>
-            <a:off x="5803392" y="2569464"/>
+            <a:off x="4370832" y="2569464"/>
             <a:ext cx="1828800" cy="201168"/>
           </a:xfrm>
           <a:prstGeom prst="rect">
@@ -30561,7 +32314,7 @@
                 <a:ea typeface="Calibri" pitchFamily="34" charset="-122"/>
                 <a:cs typeface="Calibri" pitchFamily="34" charset="-120"/>
               </a:rPr>
-              <a:t>to employ or utilise</a:t>
+              <a:t>person who receives</a:t>
             </a:r>
             <a:endParaRPr lang="en-US" sz="850" dirty="0"/>
           </a:p>
@@ -30570,6 +32323,118 @@
       <p:sp>
         <p:nvSpPr>
           <p:cNvPr id="22" name="Shape 20"/>
+          <p:cNvSpPr/>
+          <p:nvPr/>
+        </p:nvSpPr>
+        <p:spPr>
+          <a:xfrm>
+            <a:off x="6519672" y="2258568"/>
+            <a:ext cx="1828800" cy="292608"/>
+          </a:xfrm>
+          <a:prstGeom prst="rect">
+            <a:avLst>
+              <a:gd name="adj" fmla="val 25000"/>
+            </a:avLst>
+          </a:prstGeom>
+          <a:solidFill>
+            <a:srgbClr val="FCE7F3"/>
+          </a:solidFill>
+          <a:ln w="19050">
+            <a:solidFill>
+              <a:srgbClr val="DB2777"/>
+            </a:solidFill>
+            <a:prstDash val="solid"/>
+          </a:ln>
+          <a:effectLst>
+            <a:outerShdw sx="100000" sy="100000" kx="0" ky="0" algn="bl" rotWithShape="0" blurRad="101600" dist="38100" dir="8100000">
+              <a:srgbClr val="000000">
+                <a:alpha val="12000"/>
+              </a:srgbClr>
+            </a:outerShdw>
+          </a:effectLst>
+        </p:spPr>
+      </p:sp>
+      <p:sp>
+        <p:nvSpPr>
+          <p:cNvPr id="23" name="Text 21"/>
+          <p:cNvSpPr/>
+          <p:nvPr/>
+        </p:nvSpPr>
+        <p:spPr>
+          <a:xfrm>
+            <a:off x="6519672" y="2258568"/>
+            <a:ext cx="1828800" cy="292608"/>
+          </a:xfrm>
+          <a:prstGeom prst="rect">
+            <a:avLst/>
+          </a:prstGeom>
+          <a:noFill/>
+          <a:ln/>
+        </p:spPr>
+        <p:txBody>
+          <a:bodyPr wrap="square" lIns="0" tIns="0" rIns="0" bIns="0" rtlCol="0" anchor="ctr"/>
+          <a:lstStyle/>
+          <a:p>
+            <a:pPr algn="ctr" indent="0" marL="0">
+              <a:buNone/>
+            </a:pPr>
+            <a:r>
+              <a:rPr lang="en-US" sz="1300" b="1" dirty="0">
+                <a:solidFill>
+                  <a:srgbClr val="9D174D"/>
+                </a:solidFill>
+                <a:latin typeface="Trebuchet MS" pitchFamily="34" charset="0"/>
+                <a:ea typeface="Trebuchet MS" pitchFamily="34" charset="-122"/>
+                <a:cs typeface="Trebuchet MS" pitchFamily="34" charset="-120"/>
+              </a:rPr>
+              <a:t>able</a:t>
+            </a:r>
+            <a:endParaRPr lang="en-US" sz="1300" dirty="0"/>
+          </a:p>
+        </p:txBody>
+      </p:sp>
+      <p:sp>
+        <p:nvSpPr>
+          <p:cNvPr id="24" name="Text 22"/>
+          <p:cNvSpPr/>
+          <p:nvPr/>
+        </p:nvSpPr>
+        <p:spPr>
+          <a:xfrm>
+            <a:off x="6519672" y="2569464"/>
+            <a:ext cx="1828800" cy="201168"/>
+          </a:xfrm>
+          <a:prstGeom prst="rect">
+            <a:avLst/>
+          </a:prstGeom>
+          <a:noFill/>
+          <a:ln/>
+        </p:spPr>
+        <p:txBody>
+          <a:bodyPr wrap="square" lIns="0" tIns="0" rIns="0" bIns="0" rtlCol="0" anchor="t"/>
+          <a:lstStyle/>
+          <a:p>
+            <a:pPr algn="ctr" indent="0" marL="0">
+              <a:buNone/>
+            </a:pPr>
+            <a:r>
+              <a:rPr lang="en-US" sz="850" dirty="0">
+                <a:solidFill>
+                  <a:srgbClr val="475569"/>
+                </a:solidFill>
+                <a:latin typeface="Calibri" pitchFamily="34" charset="0"/>
+                <a:ea typeface="Calibri" pitchFamily="34" charset="-122"/>
+                <a:cs typeface="Calibri" pitchFamily="34" charset="-120"/>
+              </a:rPr>
+              <a:t>able to</a:t>
+            </a:r>
+            <a:endParaRPr lang="en-US" sz="850" dirty="0"/>
+          </a:p>
+        </p:txBody>
+      </p:sp>
+      <p:sp>
+        <p:nvSpPr>
+          <p:cNvPr id="25" name="Shape 23"/>
           <p:cNvSpPr/>
           <p:nvPr/>
         </p:nvSpPr>
@@ -30596,7 +32461,7 @@
       </p:sp>
       <p:sp>
         <p:nvSpPr>
-          <p:cNvPr id="23" name="Text 21"/>
+          <p:cNvPr id="26" name="Text 24"/>
           <p:cNvSpPr/>
           <p:nvPr/>
         </p:nvSpPr>
@@ -30635,7 +32500,7 @@
       </p:sp>
       <p:sp>
         <p:nvSpPr>
-          <p:cNvPr id="24" name="Shape 22"/>
+          <p:cNvPr id="27" name="Shape 25"/>
           <p:cNvSpPr/>
           <p:nvPr/>
         </p:nvSpPr>
@@ -30662,13 +32527,13 @@
       </p:sp>
       <p:sp>
         <p:nvSpPr>
-          <p:cNvPr id="25" name="Shape 23"/>
-          <p:cNvSpPr/>
-          <p:nvPr/>
-        </p:nvSpPr>
-        <p:spPr>
-          <a:xfrm>
-            <a:off x="2999232" y="3364992"/>
+          <p:cNvPr id="28" name="Shape 26"/>
+          <p:cNvSpPr/>
+          <p:nvPr/>
+        </p:nvSpPr>
+        <p:spPr>
+          <a:xfrm>
+            <a:off x="2313432" y="3364992"/>
             <a:ext cx="1645920" cy="475488"/>
           </a:xfrm>
           <a:prstGeom prst="rect">
@@ -30689,13 +32554,13 @@
       </p:sp>
       <p:sp>
         <p:nvSpPr>
-          <p:cNvPr id="26" name="Text 24"/>
-          <p:cNvSpPr/>
-          <p:nvPr/>
-        </p:nvSpPr>
-        <p:spPr>
-          <a:xfrm>
-            <a:off x="2999232" y="3364992"/>
+          <p:cNvPr id="29" name="Text 27"/>
+          <p:cNvSpPr/>
+          <p:nvPr/>
+        </p:nvSpPr>
+        <p:spPr>
+          <a:xfrm>
+            <a:off x="2313432" y="3364992"/>
             <a:ext cx="1645920" cy="475488"/>
           </a:xfrm>
           <a:prstGeom prst="rect">
@@ -30720,7 +32585,7 @@
                 <a:ea typeface="Trebuchet MS" pitchFamily="34" charset="-122"/>
                 <a:cs typeface="Trebuchet MS" pitchFamily="34" charset="-120"/>
               </a:rPr>
-              <a:t>mis</a:t>
+              <a:t>use</a:t>
             </a:r>
             <a:endParaRPr lang="en-US" sz="1400" dirty="0"/>
           </a:p>
@@ -30728,14 +32593,14 @@
       </p:sp>
       <p:sp>
         <p:nvSpPr>
-          <p:cNvPr id="27" name="Text 25"/>
-          <p:cNvSpPr/>
-          <p:nvPr/>
-        </p:nvSpPr>
-        <p:spPr>
-          <a:xfrm>
-            <a:off x="4645152" y="3364992"/>
-            <a:ext cx="1097280" cy="475488"/>
+          <p:cNvPr id="30" name="Text 28"/>
+          <p:cNvSpPr/>
+          <p:nvPr/>
+        </p:nvSpPr>
+        <p:spPr>
+          <a:xfrm>
+            <a:off x="3959352" y="3364992"/>
+            <a:ext cx="411480" cy="475488"/>
           </a:xfrm>
           <a:prstGeom prst="rect">
             <a:avLst/>
@@ -30767,13 +32632,13 @@
       </p:sp>
       <p:sp>
         <p:nvSpPr>
-          <p:cNvPr id="28" name="Shape 26"/>
-          <p:cNvSpPr/>
-          <p:nvPr/>
-        </p:nvSpPr>
-        <p:spPr>
-          <a:xfrm>
-            <a:off x="5742432" y="3364992"/>
+          <p:cNvPr id="31" name="Shape 29"/>
+          <p:cNvSpPr/>
+          <p:nvPr/>
+        </p:nvSpPr>
+        <p:spPr>
+          <a:xfrm>
+            <a:off x="4370832" y="3364992"/>
             <a:ext cx="1645920" cy="475488"/>
           </a:xfrm>
           <a:prstGeom prst="rect">
@@ -30794,13 +32659,13 @@
       </p:sp>
       <p:sp>
         <p:nvSpPr>
-          <p:cNvPr id="29" name="Text 27"/>
-          <p:cNvSpPr/>
-          <p:nvPr/>
-        </p:nvSpPr>
-        <p:spPr>
-          <a:xfrm>
-            <a:off x="5742432" y="3364992"/>
+          <p:cNvPr id="32" name="Text 30"/>
+          <p:cNvSpPr/>
+          <p:nvPr/>
+        </p:nvSpPr>
+        <p:spPr>
+          <a:xfrm>
+            <a:off x="4370832" y="3364992"/>
             <a:ext cx="1645920" cy="475488"/>
           </a:xfrm>
           <a:prstGeom prst="rect">
@@ -30825,7 +32690,7 @@
                 <a:ea typeface="Trebuchet MS" pitchFamily="34" charset="-122"/>
                 <a:cs typeface="Trebuchet MS" pitchFamily="34" charset="-120"/>
               </a:rPr>
-              <a:t>use</a:t>
+              <a:t>a</a:t>
             </a:r>
             <a:endParaRPr lang="en-US" sz="1400" dirty="0"/>
           </a:p>
@@ -30833,7 +32698,112 @@
       </p:sp>
       <p:sp>
         <p:nvSpPr>
-          <p:cNvPr id="30" name="Shape 28"/>
+          <p:cNvPr id="33" name="Text 31"/>
+          <p:cNvSpPr/>
+          <p:nvPr/>
+        </p:nvSpPr>
+        <p:spPr>
+          <a:xfrm>
+            <a:off x="6016752" y="3364992"/>
+            <a:ext cx="411480" cy="475488"/>
+          </a:xfrm>
+          <a:prstGeom prst="rect">
+            <a:avLst/>
+          </a:prstGeom>
+          <a:noFill/>
+          <a:ln/>
+        </p:spPr>
+        <p:txBody>
+          <a:bodyPr wrap="square" lIns="0" tIns="0" rIns="0" bIns="0" rtlCol="0" anchor="ctr"/>
+          <a:lstStyle/>
+          <a:p>
+            <a:pPr algn="ctr" indent="0" marL="0">
+              <a:buNone/>
+            </a:pPr>
+            <a:r>
+              <a:rPr lang="en-US" sz="1600" b="1" dirty="0">
+                <a:solidFill>
+                  <a:srgbClr val="0D9488"/>
+                </a:solidFill>
+                <a:latin typeface="Trebuchet MS" pitchFamily="34" charset="0"/>
+                <a:ea typeface="Trebuchet MS" pitchFamily="34" charset="-122"/>
+                <a:cs typeface="Trebuchet MS" pitchFamily="34" charset="-120"/>
+              </a:rPr>
+              <a:t>·</a:t>
+            </a:r>
+            <a:endParaRPr lang="en-US" sz="1600" dirty="0"/>
+          </a:p>
+        </p:txBody>
+      </p:sp>
+      <p:sp>
+        <p:nvSpPr>
+          <p:cNvPr id="34" name="Shape 32"/>
+          <p:cNvSpPr/>
+          <p:nvPr/>
+        </p:nvSpPr>
+        <p:spPr>
+          <a:xfrm>
+            <a:off x="6428232" y="3364992"/>
+            <a:ext cx="1645920" cy="475488"/>
+          </a:xfrm>
+          <a:prstGeom prst="rect">
+            <a:avLst>
+              <a:gd name="adj" fmla="val 9615"/>
+            </a:avLst>
+          </a:prstGeom>
+          <a:solidFill>
+            <a:srgbClr val="FFFFFF"/>
+          </a:solidFill>
+          <a:ln w="12700">
+            <a:solidFill>
+              <a:srgbClr val="0D9488"/>
+            </a:solidFill>
+            <a:prstDash val="solid"/>
+          </a:ln>
+        </p:spPr>
+      </p:sp>
+      <p:sp>
+        <p:nvSpPr>
+          <p:cNvPr id="35" name="Text 33"/>
+          <p:cNvSpPr/>
+          <p:nvPr/>
+        </p:nvSpPr>
+        <p:spPr>
+          <a:xfrm>
+            <a:off x="6428232" y="3364992"/>
+            <a:ext cx="1645920" cy="475488"/>
+          </a:xfrm>
+          <a:prstGeom prst="rect">
+            <a:avLst/>
+          </a:prstGeom>
+          <a:noFill/>
+          <a:ln/>
+        </p:spPr>
+        <p:txBody>
+          <a:bodyPr wrap="square" lIns="0" tIns="0" rIns="0" bIns="0" rtlCol="0" anchor="ctr"/>
+          <a:lstStyle/>
+          <a:p>
+            <a:pPr algn="ctr" indent="0" marL="0">
+              <a:buNone/>
+            </a:pPr>
+            <a:r>
+              <a:rPr lang="en-US" sz="1400" b="1" dirty="0">
+                <a:solidFill>
+                  <a:srgbClr val="0D9488"/>
+                </a:solidFill>
+                <a:latin typeface="Trebuchet MS" pitchFamily="34" charset="0"/>
+                <a:ea typeface="Trebuchet MS" pitchFamily="34" charset="-122"/>
+                <a:cs typeface="Trebuchet MS" pitchFamily="34" charset="-120"/>
+              </a:rPr>
+              <a:t>ble</a:t>
+            </a:r>
+            <a:endParaRPr lang="en-US" sz="1400" dirty="0"/>
+          </a:p>
+        </p:txBody>
+      </p:sp>
+      <p:sp>
+        <p:nvSpPr>
+          <p:cNvPr id="36" name="Shape 34"/>
           <p:cNvSpPr/>
           <p:nvPr/>
         </p:nvSpPr>
@@ -30860,7 +32830,7 @@
       </p:sp>
       <p:sp>
         <p:nvSpPr>
-          <p:cNvPr id="31" name="Text 29"/>
+          <p:cNvPr id="37" name="Text 35"/>
           <p:cNvSpPr/>
           <p:nvPr/>
         </p:nvSpPr>
@@ -30899,18 +32869,18 @@
       </p:sp>
       <p:sp>
         <p:nvSpPr>
-          <p:cNvPr id="32" name="Shape 30"/>
+          <p:cNvPr id="38" name="Shape 36"/>
           <p:cNvSpPr/>
           <p:nvPr/>
         </p:nvSpPr>
         <p:spPr>
           <a:xfrm>
             <a:off x="1874520" y="4096512"/>
-            <a:ext cx="6903720" cy="804672"/>
+            <a:ext cx="6903720" cy="658368"/>
           </a:xfrm>
           <a:prstGeom prst="rect">
             <a:avLst>
-              <a:gd name="adj" fmla="val 6818"/>
+              <a:gd name="adj" fmla="val 8333"/>
             </a:avLst>
           </a:prstGeom>
           <a:solidFill>
@@ -30926,18 +32896,18 @@
       </p:sp>
       <p:sp>
         <p:nvSpPr>
-          <p:cNvPr id="33" name="Shape 31"/>
+          <p:cNvPr id="39" name="Shape 37"/>
           <p:cNvSpPr/>
           <p:nvPr/>
         </p:nvSpPr>
         <p:spPr>
           <a:xfrm>
             <a:off x="2427732" y="4169664"/>
-            <a:ext cx="685800" cy="384048"/>
+            <a:ext cx="685800" cy="475488"/>
           </a:xfrm>
           <a:prstGeom prst="rect">
             <a:avLst>
-              <a:gd name="adj" fmla="val 9524"/>
+              <a:gd name="adj" fmla="val 7692"/>
             </a:avLst>
           </a:prstGeom>
           <a:solidFill>
@@ -30953,14 +32923,14 @@
       </p:sp>
       <p:sp>
         <p:nvSpPr>
-          <p:cNvPr id="34" name="Text 32"/>
+          <p:cNvPr id="40" name="Text 38"/>
           <p:cNvSpPr/>
           <p:nvPr/>
         </p:nvSpPr>
         <p:spPr>
           <a:xfrm>
             <a:off x="2427732" y="4169664"/>
-            <a:ext cx="685800" cy="384048"/>
+            <a:ext cx="685800" cy="475488"/>
           </a:xfrm>
           <a:prstGeom prst="rect">
             <a:avLst/>
@@ -30984,7 +32954,7 @@
                 <a:ea typeface="Trebuchet MS" pitchFamily="34" charset="-122"/>
                 <a:cs typeface="Trebuchet MS" pitchFamily="34" charset="-120"/>
               </a:rPr>
-              <a:t>m</a:t>
+              <a:t>u_e</a:t>
             </a:r>
             <a:endParaRPr lang="en-US" sz="900" dirty="0"/>
           </a:p>
@@ -30992,18 +32962,18 @@
       </p:sp>
       <p:sp>
         <p:nvSpPr>
-          <p:cNvPr id="35" name="Shape 33"/>
+          <p:cNvPr id="41" name="Shape 39"/>
           <p:cNvSpPr/>
           <p:nvPr/>
         </p:nvSpPr>
         <p:spPr>
           <a:xfrm>
             <a:off x="3639312" y="4169664"/>
-            <a:ext cx="685800" cy="384048"/>
+            <a:ext cx="685800" cy="475488"/>
           </a:xfrm>
           <a:prstGeom prst="rect">
             <a:avLst>
-              <a:gd name="adj" fmla="val 9524"/>
+              <a:gd name="adj" fmla="val 7692"/>
             </a:avLst>
           </a:prstGeom>
           <a:solidFill>
@@ -31019,14 +32989,14 @@
       </p:sp>
       <p:sp>
         <p:nvSpPr>
-          <p:cNvPr id="36" name="Text 34"/>
+          <p:cNvPr id="42" name="Text 40"/>
           <p:cNvSpPr/>
           <p:nvPr/>
         </p:nvSpPr>
         <p:spPr>
           <a:xfrm>
             <a:off x="3639312" y="4169664"/>
-            <a:ext cx="685800" cy="384048"/>
+            <a:ext cx="685800" cy="475488"/>
           </a:xfrm>
           <a:prstGeom prst="rect">
             <a:avLst/>
@@ -31050,7 +33020,7 @@
                 <a:ea typeface="Trebuchet MS" pitchFamily="34" charset="-122"/>
                 <a:cs typeface="Trebuchet MS" pitchFamily="34" charset="-120"/>
               </a:rPr>
-              <a:t>i</a:t>
+              <a:t>s</a:t>
             </a:r>
             <a:endParaRPr lang="en-US" sz="900" dirty="0"/>
           </a:p>
@@ -31058,18 +33028,18 @@
       </p:sp>
       <p:sp>
         <p:nvSpPr>
-          <p:cNvPr id="37" name="Shape 35"/>
+          <p:cNvPr id="43" name="Shape 41"/>
           <p:cNvSpPr/>
           <p:nvPr/>
         </p:nvSpPr>
         <p:spPr>
           <a:xfrm>
             <a:off x="4850892" y="4169664"/>
-            <a:ext cx="685800" cy="384048"/>
+            <a:ext cx="685800" cy="475488"/>
           </a:xfrm>
           <a:prstGeom prst="rect">
             <a:avLst>
-              <a:gd name="adj" fmla="val 9524"/>
+              <a:gd name="adj" fmla="val 7692"/>
             </a:avLst>
           </a:prstGeom>
           <a:solidFill>
@@ -31085,14 +33055,14 @@
       </p:sp>
       <p:sp>
         <p:nvSpPr>
-          <p:cNvPr id="38" name="Text 36"/>
+          <p:cNvPr id="44" name="Text 42"/>
           <p:cNvSpPr/>
           <p:nvPr/>
         </p:nvSpPr>
         <p:spPr>
           <a:xfrm>
             <a:off x="4850892" y="4169664"/>
-            <a:ext cx="685800" cy="384048"/>
+            <a:ext cx="685800" cy="475488"/>
           </a:xfrm>
           <a:prstGeom prst="rect">
             <a:avLst/>
@@ -31116,7 +33086,7 @@
                 <a:ea typeface="Trebuchet MS" pitchFamily="34" charset="-122"/>
                 <a:cs typeface="Trebuchet MS" pitchFamily="34" charset="-120"/>
               </a:rPr>
-              <a:t>s</a:t>
+              <a:t>a</a:t>
             </a:r>
             <a:endParaRPr lang="en-US" sz="900" dirty="0"/>
           </a:p>
@@ -31124,18 +33094,18 @@
       </p:sp>
       <p:sp>
         <p:nvSpPr>
-          <p:cNvPr id="39" name="Shape 37"/>
+          <p:cNvPr id="45" name="Shape 43"/>
           <p:cNvSpPr/>
           <p:nvPr/>
         </p:nvSpPr>
         <p:spPr>
           <a:xfrm>
             <a:off x="6062472" y="4169664"/>
-            <a:ext cx="685800" cy="384048"/>
+            <a:ext cx="685800" cy="475488"/>
           </a:xfrm>
           <a:prstGeom prst="rect">
             <a:avLst>
-              <a:gd name="adj" fmla="val 9524"/>
+              <a:gd name="adj" fmla="val 7692"/>
             </a:avLst>
           </a:prstGeom>
           <a:solidFill>
@@ -31151,14 +33121,14 @@
       </p:sp>
       <p:sp>
         <p:nvSpPr>
-          <p:cNvPr id="40" name="Text 38"/>
+          <p:cNvPr id="46" name="Text 44"/>
           <p:cNvSpPr/>
           <p:nvPr/>
         </p:nvSpPr>
         <p:spPr>
           <a:xfrm>
             <a:off x="6062472" y="4169664"/>
-            <a:ext cx="685800" cy="384048"/>
+            <a:ext cx="685800" cy="475488"/>
           </a:xfrm>
           <a:prstGeom prst="rect">
             <a:avLst/>
@@ -31182,7 +33152,7 @@
                 <a:ea typeface="Trebuchet MS" pitchFamily="34" charset="-122"/>
                 <a:cs typeface="Trebuchet MS" pitchFamily="34" charset="-120"/>
               </a:rPr>
-              <a:t>u</a:t>
+              <a:t>b</a:t>
             </a:r>
             <a:endParaRPr lang="en-US" sz="900" dirty="0"/>
           </a:p>
@@ -31190,18 +33160,18 @@
       </p:sp>
       <p:sp>
         <p:nvSpPr>
-          <p:cNvPr id="41" name="Shape 39"/>
+          <p:cNvPr id="47" name="Shape 45"/>
           <p:cNvSpPr/>
           <p:nvPr/>
         </p:nvSpPr>
         <p:spPr>
           <a:xfrm>
             <a:off x="7274052" y="4169664"/>
-            <a:ext cx="685800" cy="384048"/>
+            <a:ext cx="685800" cy="475488"/>
           </a:xfrm>
           <a:prstGeom prst="rect">
             <a:avLst>
-              <a:gd name="adj" fmla="val 9524"/>
+              <a:gd name="adj" fmla="val 7692"/>
             </a:avLst>
           </a:prstGeom>
           <a:solidFill>
@@ -31217,14 +33187,14 @@
       </p:sp>
       <p:sp>
         <p:nvSpPr>
-          <p:cNvPr id="42" name="Text 40"/>
+          <p:cNvPr id="48" name="Text 46"/>
           <p:cNvSpPr/>
           <p:nvPr/>
         </p:nvSpPr>
         <p:spPr>
           <a:xfrm>
             <a:off x="7274052" y="4169664"/>
-            <a:ext cx="685800" cy="384048"/>
+            <a:ext cx="685800" cy="475488"/>
           </a:xfrm>
           <a:prstGeom prst="rect">
             <a:avLst/>
@@ -31248,48 +33218,9 @@
                 <a:ea typeface="Trebuchet MS" pitchFamily="34" charset="-122"/>
                 <a:cs typeface="Trebuchet MS" pitchFamily="34" charset="-120"/>
               </a:rPr>
-              <a:t>se</a:t>
+              <a:t>le</a:t>
             </a:r>
             <a:endParaRPr lang="en-US" sz="900" dirty="0"/>
-          </a:p>
-        </p:txBody>
-      </p:sp>
-      <p:sp>
-        <p:nvSpPr>
-          <p:cNvPr id="43" name="Text 41"/>
-          <p:cNvSpPr/>
-          <p:nvPr/>
-        </p:nvSpPr>
-        <p:spPr>
-          <a:xfrm>
-            <a:off x="7274052" y="4572000"/>
-            <a:ext cx="685800" cy="219456"/>
-          </a:xfrm>
-          <a:prstGeom prst="rect">
-            <a:avLst/>
-          </a:prstGeom>
-          <a:noFill/>
-          <a:ln/>
-        </p:spPr>
-        <p:txBody>
-          <a:bodyPr wrap="square" lIns="0" tIns="0" rIns="0" bIns="0" rtlCol="0" anchor="t"/>
-          <a:lstStyle/>
-          <a:p>
-            <a:pPr algn="ctr" indent="0" marL="0">
-              <a:buNone/>
-            </a:pPr>
-            <a:r>
-              <a:rPr lang="en-US" sz="750" i="1" dirty="0">
-                <a:solidFill>
-                  <a:srgbClr val="94A3B8"/>
-                </a:solidFill>
-                <a:latin typeface="Calibri" pitchFamily="34" charset="0"/>
-                <a:ea typeface="Calibri" pitchFamily="34" charset="-122"/>
-                <a:cs typeface="Calibri" pitchFamily="34" charset="-120"/>
-              </a:rPr>
-              <a:t>/z/</a:t>
-            </a:r>
-            <a:endParaRPr lang="en-US" sz="750" dirty="0"/>
           </a:p>
         </p:txBody>
       </p:sp>
@@ -31579,7 +33510,7 @@
                 <a:ea typeface="Calibri" pitchFamily="34" charset="-122"/>
                 <a:cs typeface="Calibri" pitchFamily="34" charset="-120"/>
               </a:rPr>
-              <a:t>Word Labs  •  wordlabs.app  •  Root: 'use' = to employ or utilise</a:t>
+              <a:t>Word Labs  •  wordlabs.app  •  Root: 'use' = do something with</a:t>
             </a:r>
             <a:endParaRPr lang="en-US" sz="800" dirty="0"/>
           </a:p>
@@ -32748,7 +34679,7 @@
                 <a:ea typeface="Calibri" pitchFamily="34" charset="-122"/>
                 <a:cs typeface="Calibri" pitchFamily="34" charset="-120"/>
               </a:rPr>
-              <a:t>Word Labs  •  wordlabs.app  •  Root: 'use' = to employ or utilise</a:t>
+              <a:t>Word Labs  •  wordlabs.app  •  Root: 'use' = do something with</a:t>
             </a:r>
             <a:endParaRPr lang="en-US" sz="800" dirty="0"/>
           </a:p>
@@ -33177,7 +35108,7 @@
                 <a:ea typeface="Trebuchet MS" pitchFamily="34" charset="-122"/>
                 <a:cs typeface="Trebuchet MS" pitchFamily="34" charset="-120"/>
               </a:rPr>
-              <a:t>-ful</a:t>
+              <a:t>-ed</a:t>
             </a:r>
             <a:endParaRPr lang="en-US" sz="1300" dirty="0"/>
           </a:p>
@@ -33241,7 +35172,7 @@
                 <a:ea typeface="Trebuchet MS" pitchFamily="34" charset="-122"/>
                 <a:cs typeface="Trebuchet MS" pitchFamily="34" charset="-120"/>
               </a:rPr>
-              <a:t>re-</a:t>
+              <a:t>over-</a:t>
             </a:r>
             <a:endParaRPr lang="en-US" sz="1300" dirty="0"/>
           </a:p>
@@ -33330,7 +35261,7 @@
                 <a:ea typeface="Trebuchet MS" pitchFamily="34" charset="-122"/>
                 <a:cs typeface="Trebuchet MS" pitchFamily="34" charset="-120"/>
               </a:rPr>
-              <a:t>-less</a:t>
+              <a:t>-ing</a:t>
             </a:r>
             <a:endParaRPr lang="en-US" sz="1300" dirty="0"/>
           </a:p>
@@ -33394,7 +35325,7 @@
                 <a:ea typeface="Trebuchet MS" pitchFamily="34" charset="-122"/>
                 <a:cs typeface="Trebuchet MS" pitchFamily="34" charset="-120"/>
               </a:rPr>
-              <a:t>ab-</a:t>
+              <a:t>re-</a:t>
             </a:r>
             <a:endParaRPr lang="en-US" sz="1300" dirty="0"/>
           </a:p>
@@ -33483,7 +35414,7 @@
                 <a:ea typeface="Trebuchet MS" pitchFamily="34" charset="-122"/>
                 <a:cs typeface="Trebuchet MS" pitchFamily="34" charset="-120"/>
               </a:rPr>
-              <a:t>-er</a:t>
+              <a:t>-able</a:t>
             </a:r>
             <a:endParaRPr lang="en-US" sz="1300" dirty="0"/>
           </a:p>
@@ -33547,7 +35478,7 @@
                 <a:ea typeface="Trebuchet MS" pitchFamily="34" charset="-122"/>
                 <a:cs typeface="Trebuchet MS" pitchFamily="34" charset="-120"/>
               </a:rPr>
-              <a:t>dis-</a:t>
+              <a:t>under-</a:t>
             </a:r>
             <a:endParaRPr lang="en-US" sz="1300" dirty="0"/>
           </a:p>
@@ -33700,7 +35631,7 @@
                 <a:ea typeface="Trebuchet MS" pitchFamily="34" charset="-122"/>
                 <a:cs typeface="Trebuchet MS" pitchFamily="34" charset="-120"/>
               </a:rPr>
-              <a:t>over-</a:t>
+              <a:t>un-</a:t>
             </a:r>
             <a:endParaRPr lang="en-US" sz="1300" dirty="0"/>
           </a:p>
@@ -33789,7 +35720,7 @@
                 <a:ea typeface="Trebuchet MS" pitchFamily="34" charset="-122"/>
                 <a:cs typeface="Trebuchet MS" pitchFamily="34" charset="-120"/>
               </a:rPr>
-              <a:t>-able</a:t>
+              <a:t>-ee</a:t>
             </a:r>
             <a:endParaRPr lang="en-US" sz="1300" dirty="0"/>
           </a:p>
@@ -33797,37 +35728,151 @@
       </p:sp>
       <p:sp>
         <p:nvSpPr>
-          <p:cNvPr id="43" name="Text 41"/>
-          <p:cNvSpPr/>
-          <p:nvPr/>
-        </p:nvSpPr>
-        <p:spPr>
-          <a:xfrm>
-            <a:off x="365760" y="3611880"/>
-            <a:ext cx="1828800" cy="347472"/>
-          </a:xfrm>
-          <a:prstGeom prst="rect">
-            <a:avLst/>
-          </a:prstGeom>
-          <a:noFill/>
-          <a:ln/>
-        </p:spPr>
-        <p:txBody>
-          <a:bodyPr wrap="square" lIns="0" tIns="0" rIns="0" bIns="0" rtlCol="0" anchor="ctr"/>
-          <a:lstStyle/>
-          <a:p>
-            <a:pPr algn="l" indent="0" marL="0">
-              <a:buNone/>
-            </a:pPr>
-            <a:r>
-              <a:rPr lang="en-US" sz="1200" b="1" dirty="0">
-                <a:solidFill>
-                  <a:srgbClr val="0F172A"/>
+          <p:cNvPr id="43" name="Shape 41"/>
+          <p:cNvSpPr/>
+          <p:nvPr/>
+        </p:nvSpPr>
+        <p:spPr>
+          <a:xfrm>
+            <a:off x="365760" y="3666744"/>
+            <a:ext cx="2468880" cy="402336"/>
+          </a:xfrm>
+          <a:prstGeom prst="rect">
+            <a:avLst/>
+          </a:prstGeom>
+          <a:solidFill>
+            <a:srgbClr val="F1F5F9"/>
+          </a:solidFill>
+          <a:ln w="12700">
+            <a:solidFill>
+              <a:srgbClr val="E2E8F0"/>
+            </a:solidFill>
+            <a:prstDash val="solid"/>
+          </a:ln>
+        </p:spPr>
+      </p:sp>
+      <p:sp>
+        <p:nvSpPr>
+          <p:cNvPr id="44" name="Shape 42"/>
+          <p:cNvSpPr/>
+          <p:nvPr/>
+        </p:nvSpPr>
+        <p:spPr>
+          <a:xfrm>
+            <a:off x="2971800" y="3666744"/>
+            <a:ext cx="2834640" cy="402336"/>
+          </a:xfrm>
+          <a:prstGeom prst="rect">
+            <a:avLst/>
+          </a:prstGeom>
+          <a:solidFill>
+            <a:srgbClr val="F1F5F9"/>
+          </a:solidFill>
+          <a:ln w="12700">
+            <a:solidFill>
+              <a:srgbClr val="E2E8F0"/>
+            </a:solidFill>
+            <a:prstDash val="solid"/>
+          </a:ln>
+        </p:spPr>
+      </p:sp>
+      <p:sp>
+        <p:nvSpPr>
+          <p:cNvPr id="45" name="Shape 43"/>
+          <p:cNvSpPr/>
+          <p:nvPr/>
+        </p:nvSpPr>
+        <p:spPr>
+          <a:xfrm>
+            <a:off x="5943600" y="3666744"/>
+            <a:ext cx="2834640" cy="402336"/>
+          </a:xfrm>
+          <a:prstGeom prst="rect">
+            <a:avLst/>
+          </a:prstGeom>
+          <a:solidFill>
+            <a:srgbClr val="FCE7F3"/>
+          </a:solidFill>
+          <a:ln w="12700">
+            <a:solidFill>
+              <a:srgbClr val="E2E8F0"/>
+            </a:solidFill>
+            <a:prstDash val="solid"/>
+          </a:ln>
+        </p:spPr>
+      </p:sp>
+      <p:sp>
+        <p:nvSpPr>
+          <p:cNvPr id="46" name="Text 44"/>
+          <p:cNvSpPr/>
+          <p:nvPr/>
+        </p:nvSpPr>
+        <p:spPr>
+          <a:xfrm>
+            <a:off x="5943600" y="3666744"/>
+            <a:ext cx="2834640" cy="402336"/>
+          </a:xfrm>
+          <a:prstGeom prst="rect">
+            <a:avLst/>
+          </a:prstGeom>
+          <a:noFill/>
+          <a:ln/>
+        </p:spPr>
+        <p:txBody>
+          <a:bodyPr wrap="square" lIns="0" tIns="0" rIns="0" bIns="0" rtlCol="0" anchor="ctr"/>
+          <a:lstStyle/>
+          <a:p>
+            <a:pPr algn="ctr" indent="0" marL="0">
+              <a:buNone/>
+            </a:pPr>
+            <a:r>
+              <a:rPr lang="en-US" sz="1300" b="1" dirty="0">
+                <a:solidFill>
+                  <a:srgbClr val="9D174D"/>
                 </a:solidFill>
                 <a:latin typeface="Trebuchet MS" pitchFamily="34" charset="0"/>
                 <a:ea typeface="Trebuchet MS" pitchFamily="34" charset="-122"/>
                 <a:cs typeface="Trebuchet MS" pitchFamily="34" charset="-120"/>
               </a:rPr>
+              <a:t>-ful</a:t>
+            </a:r>
+            <a:endParaRPr lang="en-US" sz="1300" dirty="0"/>
+          </a:p>
+        </p:txBody>
+      </p:sp>
+      <p:sp>
+        <p:nvSpPr>
+          <p:cNvPr id="47" name="Text 45"/>
+          <p:cNvSpPr/>
+          <p:nvPr/>
+        </p:nvSpPr>
+        <p:spPr>
+          <a:xfrm>
+            <a:off x="365760" y="3611880"/>
+            <a:ext cx="1828800" cy="347472"/>
+          </a:xfrm>
+          <a:prstGeom prst="rect">
+            <a:avLst/>
+          </a:prstGeom>
+          <a:noFill/>
+          <a:ln/>
+        </p:spPr>
+        <p:txBody>
+          <a:bodyPr wrap="square" lIns="0" tIns="0" rIns="0" bIns="0" rtlCol="0" anchor="ctr"/>
+          <a:lstStyle/>
+          <a:p>
+            <a:pPr algn="l" indent="0" marL="0">
+              <a:buNone/>
+            </a:pPr>
+            <a:r>
+              <a:rPr lang="en-US" sz="1200" b="1" dirty="0">
+                <a:solidFill>
+                  <a:srgbClr val="0F172A"/>
+                </a:solidFill>
+                <a:latin typeface="Trebuchet MS" pitchFamily="34" charset="0"/>
+                <a:ea typeface="Trebuchet MS" pitchFamily="34" charset="-122"/>
+                <a:cs typeface="Trebuchet MS" pitchFamily="34" charset="-120"/>
+              </a:rPr>
               <a:t>Sample words:</a:t>
             </a:r>
             <a:endParaRPr lang="en-US" sz="1200" dirty="0"/>
@@ -33836,7 +35881,7 @@
       </p:sp>
       <p:sp>
         <p:nvSpPr>
-          <p:cNvPr id="44" name="Shape 42"/>
+          <p:cNvPr id="48" name="Shape 46"/>
           <p:cNvSpPr/>
           <p:nvPr/>
         </p:nvSpPr>
@@ -33863,7 +35908,7 @@
       </p:sp>
       <p:sp>
         <p:nvSpPr>
-          <p:cNvPr id="45" name="Text 43"/>
+          <p:cNvPr id="49" name="Text 47"/>
           <p:cNvSpPr/>
           <p:nvPr/>
         </p:nvSpPr>
@@ -33894,7 +35939,7 @@
                 <a:ea typeface="Trebuchet MS" pitchFamily="34" charset="-122"/>
                 <a:cs typeface="Trebuchet MS" pitchFamily="34" charset="-120"/>
               </a:rPr>
-              <a:t>useful</a:t>
+              <a:t>use</a:t>
             </a:r>
             <a:endParaRPr lang="en-US" sz="1200" dirty="0"/>
           </a:p>
@@ -33902,7 +35947,7 @@
       </p:sp>
       <p:sp>
         <p:nvSpPr>
-          <p:cNvPr id="46" name="Shape 44"/>
+          <p:cNvPr id="50" name="Shape 48"/>
           <p:cNvSpPr/>
           <p:nvPr/>
         </p:nvSpPr>
@@ -33929,7 +35974,7 @@
       </p:sp>
       <p:sp>
         <p:nvSpPr>
-          <p:cNvPr id="47" name="Text 45"/>
+          <p:cNvPr id="51" name="Text 49"/>
           <p:cNvSpPr/>
           <p:nvPr/>
         </p:nvSpPr>
@@ -33960,7 +36005,7 @@
                 <a:ea typeface="Trebuchet MS" pitchFamily="34" charset="-122"/>
                 <a:cs typeface="Trebuchet MS" pitchFamily="34" charset="-120"/>
               </a:rPr>
-              <a:t>useless</a:t>
+              <a:t>used</a:t>
             </a:r>
             <a:endParaRPr lang="en-US" sz="1200" dirty="0"/>
           </a:p>
@@ -33968,7 +36013,7 @@
       </p:sp>
       <p:sp>
         <p:nvSpPr>
-          <p:cNvPr id="48" name="Shape 46"/>
+          <p:cNvPr id="52" name="Shape 50"/>
           <p:cNvSpPr/>
           <p:nvPr/>
         </p:nvSpPr>
@@ -33995,7 +36040,7 @@
       </p:sp>
       <p:sp>
         <p:nvSpPr>
-          <p:cNvPr id="49" name="Text 47"/>
+          <p:cNvPr id="53" name="Text 51"/>
           <p:cNvSpPr/>
           <p:nvPr/>
         </p:nvSpPr>
@@ -34026,7 +36071,7 @@
                 <a:ea typeface="Trebuchet MS" pitchFamily="34" charset="-122"/>
                 <a:cs typeface="Trebuchet MS" pitchFamily="34" charset="-120"/>
               </a:rPr>
-              <a:t>misuse</a:t>
+              <a:t>user</a:t>
             </a:r>
             <a:endParaRPr lang="en-US" sz="1200" dirty="0"/>
           </a:p>
@@ -34034,7 +36079,7 @@
       </p:sp>
       <p:sp>
         <p:nvSpPr>
-          <p:cNvPr id="50" name="Shape 48"/>
+          <p:cNvPr id="54" name="Shape 52"/>
           <p:cNvSpPr/>
           <p:nvPr/>
         </p:nvSpPr>
@@ -34061,7 +36106,7 @@
       </p:sp>
       <p:sp>
         <p:nvSpPr>
-          <p:cNvPr id="51" name="Text 49"/>
+          <p:cNvPr id="55" name="Text 53"/>
           <p:cNvSpPr/>
           <p:nvPr/>
         </p:nvSpPr>
@@ -34092,7 +36137,7 @@
                 <a:ea typeface="Trebuchet MS" pitchFamily="34" charset="-122"/>
                 <a:cs typeface="Trebuchet MS" pitchFamily="34" charset="-120"/>
               </a:rPr>
-              <a:t>reuse</a:t>
+              <a:t>uses</a:t>
             </a:r>
             <a:endParaRPr lang="en-US" sz="1200" dirty="0"/>
           </a:p>
@@ -34100,7 +36145,7 @@
       </p:sp>
       <p:sp>
         <p:nvSpPr>
-          <p:cNvPr id="52" name="Shape 50"/>
+          <p:cNvPr id="56" name="Shape 54"/>
           <p:cNvSpPr/>
           <p:nvPr/>
         </p:nvSpPr>
@@ -34127,7 +36172,7 @@
       </p:sp>
       <p:sp>
         <p:nvSpPr>
-          <p:cNvPr id="53" name="Text 51"/>
+          <p:cNvPr id="57" name="Text 55"/>
           <p:cNvSpPr/>
           <p:nvPr/>
         </p:nvSpPr>
@@ -34158,7 +36203,7 @@
                 <a:ea typeface="Trebuchet MS" pitchFamily="34" charset="-122"/>
                 <a:cs typeface="Trebuchet MS" pitchFamily="34" charset="-120"/>
               </a:rPr>
-              <a:t>overuse</a:t>
+              <a:t>reuse</a:t>
             </a:r>
             <a:endParaRPr lang="en-US" sz="1200" dirty="0"/>
           </a:p>
@@ -34166,7 +36211,7 @@
       </p:sp>
       <p:sp>
         <p:nvSpPr>
-          <p:cNvPr id="54" name="Shape 52"/>
+          <p:cNvPr id="58" name="Shape 56"/>
           <p:cNvSpPr/>
           <p:nvPr/>
         </p:nvSpPr>
@@ -34193,7 +36238,7 @@
       </p:sp>
       <p:sp>
         <p:nvSpPr>
-          <p:cNvPr id="55" name="Text 53"/>
+          <p:cNvPr id="59" name="Text 57"/>
           <p:cNvSpPr/>
           <p:nvPr/>
         </p:nvSpPr>
@@ -34224,7 +36269,7 @@
                 <a:ea typeface="Trebuchet MS" pitchFamily="34" charset="-122"/>
                 <a:cs typeface="Trebuchet MS" pitchFamily="34" charset="-120"/>
               </a:rPr>
-              <a:t>usage</a:t>
+              <a:t>users</a:t>
             </a:r>
             <a:endParaRPr lang="en-US" sz="1200" dirty="0"/>
           </a:p>
@@ -34232,7 +36277,7 @@
       </p:sp>
       <p:sp>
         <p:nvSpPr>
-          <p:cNvPr id="56" name="Shape 54"/>
+          <p:cNvPr id="60" name="Shape 58"/>
           <p:cNvSpPr/>
           <p:nvPr/>
         </p:nvSpPr>
@@ -34259,7 +36304,7 @@
       </p:sp>
       <p:sp>
         <p:nvSpPr>
-          <p:cNvPr id="57" name="Text 55"/>
+          <p:cNvPr id="61" name="Text 59"/>
           <p:cNvSpPr/>
           <p:nvPr/>
         </p:nvSpPr>
@@ -34290,73 +36335,7 @@
                 <a:ea typeface="Trebuchet MS" pitchFamily="34" charset="-122"/>
                 <a:cs typeface="Trebuchet MS" pitchFamily="34" charset="-120"/>
               </a:rPr>
-              <a:t>usable</a:t>
-            </a:r>
-            <a:endParaRPr lang="en-US" sz="1200" dirty="0"/>
-          </a:p>
-        </p:txBody>
-      </p:sp>
-      <p:sp>
-        <p:nvSpPr>
-          <p:cNvPr id="58" name="Shape 56"/>
-          <p:cNvSpPr/>
-          <p:nvPr/>
-        </p:nvSpPr>
-        <p:spPr>
-          <a:xfrm>
-            <a:off x="6894576" y="4498848"/>
-            <a:ext cx="2011680" cy="402336"/>
-          </a:xfrm>
-          <a:prstGeom prst="rect">
-            <a:avLst>
-              <a:gd name="adj" fmla="val 13636"/>
-            </a:avLst>
-          </a:prstGeom>
-          <a:solidFill>
-            <a:srgbClr val="EEF2FF"/>
-          </a:solidFill>
-          <a:ln w="12700">
-            <a:solidFill>
-              <a:srgbClr val="6366F1"/>
-            </a:solidFill>
-            <a:prstDash val="solid"/>
-          </a:ln>
-        </p:spPr>
-      </p:sp>
-      <p:sp>
-        <p:nvSpPr>
-          <p:cNvPr id="59" name="Text 57"/>
-          <p:cNvSpPr/>
-          <p:nvPr/>
-        </p:nvSpPr>
-        <p:spPr>
-          <a:xfrm>
-            <a:off x="6894576" y="4498848"/>
-            <a:ext cx="2011680" cy="402336"/>
-          </a:xfrm>
-          <a:prstGeom prst="rect">
-            <a:avLst/>
-          </a:prstGeom>
-          <a:noFill/>
-          <a:ln/>
-        </p:spPr>
-        <p:txBody>
-          <a:bodyPr wrap="square" lIns="0" tIns="0" rIns="0" bIns="0" rtlCol="0" anchor="ctr"/>
-          <a:lstStyle/>
-          <a:p>
-            <a:pPr algn="ctr" indent="0" marL="0">
-              <a:buNone/>
-            </a:pPr>
-            <a:r>
-              <a:rPr lang="en-US" sz="1200" b="1" dirty="0">
-                <a:solidFill>
-                  <a:srgbClr val="4338CA"/>
-                </a:solidFill>
-                <a:latin typeface="Trebuchet MS" pitchFamily="34" charset="0"/>
-                <a:ea typeface="Trebuchet MS" pitchFamily="34" charset="-122"/>
-                <a:cs typeface="Trebuchet MS" pitchFamily="34" charset="-120"/>
-              </a:rPr>
-              <a:t>abuse</a:t>
+              <a:t>using</a:t>
             </a:r>
             <a:endParaRPr lang="en-US" sz="1200" dirty="0"/>
           </a:p>
@@ -34648,7 +36627,7 @@
                 <a:ea typeface="Calibri" pitchFamily="34" charset="-122"/>
                 <a:cs typeface="Calibri" pitchFamily="34" charset="-120"/>
               </a:rPr>
-              <a:t>Word Labs  •  wordlabs.app  •  Root: 'use' = to employ or utilise</a:t>
+              <a:t>Word Labs  •  wordlabs.app  •  Root: 'use' = do something with</a:t>
             </a:r>
             <a:endParaRPr lang="en-US" sz="800" dirty="0"/>
           </a:p>
@@ -34812,7 +36791,7 @@
                 <a:ea typeface="Calibri" pitchFamily="34" charset="-122"/>
                 <a:cs typeface="Calibri" pitchFamily="34" charset="-120"/>
               </a:rPr>
-              <a:t>The core part of a word carrying its basic meaning. For example, 'use' means 'to employ or utilise'.</a:t>
+              <a:t>The core part of a word carrying its basic meaning. For example, 'use' means 'do something with'.</a:t>
             </a:r>
             <a:endParaRPr lang="en-US" sz="1350" dirty="0"/>
           </a:p>
@@ -35432,7 +37411,7 @@
                 <a:ea typeface="Calibri" pitchFamily="34" charset="-122"/>
                 <a:cs typeface="Calibri" pitchFamily="34" charset="-120"/>
               </a:rPr>
-              <a:t>Word Labs  •  wordlabs.app  •  Root: 'use' = to employ or utilise</a:t>
+              <a:t>Word Labs  •  wordlabs.app  •  Root: 'use' = do something with</a:t>
             </a:r>
             <a:endParaRPr lang="en-US" sz="800" dirty="0"/>
           </a:p>
@@ -35544,7 +37523,7 @@
                 <a:ea typeface="Calibri" pitchFamily="34" charset="-122"/>
                 <a:cs typeface="Calibri" pitchFamily="34" charset="-120"/>
               </a:rPr>
-              <a:t>1.  The suffix 'ful' added to 'use' creates a word meaning full of use or helpful.</a:t>
+              <a:t>1.  'use' means 'do something with'.</a:t>
             </a:r>
             <a:endParaRPr lang="en-US" sz="1300" dirty="0"/>
           </a:p>
@@ -35683,7 +37662,7 @@
                 <a:ea typeface="Calibri" pitchFamily="34" charset="-122"/>
                 <a:cs typeface="Calibri" pitchFamily="34" charset="-120"/>
               </a:rPr>
-              <a:t>2.  Adding the prefix 're' to 'use' makes the word 'reuse', meaning to use again.</a:t>
+              <a:t>2.  'used' means 'employed something for a purpose, in the past'.</a:t>
             </a:r>
             <a:endParaRPr lang="en-US" sz="1300" dirty="0"/>
           </a:p>
@@ -35822,7 +37801,7 @@
                 <a:ea typeface="Calibri" pitchFamily="34" charset="-122"/>
                 <a:cs typeface="Calibri" pitchFamily="34" charset="-120"/>
               </a:rPr>
-              <a:t>3.  The root 'use' comes from Latin.</a:t>
+              <a:t>3.  'use' means 'to hide something away'.</a:t>
             </a:r>
             <a:endParaRPr lang="en-US" sz="1300" dirty="0"/>
           </a:p>
@@ -35845,11 +37824,11 @@
             </a:avLst>
           </a:prstGeom>
           <a:solidFill>
-            <a:srgbClr val="DCFCE7"/>
-          </a:solidFill>
-          <a:ln w="12700">
-            <a:solidFill>
-              <a:srgbClr val="16A34A"/>
+            <a:srgbClr val="FEE2E2"/>
+          </a:solidFill>
+          <a:ln w="12700">
+            <a:solidFill>
+              <a:srgbClr val="DC2626"/>
             </a:solidFill>
             <a:prstDash val="solid"/>
           </a:ln>
@@ -35882,13 +37861,13 @@
             <a:r>
               <a:rPr lang="en-US" sz="1100" b="1" dirty="0">
                 <a:solidFill>
-                  <a:srgbClr val="16A34A"/>
+                  <a:srgbClr val="DC2626"/>
                 </a:solidFill>
                 <a:latin typeface="Trebuchet MS" pitchFamily="34" charset="0"/>
                 <a:ea typeface="Trebuchet MS" pitchFamily="34" charset="-122"/>
                 <a:cs typeface="Trebuchet MS" pitchFamily="34" charset="-120"/>
               </a:rPr>
-              <a:t>TRUE</a:t>
+              <a:t>FALSE</a:t>
             </a:r>
             <a:endParaRPr lang="en-US" sz="1100" dirty="0"/>
           </a:p>
@@ -35961,7 +37940,7 @@
                 <a:ea typeface="Calibri" pitchFamily="34" charset="-122"/>
                 <a:cs typeface="Calibri" pitchFamily="34" charset="-120"/>
               </a:rPr>
-              <a:t>4.  The word 'useless' means very helpful and important.</a:t>
+              <a:t>4.  'used' means 'hidden away completely'.</a:t>
             </a:r>
             <a:endParaRPr lang="en-US" sz="1300" dirty="0"/>
           </a:p>
@@ -36100,7 +38079,7 @@
                 <a:ea typeface="Calibri" pitchFamily="34" charset="-122"/>
                 <a:cs typeface="Calibri" pitchFamily="34" charset="-120"/>
               </a:rPr>
-              <a:t>5.  The word 'misuse' means to use something in the best possible way.</a:t>
+              <a:t>5.  'use' means 'to employ something for a purpose'.</a:t>
             </a:r>
             <a:endParaRPr lang="en-US" sz="1300" dirty="0"/>
           </a:p>
@@ -36123,11 +38102,11 @@
             </a:avLst>
           </a:prstGeom>
           <a:solidFill>
-            <a:srgbClr val="FEE2E2"/>
-          </a:solidFill>
-          <a:ln w="12700">
-            <a:solidFill>
-              <a:srgbClr val="DC2626"/>
+            <a:srgbClr val="DCFCE7"/>
+          </a:solidFill>
+          <a:ln w="12700">
+            <a:solidFill>
+              <a:srgbClr val="16A34A"/>
             </a:solidFill>
             <a:prstDash val="solid"/>
           </a:ln>
@@ -36160,13 +38139,13 @@
             <a:r>
               <a:rPr lang="en-US" sz="1100" b="1" dirty="0">
                 <a:solidFill>
-                  <a:srgbClr val="DC2626"/>
+                  <a:srgbClr val="16A34A"/>
                 </a:solidFill>
                 <a:latin typeface="Trebuchet MS" pitchFamily="34" charset="0"/>
                 <a:ea typeface="Trebuchet MS" pitchFamily="34" charset="-122"/>
                 <a:cs typeface="Trebuchet MS" pitchFamily="34" charset="-120"/>
               </a:rPr>
-              <a:t>FALSE</a:t>
+              <a:t>TRUE</a:t>
             </a:r>
             <a:endParaRPr lang="en-US" sz="1100" dirty="0"/>
           </a:p>
@@ -36458,7 +38437,7 @@
                 <a:ea typeface="Calibri" pitchFamily="34" charset="-122"/>
                 <a:cs typeface="Calibri" pitchFamily="34" charset="-120"/>
               </a:rPr>
-              <a:t>Word Labs  •  wordlabs.app  •  Root: 'use' = to employ or utilise</a:t>
+              <a:t>Word Labs  •  wordlabs.app  •  Root: 'use' = do something with</a:t>
             </a:r>
             <a:endParaRPr lang="en-US" sz="800" dirty="0"/>
           </a:p>
@@ -36595,7 +38574,7 @@
                 <a:ea typeface="Trebuchet MS" pitchFamily="34" charset="-122"/>
                 <a:cs typeface="Trebuchet MS" pitchFamily="34" charset="-120"/>
               </a:rPr>
-              <a:t>to employ or utilise</a:t>
+              <a:t>do something with</a:t>
             </a:r>
             <a:endParaRPr lang="en-US" sz="2000" dirty="0"/>
           </a:p>
@@ -36634,7 +38613,7 @@
                 <a:ea typeface="Calibri" pitchFamily="34" charset="-122"/>
                 <a:cs typeface="Calibri" pitchFamily="34" charset="-120"/>
               </a:rPr>
-              <a:t>Origin: Latin: usus</a:t>
+              <a:t>Origin: Core English root</a:t>
             </a:r>
             <a:endParaRPr lang="en-US" sz="1100" dirty="0"/>
           </a:p>
@@ -36739,7 +38718,7 @@
                 <a:ea typeface="Trebuchet MS" pitchFamily="34" charset="-122"/>
                 <a:cs typeface="Trebuchet MS" pitchFamily="34" charset="-120"/>
               </a:rPr>
-              <a:t>useful</a:t>
+              <a:t>use</a:t>
             </a:r>
             <a:endParaRPr lang="en-US" sz="1300" dirty="0"/>
           </a:p>
@@ -36805,7 +38784,7 @@
                 <a:ea typeface="Trebuchet MS" pitchFamily="34" charset="-122"/>
                 <a:cs typeface="Trebuchet MS" pitchFamily="34" charset="-120"/>
               </a:rPr>
-              <a:t>useless</a:t>
+              <a:t>used</a:t>
             </a:r>
             <a:endParaRPr lang="en-US" sz="1300" dirty="0"/>
           </a:p>
@@ -36871,7 +38850,7 @@
                 <a:ea typeface="Trebuchet MS" pitchFamily="34" charset="-122"/>
                 <a:cs typeface="Trebuchet MS" pitchFamily="34" charset="-120"/>
               </a:rPr>
-              <a:t>misuse</a:t>
+              <a:t>user</a:t>
             </a:r>
             <a:endParaRPr lang="en-US" sz="1300" dirty="0"/>
           </a:p>
@@ -36937,7 +38916,7 @@
                 <a:ea typeface="Trebuchet MS" pitchFamily="34" charset="-122"/>
                 <a:cs typeface="Trebuchet MS" pitchFamily="34" charset="-120"/>
               </a:rPr>
-              <a:t>reuse</a:t>
+              <a:t>uses</a:t>
             </a:r>
             <a:endParaRPr lang="en-US" sz="1300" dirty="0"/>
           </a:p>
@@ -37003,7 +38982,7 @@
                 <a:ea typeface="Trebuchet MS" pitchFamily="34" charset="-122"/>
                 <a:cs typeface="Trebuchet MS" pitchFamily="34" charset="-120"/>
               </a:rPr>
-              <a:t>overuse</a:t>
+              <a:t>reuse</a:t>
             </a:r>
             <a:endParaRPr lang="en-US" sz="1300" dirty="0"/>
           </a:p>
@@ -37069,7 +39048,7 @@
                 <a:ea typeface="Trebuchet MS" pitchFamily="34" charset="-122"/>
                 <a:cs typeface="Trebuchet MS" pitchFamily="34" charset="-120"/>
               </a:rPr>
-              <a:t>usage</a:t>
+              <a:t>users</a:t>
             </a:r>
             <a:endParaRPr lang="en-US" sz="1300" dirty="0"/>
           </a:p>
@@ -37135,7 +39114,7 @@
                 <a:ea typeface="Trebuchet MS" pitchFamily="34" charset="-122"/>
                 <a:cs typeface="Trebuchet MS" pitchFamily="34" charset="-120"/>
               </a:rPr>
-              <a:t>usable</a:t>
+              <a:t>using</a:t>
             </a:r>
             <a:endParaRPr lang="en-US" sz="1300" dirty="0"/>
           </a:p>
@@ -37427,7 +39406,7 @@
                 <a:ea typeface="Calibri" pitchFamily="34" charset="-122"/>
                 <a:cs typeface="Calibri" pitchFamily="34" charset="-120"/>
               </a:rPr>
-              <a:t>Word Labs  •  wordlabs.app  •  Root: 'use' = to employ or utilise</a:t>
+              <a:t>Word Labs  •  wordlabs.app  •  Root: 'use' = do something with</a:t>
             </a:r>
             <a:endParaRPr lang="en-US" sz="800" dirty="0"/>
           </a:p>
@@ -37856,7 +39835,7 @@
                 <a:ea typeface="Trebuchet MS" pitchFamily="34" charset="-122"/>
                 <a:cs typeface="Trebuchet MS" pitchFamily="34" charset="-120"/>
               </a:rPr>
-              <a:t>-ful</a:t>
+              <a:t>-ed</a:t>
             </a:r>
             <a:endParaRPr lang="en-US" sz="1300" dirty="0"/>
           </a:p>
@@ -37920,7 +39899,7 @@
                 <a:ea typeface="Trebuchet MS" pitchFamily="34" charset="-122"/>
                 <a:cs typeface="Trebuchet MS" pitchFamily="34" charset="-120"/>
               </a:rPr>
-              <a:t>re-</a:t>
+              <a:t>over-</a:t>
             </a:r>
             <a:endParaRPr lang="en-US" sz="1300" dirty="0"/>
           </a:p>
@@ -38009,7 +39988,7 @@
                 <a:ea typeface="Trebuchet MS" pitchFamily="34" charset="-122"/>
                 <a:cs typeface="Trebuchet MS" pitchFamily="34" charset="-120"/>
               </a:rPr>
-              <a:t>-less</a:t>
+              <a:t>-ing</a:t>
             </a:r>
             <a:endParaRPr lang="en-US" sz="1300" dirty="0"/>
           </a:p>
@@ -38073,7 +40052,7 @@
                 <a:ea typeface="Trebuchet MS" pitchFamily="34" charset="-122"/>
                 <a:cs typeface="Trebuchet MS" pitchFamily="34" charset="-120"/>
               </a:rPr>
-              <a:t>ab-</a:t>
+              <a:t>re-</a:t>
             </a:r>
             <a:endParaRPr lang="en-US" sz="1300" dirty="0"/>
           </a:p>
@@ -38162,7 +40141,7 @@
                 <a:ea typeface="Trebuchet MS" pitchFamily="34" charset="-122"/>
                 <a:cs typeface="Trebuchet MS" pitchFamily="34" charset="-120"/>
               </a:rPr>
-              <a:t>-er</a:t>
+              <a:t>-able</a:t>
             </a:r>
             <a:endParaRPr lang="en-US" sz="1300" dirty="0"/>
           </a:p>
@@ -38226,7 +40205,7 @@
                 <a:ea typeface="Trebuchet MS" pitchFamily="34" charset="-122"/>
                 <a:cs typeface="Trebuchet MS" pitchFamily="34" charset="-120"/>
               </a:rPr>
-              <a:t>dis-</a:t>
+              <a:t>under-</a:t>
             </a:r>
             <a:endParaRPr lang="en-US" sz="1300" dirty="0"/>
           </a:p>
@@ -38379,7 +40358,7 @@
                 <a:ea typeface="Trebuchet MS" pitchFamily="34" charset="-122"/>
                 <a:cs typeface="Trebuchet MS" pitchFamily="34" charset="-120"/>
               </a:rPr>
-              <a:t>over-</a:t>
+              <a:t>un-</a:t>
             </a:r>
             <a:endParaRPr lang="en-US" sz="1300" dirty="0"/>
           </a:p>
@@ -38468,7 +40447,7 @@
                 <a:ea typeface="Trebuchet MS" pitchFamily="34" charset="-122"/>
                 <a:cs typeface="Trebuchet MS" pitchFamily="34" charset="-120"/>
               </a:rPr>
-              <a:t>-able</a:t>
+              <a:t>-ee</a:t>
             </a:r>
             <a:endParaRPr lang="en-US" sz="1300" dirty="0"/>
           </a:p>
@@ -38476,13 +40455,127 @@
       </p:sp>
       <p:sp>
         <p:nvSpPr>
-          <p:cNvPr id="43" name="Text 41"/>
-          <p:cNvSpPr/>
-          <p:nvPr/>
-        </p:nvSpPr>
-        <p:spPr>
-          <a:xfrm>
-            <a:off x="365760" y="4178808"/>
+          <p:cNvPr id="43" name="Shape 41"/>
+          <p:cNvSpPr/>
+          <p:nvPr/>
+        </p:nvSpPr>
+        <p:spPr>
+          <a:xfrm>
+            <a:off x="640080" y="4041648"/>
+            <a:ext cx="1463040" cy="420624"/>
+          </a:xfrm>
+          <a:prstGeom prst="rect">
+            <a:avLst/>
+          </a:prstGeom>
+          <a:solidFill>
+            <a:srgbClr val="F1F5F9"/>
+          </a:solidFill>
+          <a:ln w="12700">
+            <a:solidFill>
+              <a:srgbClr val="E5E7EB"/>
+            </a:solidFill>
+            <a:prstDash val="solid"/>
+          </a:ln>
+        </p:spPr>
+      </p:sp>
+      <p:sp>
+        <p:nvSpPr>
+          <p:cNvPr id="44" name="Shape 42"/>
+          <p:cNvSpPr/>
+          <p:nvPr/>
+        </p:nvSpPr>
+        <p:spPr>
+          <a:xfrm>
+            <a:off x="3291840" y="4041648"/>
+            <a:ext cx="1645920" cy="420624"/>
+          </a:xfrm>
+          <a:prstGeom prst="rect">
+            <a:avLst/>
+          </a:prstGeom>
+          <a:solidFill>
+            <a:srgbClr val="F1F5F9"/>
+          </a:solidFill>
+          <a:ln w="12700">
+            <a:solidFill>
+              <a:srgbClr val="E5E7EB"/>
+            </a:solidFill>
+            <a:prstDash val="solid"/>
+          </a:ln>
+        </p:spPr>
+      </p:sp>
+      <p:sp>
+        <p:nvSpPr>
+          <p:cNvPr id="45" name="Shape 43"/>
+          <p:cNvSpPr/>
+          <p:nvPr/>
+        </p:nvSpPr>
+        <p:spPr>
+          <a:xfrm>
+            <a:off x="5943600" y="4041648"/>
+            <a:ext cx="1463040" cy="420624"/>
+          </a:xfrm>
+          <a:prstGeom prst="rect">
+            <a:avLst/>
+          </a:prstGeom>
+          <a:solidFill>
+            <a:srgbClr val="FCE7F3"/>
+          </a:solidFill>
+          <a:ln w="12700">
+            <a:solidFill>
+              <a:srgbClr val="E5E7EB"/>
+            </a:solidFill>
+            <a:prstDash val="solid"/>
+          </a:ln>
+        </p:spPr>
+      </p:sp>
+      <p:sp>
+        <p:nvSpPr>
+          <p:cNvPr id="46" name="Text 44"/>
+          <p:cNvSpPr/>
+          <p:nvPr/>
+        </p:nvSpPr>
+        <p:spPr>
+          <a:xfrm>
+            <a:off x="5943600" y="4041648"/>
+            <a:ext cx="1463040" cy="420624"/>
+          </a:xfrm>
+          <a:prstGeom prst="rect">
+            <a:avLst/>
+          </a:prstGeom>
+          <a:noFill/>
+          <a:ln/>
+        </p:spPr>
+        <p:txBody>
+          <a:bodyPr wrap="square" lIns="0" tIns="0" rIns="0" bIns="0" rtlCol="0" anchor="ctr"/>
+          <a:lstStyle/>
+          <a:p>
+            <a:pPr algn="ctr" indent="0" marL="0">
+              <a:buNone/>
+            </a:pPr>
+            <a:r>
+              <a:rPr lang="en-US" sz="1300" b="1" dirty="0">
+                <a:solidFill>
+                  <a:srgbClr val="9D174D"/>
+                </a:solidFill>
+                <a:latin typeface="Trebuchet MS" pitchFamily="34" charset="0"/>
+                <a:ea typeface="Trebuchet MS" pitchFamily="34" charset="-122"/>
+                <a:cs typeface="Trebuchet MS" pitchFamily="34" charset="-120"/>
+              </a:rPr>
+              <a:t>-ful</a:t>
+            </a:r>
+            <a:endParaRPr lang="en-US" sz="1300" dirty="0"/>
+          </a:p>
+        </p:txBody>
+      </p:sp>
+      <p:sp>
+        <p:nvSpPr>
+          <p:cNvPr id="47" name="Text 45"/>
+          <p:cNvSpPr/>
+          <p:nvPr/>
+        </p:nvSpPr>
+        <p:spPr>
+          <a:xfrm>
+            <a:off x="365760" y="4636008"/>
             <a:ext cx="1097280" cy="420624"/>
           </a:xfrm>
           <a:prstGeom prst="rect">
@@ -38515,13 +40608,13 @@
       </p:sp>
       <p:sp>
         <p:nvSpPr>
-          <p:cNvPr id="44" name="Shape 42"/>
-          <p:cNvSpPr/>
-          <p:nvPr/>
-        </p:nvSpPr>
-        <p:spPr>
-          <a:xfrm>
-            <a:off x="1508760" y="4178808"/>
+          <p:cNvPr id="48" name="Shape 46"/>
+          <p:cNvSpPr/>
+          <p:nvPr/>
+        </p:nvSpPr>
+        <p:spPr>
+          <a:xfrm>
+            <a:off x="1508760" y="4636008"/>
             <a:ext cx="950976" cy="420624"/>
           </a:xfrm>
           <a:prstGeom prst="rect">
@@ -38549,13 +40642,13 @@
       </p:sp>
       <p:sp>
         <p:nvSpPr>
-          <p:cNvPr id="45" name="Text 43"/>
-          <p:cNvSpPr/>
-          <p:nvPr/>
-        </p:nvSpPr>
-        <p:spPr>
-          <a:xfrm>
-            <a:off x="1508760" y="4178808"/>
+          <p:cNvPr id="49" name="Text 47"/>
+          <p:cNvSpPr/>
+          <p:nvPr/>
+        </p:nvSpPr>
+        <p:spPr>
+          <a:xfrm>
+            <a:off x="1508760" y="4636008"/>
             <a:ext cx="950976" cy="420624"/>
           </a:xfrm>
           <a:prstGeom prst="rect">
@@ -38588,13 +40681,13 @@
       </p:sp>
       <p:sp>
         <p:nvSpPr>
-          <p:cNvPr id="46" name="Text 44"/>
-          <p:cNvSpPr/>
-          <p:nvPr/>
-        </p:nvSpPr>
-        <p:spPr>
-          <a:xfrm>
-            <a:off x="2487168" y="4178808"/>
+          <p:cNvPr id="50" name="Text 48"/>
+          <p:cNvSpPr/>
+          <p:nvPr/>
+        </p:nvSpPr>
+        <p:spPr>
+          <a:xfrm>
+            <a:off x="2487168" y="4636008"/>
             <a:ext cx="320040" cy="420624"/>
           </a:xfrm>
           <a:prstGeom prst="rect">
@@ -38627,13 +40720,13 @@
       </p:sp>
       <p:sp>
         <p:nvSpPr>
-          <p:cNvPr id="47" name="Shape 45"/>
-          <p:cNvSpPr/>
-          <p:nvPr/>
-        </p:nvSpPr>
-        <p:spPr>
-          <a:xfrm>
-            <a:off x="2834640" y="4178808"/>
+          <p:cNvPr id="51" name="Shape 49"/>
+          <p:cNvSpPr/>
+          <p:nvPr/>
+        </p:nvSpPr>
+        <p:spPr>
+          <a:xfrm>
+            <a:off x="2834640" y="4636008"/>
             <a:ext cx="1097280" cy="420624"/>
           </a:xfrm>
           <a:prstGeom prst="rect">
@@ -38661,13 +40754,13 @@
       </p:sp>
       <p:sp>
         <p:nvSpPr>
-          <p:cNvPr id="48" name="Text 46"/>
-          <p:cNvSpPr/>
-          <p:nvPr/>
-        </p:nvSpPr>
-        <p:spPr>
-          <a:xfrm>
-            <a:off x="2834640" y="4178808"/>
+          <p:cNvPr id="52" name="Text 50"/>
+          <p:cNvSpPr/>
+          <p:nvPr/>
+        </p:nvSpPr>
+        <p:spPr>
+          <a:xfrm>
+            <a:off x="2834640" y="4636008"/>
             <a:ext cx="1097280" cy="420624"/>
           </a:xfrm>
           <a:prstGeom prst="rect">
@@ -38700,13 +40793,13 @@
       </p:sp>
       <p:sp>
         <p:nvSpPr>
-          <p:cNvPr id="49" name="Text 47"/>
-          <p:cNvSpPr/>
-          <p:nvPr/>
-        </p:nvSpPr>
-        <p:spPr>
-          <a:xfrm>
-            <a:off x="3959352" y="4178808"/>
+          <p:cNvPr id="53" name="Text 51"/>
+          <p:cNvSpPr/>
+          <p:nvPr/>
+        </p:nvSpPr>
+        <p:spPr>
+          <a:xfrm>
+            <a:off x="3959352" y="4636008"/>
             <a:ext cx="320040" cy="420624"/>
           </a:xfrm>
           <a:prstGeom prst="rect">
@@ -38739,14 +40832,14 @@
       </p:sp>
       <p:sp>
         <p:nvSpPr>
-          <p:cNvPr id="50" name="Shape 48"/>
-          <p:cNvSpPr/>
-          <p:nvPr/>
-        </p:nvSpPr>
-        <p:spPr>
-          <a:xfrm>
-            <a:off x="4306824" y="4178808"/>
-            <a:ext cx="950976" cy="420624"/>
+          <p:cNvPr id="54" name="Shape 52"/>
+          <p:cNvSpPr/>
+          <p:nvPr/>
+        </p:nvSpPr>
+        <p:spPr>
+          <a:xfrm>
+            <a:off x="4306824" y="4636008"/>
+            <a:ext cx="822960" cy="420624"/>
           </a:xfrm>
           <a:prstGeom prst="rect">
             <a:avLst>
@@ -38773,14 +40866,14 @@
       </p:sp>
       <p:sp>
         <p:nvSpPr>
-          <p:cNvPr id="51" name="Text 49"/>
-          <p:cNvSpPr/>
-          <p:nvPr/>
-        </p:nvSpPr>
-        <p:spPr>
-          <a:xfrm>
-            <a:off x="4306824" y="4178808"/>
-            <a:ext cx="950976" cy="420624"/>
+          <p:cNvPr id="55" name="Text 53"/>
+          <p:cNvSpPr/>
+          <p:nvPr/>
+        </p:nvSpPr>
+        <p:spPr>
+          <a:xfrm>
+            <a:off x="4306824" y="4636008"/>
+            <a:ext cx="822960" cy="420624"/>
           </a:xfrm>
           <a:prstGeom prst="rect">
             <a:avLst/>
@@ -38804,7 +40897,7 @@
                 <a:ea typeface="Trebuchet MS" pitchFamily="34" charset="-122"/>
                 <a:cs typeface="Trebuchet MS" pitchFamily="34" charset="-120"/>
               </a:rPr>
-              <a:t>-ful</a:t>
+              <a:t>-ed</a:t>
             </a:r>
             <a:endParaRPr lang="en-US" sz="1300" dirty="0"/>
           </a:p>
@@ -38812,13 +40905,13 @@
       </p:sp>
       <p:sp>
         <p:nvSpPr>
-          <p:cNvPr id="52" name="Text 50"/>
-          <p:cNvSpPr/>
-          <p:nvPr/>
-        </p:nvSpPr>
-        <p:spPr>
-          <a:xfrm>
-            <a:off x="5330952" y="4178808"/>
+          <p:cNvPr id="56" name="Text 54"/>
+          <p:cNvSpPr/>
+          <p:nvPr/>
+        </p:nvSpPr>
+        <p:spPr>
+          <a:xfrm>
+            <a:off x="5202936" y="4636008"/>
             <a:ext cx="365760" cy="420624"/>
           </a:xfrm>
           <a:prstGeom prst="rect">
@@ -38851,13 +40944,13 @@
       </p:sp>
       <p:sp>
         <p:nvSpPr>
-          <p:cNvPr id="53" name="Shape 51"/>
-          <p:cNvSpPr/>
-          <p:nvPr/>
-        </p:nvSpPr>
-        <p:spPr>
-          <a:xfrm>
-            <a:off x="5742432" y="4178808"/>
+          <p:cNvPr id="57" name="Shape 55"/>
+          <p:cNvSpPr/>
+          <p:nvPr/>
+        </p:nvSpPr>
+        <p:spPr>
+          <a:xfrm>
+            <a:off x="5614416" y="4636008"/>
             <a:ext cx="2194560" cy="420624"/>
           </a:xfrm>
           <a:prstGeom prst="rect">
@@ -38878,13 +40971,13 @@
       </p:sp>
       <p:sp>
         <p:nvSpPr>
-          <p:cNvPr id="54" name="Text 52"/>
-          <p:cNvSpPr/>
-          <p:nvPr/>
-        </p:nvSpPr>
-        <p:spPr>
-          <a:xfrm>
-            <a:off x="5742432" y="4178808"/>
+          <p:cNvPr id="58" name="Text 56"/>
+          <p:cNvSpPr/>
+          <p:nvPr/>
+        </p:nvSpPr>
+        <p:spPr>
+          <a:xfrm>
+            <a:off x="5614416" y="4636008"/>
             <a:ext cx="2194560" cy="420624"/>
           </a:xfrm>
           <a:prstGeom prst="rect">
@@ -38909,7 +41002,7 @@
                 <a:ea typeface="Trebuchet MS" pitchFamily="34" charset="-122"/>
                 <a:cs typeface="Trebuchet MS" pitchFamily="34" charset="-120"/>
               </a:rPr>
-              <a:t>useful</a:t>
+              <a:t>use</a:t>
             </a:r>
             <a:endParaRPr lang="en-US" sz="1400" dirty="0"/>
           </a:p>
@@ -39201,7 +41294,7 @@
                 <a:ea typeface="Calibri" pitchFamily="34" charset="-122"/>
                 <a:cs typeface="Calibri" pitchFamily="34" charset="-120"/>
               </a:rPr>
-              <a:t>Word Labs  •  wordlabs.app  •  Root: 'use' = to employ or utilise</a:t>
+              <a:t>Word Labs  •  wordlabs.app  •  Root: 'use' = do something with</a:t>
             </a:r>
             <a:endParaRPr lang="en-US" sz="800" dirty="0"/>
           </a:p>
@@ -39313,7 +41406,7 @@
                 <a:ea typeface="Trebuchet MS" pitchFamily="34" charset="-122"/>
                 <a:cs typeface="Trebuchet MS" pitchFamily="34" charset="-120"/>
               </a:rPr>
-              <a:t>useful</a:t>
+              <a:t>use</a:t>
             </a:r>
             <a:endParaRPr lang="en-US" sz="1200" dirty="0"/>
           </a:p>
@@ -39379,7 +41472,7 @@
                 <a:ea typeface="Calibri" pitchFamily="34" charset="-122"/>
                 <a:cs typeface="Calibri" pitchFamily="34" charset="-120"/>
               </a:rPr>
-              <a:t>To use something too much, like overusing the same word in your writing.</a:t>
+              <a:t>to use something again instead of throwing it away</a:t>
             </a:r>
             <a:endParaRPr lang="en-US" sz="1200" dirty="0"/>
           </a:p>
@@ -39452,7 +41545,7 @@
                 <a:ea typeface="Trebuchet MS" pitchFamily="34" charset="-122"/>
                 <a:cs typeface="Trebuchet MS" pitchFamily="34" charset="-120"/>
               </a:rPr>
-              <a:t>useless</a:t>
+              <a:t>used</a:t>
             </a:r>
             <a:endParaRPr lang="en-US" sz="1200" dirty="0"/>
           </a:p>
@@ -39518,7 +41611,7 @@
                 <a:ea typeface="Calibri" pitchFamily="34" charset="-122"/>
                 <a:cs typeface="Calibri" pitchFamily="34" charset="-120"/>
               </a:rPr>
-              <a:t>Something that helps you get a job done, like a useful tool in the shed.</a:t>
+              <a:t>to employ something for a purpose</a:t>
             </a:r>
             <a:endParaRPr lang="en-US" sz="1200" dirty="0"/>
           </a:p>
@@ -39591,7 +41684,7 @@
                 <a:ea typeface="Trebuchet MS" pitchFamily="34" charset="-122"/>
                 <a:cs typeface="Trebuchet MS" pitchFamily="34" charset="-120"/>
               </a:rPr>
-              <a:t>misuse</a:t>
+              <a:t>user</a:t>
             </a:r>
             <a:endParaRPr lang="en-US" sz="1200" dirty="0"/>
           </a:p>
@@ -39657,7 +41750,7 @@
                 <a:ea typeface="Calibri" pitchFamily="34" charset="-122"/>
                 <a:cs typeface="Calibri" pitchFamily="34" charset="-120"/>
               </a:rPr>
-              <a:t>To use something again instead of throwing it away.</a:t>
+              <a:t>makes use of something for a purpose</a:t>
             </a:r>
             <a:endParaRPr lang="en-US" sz="1200" dirty="0"/>
           </a:p>
@@ -39730,7 +41823,7 @@
                 <a:ea typeface="Trebuchet MS" pitchFamily="34" charset="-122"/>
                 <a:cs typeface="Trebuchet MS" pitchFamily="34" charset="-120"/>
               </a:rPr>
-              <a:t>reuse</a:t>
+              <a:t>uses</a:t>
             </a:r>
             <a:endParaRPr lang="en-US" sz="1200" dirty="0"/>
           </a:p>
@@ -39796,7 +41889,7 @@
                 <a:ea typeface="Calibri" pitchFamily="34" charset="-122"/>
                 <a:cs typeface="Calibri" pitchFamily="34" charset="-120"/>
               </a:rPr>
-              <a:t>The way something is used, or how often it is used.</a:t>
+              <a:t>more than one person who uses something</a:t>
             </a:r>
             <a:endParaRPr lang="en-US" sz="1200" dirty="0"/>
           </a:p>
@@ -39869,7 +41962,7 @@
                 <a:ea typeface="Trebuchet MS" pitchFamily="34" charset="-122"/>
                 <a:cs typeface="Trebuchet MS" pitchFamily="34" charset="-120"/>
               </a:rPr>
-              <a:t>overuse</a:t>
+              <a:t>reuse</a:t>
             </a:r>
             <a:endParaRPr lang="en-US" sz="1200" dirty="0"/>
           </a:p>
@@ -39935,7 +42028,7 @@
                 <a:ea typeface="Calibri" pitchFamily="34" charset="-122"/>
                 <a:cs typeface="Calibri" pitchFamily="34" charset="-120"/>
               </a:rPr>
-              <a:t>Something that is in good enough condition to be used.</a:t>
+              <a:t>employing or operating something</a:t>
             </a:r>
             <a:endParaRPr lang="en-US" sz="1200" dirty="0"/>
           </a:p>
@@ -40008,7 +42101,7 @@
                 <a:ea typeface="Trebuchet MS" pitchFamily="34" charset="-122"/>
                 <a:cs typeface="Trebuchet MS" pitchFamily="34" charset="-120"/>
               </a:rPr>
-              <a:t>usage</a:t>
+              <a:t>users</a:t>
             </a:r>
             <a:endParaRPr lang="en-US" sz="1200" dirty="0"/>
           </a:p>
@@ -40074,7 +42167,7 @@
                 <a:ea typeface="Calibri" pitchFamily="34" charset="-122"/>
                 <a:cs typeface="Calibri" pitchFamily="34" charset="-120"/>
               </a:rPr>
-              <a:t>To use something in the wrong way or for the wrong reason.</a:t>
+              <a:t>a person who uses something, such as a computer or a service</a:t>
             </a:r>
             <a:endParaRPr lang="en-US" sz="1200" dirty="0"/>
           </a:p>
@@ -40147,7 +42240,7 @@
                 <a:ea typeface="Trebuchet MS" pitchFamily="34" charset="-122"/>
                 <a:cs typeface="Trebuchet MS" pitchFamily="34" charset="-120"/>
               </a:rPr>
-              <a:t>usable</a:t>
+              <a:t>using</a:t>
             </a:r>
             <a:endParaRPr lang="en-US" sz="1200" dirty="0"/>
           </a:p>
@@ -40213,7 +42306,7 @@
                 <a:ea typeface="Calibri" pitchFamily="34" charset="-122"/>
                 <a:cs typeface="Calibri" pitchFamily="34" charset="-120"/>
               </a:rPr>
-              <a:t>Something that cannot help at all, like a broken pencil with no lead.</a:t>
+              <a:t>employed something for a purpose, in the past</a:t>
             </a:r>
             <a:endParaRPr lang="en-US" sz="1200" dirty="0"/>
           </a:p>
@@ -40505,7 +42598,7 @@
                 <a:ea typeface="Calibri" pitchFamily="34" charset="-122"/>
                 <a:cs typeface="Calibri" pitchFamily="34" charset="-120"/>
               </a:rPr>
-              <a:t>Word Labs  •  wordlabs.app  •  Root: 'use' = to employ or utilise</a:t>
+              <a:t>Word Labs  •  wordlabs.app  •  Root: 'use' = do something with</a:t>
             </a:r>
             <a:endParaRPr lang="en-US" sz="800" dirty="0"/>
           </a:p>
@@ -40708,7 +42801,7 @@
                 <a:ea typeface="Calibri" pitchFamily="34" charset="-122"/>
                 <a:cs typeface="Calibri" pitchFamily="34" charset="-120"/>
               </a:rPr>
-              <a:t>Remember to reuse your plastic containers instead of throwing them in the bin.</a:t>
+              <a:t>You can use my pencil if yours breaks.</a:t>
             </a:r>
             <a:endParaRPr lang="en-US" sz="1500" dirty="0"/>
           </a:p>
@@ -40872,7 +42965,7 @@
                 <a:ea typeface="Calibri" pitchFamily="34" charset="-122"/>
                 <a:cs typeface="Calibri" pitchFamily="34" charset="-120"/>
               </a:rPr>
-              <a:t>The teacher reminded us that misuse of the school computers would have consequences.</a:t>
+              <a:t>She used her umbrella when the rain started.</a:t>
             </a:r>
             <a:endParaRPr lang="en-US" sz="1500" dirty="0"/>
           </a:p>
@@ -41036,7 +43129,7 @@
                 <a:ea typeface="Calibri" pitchFamily="34" charset="-122"/>
                 <a:cs typeface="Calibri" pitchFamily="34" charset="-120"/>
               </a:rPr>
-              <a:t>A good dictionary is a useful tool when you are writing a story.</a:t>
+              <a:t>Every user must create a password to log in.</a:t>
             </a:r>
             <a:endParaRPr lang="en-US" sz="1500" dirty="0"/>
           </a:p>
